--- a/docs/seminar/slides/세션4_테스트알고리즘과_성능측정.pptx
+++ b/docs/seminar/slides/세션4_테스트알고리즘과_성능측정.pptx
@@ -14,9 +14,11 @@
     <p:sldId id="262" r:id="rId8"/>
     <p:sldId id="263" r:id="rId9"/>
     <p:sldId id="264" r:id="rId10"/>
+    <p:sldId id="265" r:id="rId11"/>
+    <p:sldId id="266" r:id="rId12"/>
   </p:sldIdLst>
   <p:notesMasterIdLst>
-    <p:notesMasterId r:id="rId11"/>
+    <p:notesMasterId r:id="rId13"/>
   </p:notesMasterIdLst>
   <p:sldSz cx="12192000" cy="6858000"/>
   <p:notesSz cx="6858000" cy="12192000"/>
@@ -552,6 +554,182 @@
 </p:notes>
 </file>
 
+<file path=ppt/notesSlides/notesSlide10.xml><?xml version="1.0" encoding="utf-8"?>
+<p:notes xmlns:a="http://schemas.openxmlformats.org/drawingml/2006/main" xmlns:r="http://schemas.openxmlformats.org/officeDocument/2006/relationships" xmlns:p="http://schemas.openxmlformats.org/presentationml/2006/main">
+  <p:cSld>
+    <p:spTree>
+      <p:nvGrpSpPr>
+        <p:cNvPr id="1" name=""/>
+        <p:cNvGrpSpPr/>
+        <p:nvPr/>
+      </p:nvGrpSpPr>
+      <p:grpSpPr>
+        <a:xfrm>
+          <a:off x="0" y="0"/>
+          <a:ext cx="0" cy="0"/>
+          <a:chOff x="0" y="0"/>
+          <a:chExt cx="0" cy="0"/>
+        </a:xfrm>
+      </p:grpSpPr>
+      <p:sp>
+        <p:nvSpPr>
+          <p:cNvPr id="2" name="Slide Image Placeholder 1"/>
+          <p:cNvSpPr>
+            <a:spLocks noGrp="1" noRot="1" noChangeAspect="1"/>
+          </p:cNvSpPr>
+          <p:nvPr>
+            <p:ph type="sldImg"/>
+          </p:nvPr>
+        </p:nvSpPr>
+        <p:spPr/>
+      </p:sp>
+      <p:sp>
+        <p:nvSpPr>
+          <p:cNvPr id="3" name="Notes Placeholder 2"/>
+          <p:cNvSpPr>
+            <a:spLocks noGrp="1"/>
+          </p:cNvSpPr>
+          <p:nvPr>
+            <p:ph type="body" idx="1"/>
+          </p:nvPr>
+        </p:nvSpPr>
+        <p:spPr/>
+        <p:txBody>
+          <a:bodyPr/>
+          <a:lstStyle/>
+          <a:p>
+            <a:r>
+              <a:rPr lang="en-US" dirty="0"/>
+              <a:t>Ex 2로 비트 연산을 손으로 따라가면 패턴 생성이 확실히 이해됩니다.</a:t>
+            </a:r>
+            <a:endParaRPr lang="en-US" dirty="0"/>
+          </a:p>
+        </p:txBody>
+      </p:sp>
+      <p:sp>
+        <p:nvSpPr>
+          <p:cNvPr id="4" name="Slide Number Placeholder 3"/>
+          <p:cNvSpPr>
+            <a:spLocks noGrp="1"/>
+          </p:cNvSpPr>
+          <p:nvPr>
+            <p:ph type="sldNum" sz="quarter" idx="10"/>
+          </p:nvPr>
+        </p:nvSpPr>
+        <p:spPr/>
+        <p:txBody>
+          <a:bodyPr/>
+          <a:lstStyle/>
+          <a:p>
+            <a:fld id="{F7021451-1387-4CA6-816F-3879F97B5CBC}" type="slidenum">
+              <a:rPr lang="en-US"/>
+              <a:t>10</a:t>
+            </a:fld>
+            <a:endParaRPr lang="en-US"/>
+          </a:p>
+        </p:txBody>
+      </p:sp>
+    </p:spTree>
+    <p:extLst>
+      <p:ext uri="{BB962C8B-B14F-4D97-AF65-F5344CB8AC3E}">
+        <p14:creationId xmlns:p14="http://schemas.microsoft.com/office/powerpoint/2010/main" val="1024086991"/>
+      </p:ext>
+    </p:extLst>
+  </p:cSld>
+  <p:clrMapOvr>
+    <a:masterClrMapping/>
+  </p:clrMapOvr>
+</p:notes>
+</file>
+
+<file path=ppt/notesSlides/notesSlide11.xml><?xml version="1.0" encoding="utf-8"?>
+<p:notes xmlns:a="http://schemas.openxmlformats.org/drawingml/2006/main" xmlns:r="http://schemas.openxmlformats.org/officeDocument/2006/relationships" xmlns:p="http://schemas.openxmlformats.org/presentationml/2006/main">
+  <p:cSld>
+    <p:spTree>
+      <p:nvGrpSpPr>
+        <p:cNvPr id="1" name=""/>
+        <p:cNvGrpSpPr/>
+        <p:nvPr/>
+      </p:nvGrpSpPr>
+      <p:grpSpPr>
+        <a:xfrm>
+          <a:off x="0" y="0"/>
+          <a:ext cx="0" cy="0"/>
+          <a:chOff x="0" y="0"/>
+          <a:chExt cx="0" cy="0"/>
+        </a:xfrm>
+      </p:grpSpPr>
+      <p:sp>
+        <p:nvSpPr>
+          <p:cNvPr id="2" name="Slide Image Placeholder 1"/>
+          <p:cNvSpPr>
+            <a:spLocks noGrp="1" noRot="1" noChangeAspect="1"/>
+          </p:cNvSpPr>
+          <p:nvPr>
+            <p:ph type="sldImg"/>
+          </p:nvPr>
+        </p:nvSpPr>
+        <p:spPr/>
+      </p:sp>
+      <p:sp>
+        <p:nvSpPr>
+          <p:cNvPr id="3" name="Notes Placeholder 2"/>
+          <p:cNvSpPr>
+            <a:spLocks noGrp="1"/>
+          </p:cNvSpPr>
+          <p:nvPr>
+            <p:ph type="body" idx="1"/>
+          </p:nvPr>
+        </p:nvSpPr>
+        <p:spPr/>
+        <p:txBody>
+          <a:bodyPr/>
+          <a:lstStyle/>
+          <a:p>
+            <a:r>
+              <a:rPr lang="en-US" dirty="0"/>
+              <a:t/>
+            </a:r>
+            <a:endParaRPr lang="en-US" dirty="0"/>
+          </a:p>
+        </p:txBody>
+      </p:sp>
+      <p:sp>
+        <p:nvSpPr>
+          <p:cNvPr id="4" name="Slide Number Placeholder 3"/>
+          <p:cNvSpPr>
+            <a:spLocks noGrp="1"/>
+          </p:cNvSpPr>
+          <p:nvPr>
+            <p:ph type="sldNum" sz="quarter" idx="10"/>
+          </p:nvPr>
+        </p:nvSpPr>
+        <p:spPr/>
+        <p:txBody>
+          <a:bodyPr/>
+          <a:lstStyle/>
+          <a:p>
+            <a:fld id="{F7021451-1387-4CA6-816F-3879F97B5CBC}" type="slidenum">
+              <a:rPr lang="en-US"/>
+              <a:t>11</a:t>
+            </a:fld>
+            <a:endParaRPr lang="en-US"/>
+          </a:p>
+        </p:txBody>
+      </p:sp>
+    </p:spTree>
+    <p:extLst>
+      <p:ext uri="{BB962C8B-B14F-4D97-AF65-F5344CB8AC3E}">
+        <p14:creationId xmlns:p14="http://schemas.microsoft.com/office/powerpoint/2010/main" val="1024086991"/>
+      </p:ext>
+    </p:extLst>
+  </p:cSld>
+  <p:clrMapOvr>
+    <a:masterClrMapping/>
+  </p:clrMapOvr>
+</p:notes>
+</file>
+
 <file path=ppt/notesSlides/notesSlide2.xml><?xml version="1.0" encoding="utf-8"?>
 <p:notes xmlns:a="http://schemas.openxmlformats.org/drawingml/2006/main" xmlns:r="http://schemas.openxmlformats.org/officeDocument/2006/relationships" xmlns:p="http://schemas.openxmlformats.org/presentationml/2006/main">
   <p:cSld>
@@ -862,7 +1040,7 @@
           <a:p>
             <a:r>
               <a:rPr lang="en-US" dirty="0"/>
-              <a:t>둘 다 매 iteration마다 새 rand() 값을 받아 실행마다 커버리지를 넓힙니다(cli.cu:268,278).</a:t>
+              <a:t>켜진 비트가 대각선으로 내려가는 모습이 'walking'. 오른쪽 16진수는 워드 복제 결과로, 코드와 대조하게 하세요.</a:t>
             </a:r>
             <a:endParaRPr lang="en-US" dirty="0"/>
           </a:p>
@@ -950,7 +1128,7 @@
           <a:p>
             <a:r>
               <a:rPr lang="en-US" dirty="0"/>
-              <a:t>메모리 저장이 아니라 ALU·반복 제어를 검사한다는 발상이 독특. 오버클럭 안정성 검증에 특히 유용합니다.</a:t>
+              <a:t>둘 다 매 iteration마다 새 rand() 값을 받아 실행마다 커버리지를 넓힙니다(cli.cu:268,278).</a:t>
             </a:r>
             <a:endParaRPr lang="en-US" dirty="0"/>
           </a:p>
@@ -1038,7 +1216,7 @@
           <a:p>
             <a:r>
               <a:rPr lang="en-US" dirty="0"/>
-              <a:t>CUDA 이벤트 대신 밀리초 타이머 + cudaThreadSynchronize를 씀. 비동기성이 왜 함정인지가 핵심 교훈입니다.</a:t>
+              <a:t>메모리 저장이 아니라 ALU·반복 제어를 검사한다는 발상이 독특. 오버클럭 안정성 검증에 특히 유용합니다.</a:t>
             </a:r>
             <a:endParaRPr lang="en-US" dirty="0"/>
           </a:p>
@@ -1126,7 +1304,7 @@
           <a:p>
             <a:r>
               <a:rPr lang="en-US" dirty="0"/>
-              <a:t>Ex 2로 비트 연산을 손으로 따라가면 패턴 생성이 확실히 이해됩니다.</a:t>
+              <a:t>CUDA 이벤트 대신 밀리초 타이머 + cudaThreadSynchronize를 씀. 비동기성이 왜 함정인지가 핵심 교훈입니다.</a:t>
             </a:r>
             <a:endParaRPr lang="en-US" dirty="0"/>
           </a:p>
@@ -1214,7 +1392,7 @@
           <a:p>
             <a:r>
               <a:rPr lang="en-US" dirty="0"/>
-              <a:t/>
+              <a:t>읽기 화살표 + 쓰기 화살표 두 개로 '왜 ×2'를 시각화. 동기화 함정은 Lab 4 Exercise 4에서 직접 재현합니다.</a:t>
             </a:r>
             <a:endParaRPr lang="en-US" dirty="0"/>
           </a:p>
@@ -1863,6 +2041,1018 @@
 </p:sld>
 </file>
 
+<file path=ppt/slides/slide10.xml><?xml version="1.0" encoding="utf-8"?>
+<p:sld xmlns:a="http://schemas.openxmlformats.org/drawingml/2006/main" xmlns:r="http://schemas.openxmlformats.org/officeDocument/2006/relationships" xmlns:p="http://schemas.openxmlformats.org/presentationml/2006/main">
+  <p:cSld name="Slide 10">
+    <p:bg>
+      <p:bgPr>
+        <a:solidFill>
+          <a:srgbClr val="101722"/>
+        </a:solidFill>
+      </p:bgPr>
+    </p:bg>
+    <p:spTree>
+      <p:nvGrpSpPr>
+        <p:cNvPr id="1" name=""/>
+        <p:cNvGrpSpPr/>
+        <p:nvPr/>
+      </p:nvGrpSpPr>
+      <p:grpSpPr>
+        <a:xfrm>
+          <a:off x="0" y="0"/>
+          <a:ext cx="0" cy="0"/>
+          <a:chOff x="0" y="0"/>
+          <a:chExt cx="0" cy="0"/>
+        </a:xfrm>
+      </p:grpSpPr>
+      <p:sp>
+        <p:nvSpPr>
+          <p:cNvPr id="2" name="Text 0"/>
+          <p:cNvSpPr/>
+          <p:nvPr/>
+        </p:nvSpPr>
+        <p:spPr>
+          <a:xfrm>
+            <a:off x="548640" y="411480"/>
+            <a:ext cx="658368" cy="658368"/>
+          </a:xfrm>
+          <a:prstGeom prst="roundRect">
+            <a:avLst>
+              <a:gd name="adj" fmla="val 13889"/>
+            </a:avLst>
+          </a:prstGeom>
+          <a:solidFill>
+            <a:srgbClr val="E8A33D"/>
+          </a:solidFill>
+          <a:ln/>
+        </p:spPr>
+        <p:txBody>
+          <a:bodyPr wrap="square" rtlCol="0" anchor="ctr"/>
+          <a:lstStyle/>
+          <a:p>
+            <a:pPr algn="ctr" indent="0" marL="0">
+              <a:buNone/>
+            </a:pPr>
+            <a:r>
+              <a:rPr lang="en-US" sz="2200" b="1" dirty="0">
+                <a:solidFill>
+                  <a:srgbClr val="101722"/>
+                </a:solidFill>
+                <a:latin typeface="Courier New" pitchFamily="34" charset="0"/>
+                <a:ea typeface="Courier New" pitchFamily="34" charset="-122"/>
+                <a:cs typeface="Courier New" pitchFamily="34" charset="-120"/>
+              </a:rPr>
+              <a:t>7</a:t>
+            </a:r>
+            <a:endParaRPr lang="en-US" sz="2200" dirty="0"/>
+          </a:p>
+        </p:txBody>
+      </p:sp>
+      <p:sp>
+        <p:nvSpPr>
+          <p:cNvPr id="3" name="Text 1"/>
+          <p:cNvSpPr/>
+          <p:nvPr/>
+        </p:nvSpPr>
+        <p:spPr>
+          <a:xfrm>
+            <a:off x="1371600" y="384048"/>
+            <a:ext cx="10241280" cy="713232"/>
+          </a:xfrm>
+          <a:prstGeom prst="rect">
+            <a:avLst/>
+          </a:prstGeom>
+          <a:noFill/>
+          <a:ln/>
+        </p:spPr>
+        <p:txBody>
+          <a:bodyPr wrap="square" lIns="0" tIns="0" rIns="0" bIns="0" rtlCol="0" anchor="ctr"/>
+          <a:lstStyle/>
+          <a:p>
+            <a:pPr algn="l" indent="0" marL="0">
+              <a:buNone/>
+            </a:pPr>
+            <a:r>
+              <a:rPr lang="en-US" sz="2900" b="1" dirty="0">
+                <a:solidFill>
+                  <a:srgbClr val="E7EDF5"/>
+                </a:solidFill>
+                <a:latin typeface="Malgun Gothic" pitchFamily="34" charset="0"/>
+                <a:ea typeface="Malgun Gothic" pitchFamily="34" charset="-122"/>
+                <a:cs typeface="Malgun Gothic" pitchFamily="34" charset="-120"/>
+              </a:rPr>
+              <a:t>실습 미리보기 · Lab 4</a:t>
+            </a:r>
+            <a:endParaRPr lang="en-US" sz="2900" dirty="0"/>
+          </a:p>
+        </p:txBody>
+      </p:sp>
+      <p:sp>
+        <p:nvSpPr>
+          <p:cNvPr id="4" name="Shape 2"/>
+          <p:cNvSpPr/>
+          <p:nvPr/>
+        </p:nvSpPr>
+        <p:spPr>
+          <a:xfrm>
+            <a:off x="548640" y="1600200"/>
+            <a:ext cx="5303520" cy="1920240"/>
+          </a:xfrm>
+          <a:prstGeom prst="roundRect">
+            <a:avLst>
+              <a:gd name="adj" fmla="val 3810"/>
+            </a:avLst>
+          </a:prstGeom>
+          <a:solidFill>
+            <a:srgbClr val="18212E"/>
+          </a:solidFill>
+          <a:ln/>
+        </p:spPr>
+      </p:sp>
+      <p:sp>
+        <p:nvSpPr>
+          <p:cNvPr id="5" name="Text 3"/>
+          <p:cNvSpPr/>
+          <p:nvPr/>
+        </p:nvSpPr>
+        <p:spPr>
+          <a:xfrm>
+            <a:off x="804672" y="1801368"/>
+            <a:ext cx="1188720" cy="502920"/>
+          </a:xfrm>
+          <a:prstGeom prst="roundRect">
+            <a:avLst>
+              <a:gd name="adj" fmla="val 14545"/>
+            </a:avLst>
+          </a:prstGeom>
+          <a:solidFill>
+            <a:srgbClr val="E8A33D"/>
+          </a:solidFill>
+          <a:ln/>
+        </p:spPr>
+        <p:txBody>
+          <a:bodyPr wrap="square" rtlCol="0" anchor="ctr"/>
+          <a:lstStyle/>
+          <a:p>
+            <a:pPr algn="ctr" indent="0" marL="0">
+              <a:buNone/>
+            </a:pPr>
+            <a:r>
+              <a:rPr lang="en-US" sz="1700" b="1" dirty="0">
+                <a:solidFill>
+                  <a:srgbClr val="101722"/>
+                </a:solidFill>
+                <a:latin typeface="Courier New" pitchFamily="34" charset="0"/>
+                <a:ea typeface="Courier New" pitchFamily="34" charset="-122"/>
+                <a:cs typeface="Courier New" pitchFamily="34" charset="-120"/>
+              </a:rPr>
+              <a:t>Ex 1</a:t>
+            </a:r>
+            <a:endParaRPr lang="en-US" sz="1700" dirty="0"/>
+          </a:p>
+        </p:txBody>
+      </p:sp>
+      <p:sp>
+        <p:nvSpPr>
+          <p:cNvPr id="6" name="Text 4"/>
+          <p:cNvSpPr/>
+          <p:nvPr/>
+        </p:nvSpPr>
+        <p:spPr>
+          <a:xfrm>
+            <a:off x="2148840" y="1819656"/>
+            <a:ext cx="3474720" cy="822960"/>
+          </a:xfrm>
+          <a:prstGeom prst="rect">
+            <a:avLst/>
+          </a:prstGeom>
+          <a:noFill/>
+          <a:ln/>
+        </p:spPr>
+        <p:txBody>
+          <a:bodyPr wrap="square" lIns="0" tIns="0" rIns="0" bIns="0" rtlCol="0" anchor="t"/>
+          <a:lstStyle/>
+          <a:p>
+            <a:pPr indent="0" marL="0">
+              <a:buNone/>
+            </a:pPr>
+            <a:r>
+              <a:rPr lang="en-US" sz="1800" b="1" dirty="0">
+                <a:solidFill>
+                  <a:srgbClr val="E7EDF5"/>
+                </a:solidFill>
+                <a:latin typeface="Malgun Gothic" pitchFamily="34" charset="0"/>
+                <a:ea typeface="Malgun Gothic" pitchFamily="34" charset="-122"/>
+                <a:cs typeface="Malgun Gothic" pitchFamily="34" charset="-120"/>
+              </a:rPr>
+              <a:t>테스트 순서 읽기</a:t>
+            </a:r>
+            <a:endParaRPr lang="en-US" sz="1800" dirty="0"/>
+          </a:p>
+        </p:txBody>
+      </p:sp>
+      <p:sp>
+        <p:nvSpPr>
+          <p:cNvPr id="7" name="Text 5"/>
+          <p:cNvSpPr/>
+          <p:nvPr/>
+        </p:nvSpPr>
+        <p:spPr>
+          <a:xfrm>
+            <a:off x="804672" y="2697480"/>
+            <a:ext cx="4791456" cy="731520"/>
+          </a:xfrm>
+          <a:prstGeom prst="rect">
+            <a:avLst/>
+          </a:prstGeom>
+          <a:noFill/>
+          <a:ln/>
+        </p:spPr>
+        <p:txBody>
+          <a:bodyPr wrap="square" lIns="0" tIns="0" rIns="0" bIns="0" rtlCol="0" anchor="t"/>
+          <a:lstStyle/>
+          <a:p>
+            <a:pPr indent="0" marL="0">
+              <a:lnSpc>
+                <a:spcPct val="110000"/>
+              </a:lnSpc>
+              <a:buNone/>
+            </a:pPr>
+            <a:r>
+              <a:rPr lang="en-US" sz="1350" dirty="0">
+                <a:solidFill>
+                  <a:srgbClr val="9FB0C4"/>
+                </a:solidFill>
+                <a:latin typeface="Malgun Gothic" pitchFamily="34" charset="0"/>
+                <a:ea typeface="Malgun Gothic" pitchFamily="34" charset="-122"/>
+                <a:cs typeface="Malgun Gothic" pitchFamily="34" charset="-120"/>
+              </a:rPr>
+              <a:t>cli.cu의 for 루프에서 13종 실행 순서 확인</a:t>
+            </a:r>
+            <a:endParaRPr lang="en-US" sz="1350" dirty="0"/>
+          </a:p>
+        </p:txBody>
+      </p:sp>
+      <p:sp>
+        <p:nvSpPr>
+          <p:cNvPr id="8" name="Shape 6"/>
+          <p:cNvSpPr/>
+          <p:nvPr/>
+        </p:nvSpPr>
+        <p:spPr>
+          <a:xfrm>
+            <a:off x="6309360" y="1600200"/>
+            <a:ext cx="5303520" cy="1920240"/>
+          </a:xfrm>
+          <a:prstGeom prst="roundRect">
+            <a:avLst>
+              <a:gd name="adj" fmla="val 3810"/>
+            </a:avLst>
+          </a:prstGeom>
+          <a:solidFill>
+            <a:srgbClr val="18212E"/>
+          </a:solidFill>
+          <a:ln/>
+        </p:spPr>
+      </p:sp>
+      <p:sp>
+        <p:nvSpPr>
+          <p:cNvPr id="9" name="Text 7"/>
+          <p:cNvSpPr/>
+          <p:nvPr/>
+        </p:nvSpPr>
+        <p:spPr>
+          <a:xfrm>
+            <a:off x="6565392" y="1801368"/>
+            <a:ext cx="1188720" cy="502920"/>
+          </a:xfrm>
+          <a:prstGeom prst="roundRect">
+            <a:avLst>
+              <a:gd name="adj" fmla="val 14545"/>
+            </a:avLst>
+          </a:prstGeom>
+          <a:solidFill>
+            <a:srgbClr val="3FB8C4"/>
+          </a:solidFill>
+          <a:ln/>
+        </p:spPr>
+        <p:txBody>
+          <a:bodyPr wrap="square" rtlCol="0" anchor="ctr"/>
+          <a:lstStyle/>
+          <a:p>
+            <a:pPr algn="ctr" indent="0" marL="0">
+              <a:buNone/>
+            </a:pPr>
+            <a:r>
+              <a:rPr lang="en-US" sz="1700" b="1" dirty="0">
+                <a:solidFill>
+                  <a:srgbClr val="101722"/>
+                </a:solidFill>
+                <a:latin typeface="Courier New" pitchFamily="34" charset="0"/>
+                <a:ea typeface="Courier New" pitchFamily="34" charset="-122"/>
+                <a:cs typeface="Courier New" pitchFamily="34" charset="-120"/>
+              </a:rPr>
+              <a:t>Ex 2</a:t>
+            </a:r>
+            <a:endParaRPr lang="en-US" sz="1700" dirty="0"/>
+          </a:p>
+        </p:txBody>
+      </p:sp>
+      <p:sp>
+        <p:nvSpPr>
+          <p:cNvPr id="10" name="Text 8"/>
+          <p:cNvSpPr/>
+          <p:nvPr/>
+        </p:nvSpPr>
+        <p:spPr>
+          <a:xfrm>
+            <a:off x="7909560" y="1819656"/>
+            <a:ext cx="3474720" cy="822960"/>
+          </a:xfrm>
+          <a:prstGeom prst="rect">
+            <a:avLst/>
+          </a:prstGeom>
+          <a:noFill/>
+          <a:ln/>
+        </p:spPr>
+        <p:txBody>
+          <a:bodyPr wrap="square" lIns="0" tIns="0" rIns="0" bIns="0" rtlCol="0" anchor="t"/>
+          <a:lstStyle/>
+          <a:p>
+            <a:pPr indent="0" marL="0">
+              <a:buNone/>
+            </a:pPr>
+            <a:r>
+              <a:rPr lang="en-US" sz="1800" b="1" dirty="0">
+                <a:solidFill>
+                  <a:srgbClr val="E7EDF5"/>
+                </a:solidFill>
+                <a:latin typeface="Malgun Gothic" pitchFamily="34" charset="0"/>
+                <a:ea typeface="Malgun Gothic" pitchFamily="34" charset="-122"/>
+                <a:cs typeface="Malgun Gothic" pitchFamily="34" charset="-120"/>
+              </a:rPr>
+              <a:t>패턴 손으로 계산</a:t>
+            </a:r>
+            <a:endParaRPr lang="en-US" sz="1800" dirty="0"/>
+          </a:p>
+        </p:txBody>
+      </p:sp>
+      <p:sp>
+        <p:nvSpPr>
+          <p:cNvPr id="11" name="Text 9"/>
+          <p:cNvSpPr/>
+          <p:nvPr/>
+        </p:nvSpPr>
+        <p:spPr>
+          <a:xfrm>
+            <a:off x="6565392" y="2697480"/>
+            <a:ext cx="4791456" cy="731520"/>
+          </a:xfrm>
+          <a:prstGeom prst="rect">
+            <a:avLst/>
+          </a:prstGeom>
+          <a:noFill/>
+          <a:ln/>
+        </p:spPr>
+        <p:txBody>
+          <a:bodyPr wrap="square" lIns="0" tIns="0" rIns="0" bIns="0" rtlCol="0" anchor="t"/>
+          <a:lstStyle/>
+          <a:p>
+            <a:pPr indent="0" marL="0">
+              <a:lnSpc>
+                <a:spcPct val="110000"/>
+              </a:lnSpc>
+              <a:buNone/>
+            </a:pPr>
+            <a:r>
+              <a:rPr lang="en-US" sz="1350" dirty="0">
+                <a:solidFill>
+                  <a:srgbClr val="9FB0C4"/>
+                </a:solidFill>
+                <a:latin typeface="Malgun Gothic" pitchFamily="34" charset="0"/>
+                <a:ea typeface="Malgun Gothic" pitchFamily="34" charset="-122"/>
+                <a:cs typeface="Malgun Gothic" pitchFamily="34" charset="-120"/>
+              </a:rPr>
+              <a:t>shift별 Walking 패턴을 종이에 적고 코드와 대조</a:t>
+            </a:r>
+            <a:endParaRPr lang="en-US" sz="1350" dirty="0"/>
+          </a:p>
+        </p:txBody>
+      </p:sp>
+      <p:sp>
+        <p:nvSpPr>
+          <p:cNvPr id="12" name="Shape 10"/>
+          <p:cNvSpPr/>
+          <p:nvPr/>
+        </p:nvSpPr>
+        <p:spPr>
+          <a:xfrm>
+            <a:off x="548640" y="3840480"/>
+            <a:ext cx="5303520" cy="1920240"/>
+          </a:xfrm>
+          <a:prstGeom prst="roundRect">
+            <a:avLst>
+              <a:gd name="adj" fmla="val 3810"/>
+            </a:avLst>
+          </a:prstGeom>
+          <a:solidFill>
+            <a:srgbClr val="18212E"/>
+          </a:solidFill>
+          <a:ln/>
+        </p:spPr>
+      </p:sp>
+      <p:sp>
+        <p:nvSpPr>
+          <p:cNvPr id="13" name="Text 11"/>
+          <p:cNvSpPr/>
+          <p:nvPr/>
+        </p:nvSpPr>
+        <p:spPr>
+          <a:xfrm>
+            <a:off x="804672" y="4041648"/>
+            <a:ext cx="1188720" cy="502920"/>
+          </a:xfrm>
+          <a:prstGeom prst="roundRect">
+            <a:avLst>
+              <a:gd name="adj" fmla="val 14545"/>
+            </a:avLst>
+          </a:prstGeom>
+          <a:solidFill>
+            <a:srgbClr val="E8A33D"/>
+          </a:solidFill>
+          <a:ln/>
+        </p:spPr>
+        <p:txBody>
+          <a:bodyPr wrap="square" rtlCol="0" anchor="ctr"/>
+          <a:lstStyle/>
+          <a:p>
+            <a:pPr algn="ctr" indent="0" marL="0">
+              <a:buNone/>
+            </a:pPr>
+            <a:r>
+              <a:rPr lang="en-US" sz="1700" b="1" dirty="0">
+                <a:solidFill>
+                  <a:srgbClr val="101722"/>
+                </a:solidFill>
+                <a:latin typeface="Courier New" pitchFamily="34" charset="0"/>
+                <a:ea typeface="Courier New" pitchFamily="34" charset="-122"/>
+                <a:cs typeface="Courier New" pitchFamily="34" charset="-120"/>
+              </a:rPr>
+              <a:t>Ex 3</a:t>
+            </a:r>
+            <a:endParaRPr lang="en-US" sz="1700" dirty="0"/>
+          </a:p>
+        </p:txBody>
+      </p:sp>
+      <p:sp>
+        <p:nvSpPr>
+          <p:cNvPr id="14" name="Text 12"/>
+          <p:cNvSpPr/>
+          <p:nvPr/>
+        </p:nvSpPr>
+        <p:spPr>
+          <a:xfrm>
+            <a:off x="2148840" y="4059936"/>
+            <a:ext cx="3474720" cy="822960"/>
+          </a:xfrm>
+          <a:prstGeom prst="rect">
+            <a:avLst/>
+          </a:prstGeom>
+          <a:noFill/>
+          <a:ln/>
+        </p:spPr>
+        <p:txBody>
+          <a:bodyPr wrap="square" lIns="0" tIns="0" rIns="0" bIns="0" rtlCol="0" anchor="t"/>
+          <a:lstStyle/>
+          <a:p>
+            <a:pPr indent="0" marL="0">
+              <a:buNone/>
+            </a:pPr>
+            <a:r>
+              <a:rPr lang="en-US" sz="1800" b="1" dirty="0">
+                <a:solidFill>
+                  <a:srgbClr val="E7EDF5"/>
+                </a:solidFill>
+                <a:latin typeface="Malgun Gothic" pitchFamily="34" charset="0"/>
+                <a:ea typeface="Malgun Gothic" pitchFamily="34" charset="-122"/>
+                <a:cs typeface="Malgun Gothic" pitchFamily="34" charset="-120"/>
+              </a:rPr>
+              <a:t>LCG 0 확인</a:t>
+            </a:r>
+            <a:endParaRPr lang="en-US" sz="1800" dirty="0"/>
+          </a:p>
+        </p:txBody>
+      </p:sp>
+      <p:sp>
+        <p:nvSpPr>
+          <p:cNvPr id="15" name="Text 13"/>
+          <p:cNvSpPr/>
+          <p:nvPr/>
+        </p:nvSpPr>
+        <p:spPr>
+          <a:xfrm>
+            <a:off x="804672" y="4937760"/>
+            <a:ext cx="4791456" cy="731520"/>
+          </a:xfrm>
+          <a:prstGeom prst="rect">
+            <a:avLst/>
+          </a:prstGeom>
+          <a:noFill/>
+          <a:ln/>
+        </p:spPr>
+        <p:txBody>
+          <a:bodyPr wrap="square" lIns="0" tIns="0" rIns="0" bIns="0" rtlCol="0" anchor="t"/>
+          <a:lstStyle/>
+          <a:p>
+            <a:pPr indent="0" marL="0">
+              <a:lnSpc>
+                <a:spcPct val="110000"/>
+              </a:lnSpc>
+              <a:buNone/>
+            </a:pPr>
+            <a:r>
+              <a:rPr lang="en-US" sz="1350" dirty="0">
+                <a:solidFill>
+                  <a:srgbClr val="9FB0C4"/>
+                </a:solidFill>
+                <a:latin typeface="Malgun Gothic" pitchFamily="34" charset="0"/>
+                <a:ea typeface="Malgun Gothic" pitchFamily="34" charset="-122"/>
+                <a:cs typeface="Malgun Gothic" pitchFamily="34" charset="-120"/>
+              </a:rPr>
+              <a:t>value가 0으로 돌아오는지 중간값 출력</a:t>
+            </a:r>
+            <a:endParaRPr lang="en-US" sz="1350" dirty="0"/>
+          </a:p>
+        </p:txBody>
+      </p:sp>
+      <p:sp>
+        <p:nvSpPr>
+          <p:cNvPr id="16" name="Shape 14"/>
+          <p:cNvSpPr/>
+          <p:nvPr/>
+        </p:nvSpPr>
+        <p:spPr>
+          <a:xfrm>
+            <a:off x="6309360" y="3840480"/>
+            <a:ext cx="5303520" cy="1920240"/>
+          </a:xfrm>
+          <a:prstGeom prst="roundRect">
+            <a:avLst>
+              <a:gd name="adj" fmla="val 3810"/>
+            </a:avLst>
+          </a:prstGeom>
+          <a:solidFill>
+            <a:srgbClr val="18212E"/>
+          </a:solidFill>
+          <a:ln/>
+        </p:spPr>
+      </p:sp>
+      <p:sp>
+        <p:nvSpPr>
+          <p:cNvPr id="17" name="Text 15"/>
+          <p:cNvSpPr/>
+          <p:nvPr/>
+        </p:nvSpPr>
+        <p:spPr>
+          <a:xfrm>
+            <a:off x="6565392" y="4041648"/>
+            <a:ext cx="1188720" cy="502920"/>
+          </a:xfrm>
+          <a:prstGeom prst="roundRect">
+            <a:avLst>
+              <a:gd name="adj" fmla="val 14545"/>
+            </a:avLst>
+          </a:prstGeom>
+          <a:solidFill>
+            <a:srgbClr val="3FB8C4"/>
+          </a:solidFill>
+          <a:ln/>
+        </p:spPr>
+        <p:txBody>
+          <a:bodyPr wrap="square" rtlCol="0" anchor="ctr"/>
+          <a:lstStyle/>
+          <a:p>
+            <a:pPr algn="ctr" indent="0" marL="0">
+              <a:buNone/>
+            </a:pPr>
+            <a:r>
+              <a:rPr lang="en-US" sz="1700" b="1" dirty="0">
+                <a:solidFill>
+                  <a:srgbClr val="101722"/>
+                </a:solidFill>
+                <a:latin typeface="Courier New" pitchFamily="34" charset="0"/>
+                <a:ea typeface="Courier New" pitchFamily="34" charset="-122"/>
+                <a:cs typeface="Courier New" pitchFamily="34" charset="-120"/>
+              </a:rPr>
+              <a:t>Ex 4</a:t>
+            </a:r>
+            <a:endParaRPr lang="en-US" sz="1700" dirty="0"/>
+          </a:p>
+        </p:txBody>
+      </p:sp>
+      <p:sp>
+        <p:nvSpPr>
+          <p:cNvPr id="18" name="Text 16"/>
+          <p:cNvSpPr/>
+          <p:nvPr/>
+        </p:nvSpPr>
+        <p:spPr>
+          <a:xfrm>
+            <a:off x="7909560" y="4059936"/>
+            <a:ext cx="3474720" cy="822960"/>
+          </a:xfrm>
+          <a:prstGeom prst="rect">
+            <a:avLst/>
+          </a:prstGeom>
+          <a:noFill/>
+          <a:ln/>
+        </p:spPr>
+        <p:txBody>
+          <a:bodyPr wrap="square" lIns="0" tIns="0" rIns="0" bIns="0" rtlCol="0" anchor="t"/>
+          <a:lstStyle/>
+          <a:p>
+            <a:pPr indent="0" marL="0">
+              <a:buNone/>
+            </a:pPr>
+            <a:r>
+              <a:rPr lang="en-US" sz="1800" b="1" dirty="0">
+                <a:solidFill>
+                  <a:srgbClr val="E7EDF5"/>
+                </a:solidFill>
+                <a:latin typeface="Malgun Gothic" pitchFamily="34" charset="0"/>
+                <a:ea typeface="Malgun Gothic" pitchFamily="34" charset="-122"/>
+                <a:cs typeface="Malgun Gothic" pitchFamily="34" charset="-120"/>
+              </a:rPr>
+              <a:t>대역폭 재보기</a:t>
+            </a:r>
+            <a:endParaRPr lang="en-US" sz="1800" dirty="0"/>
+          </a:p>
+        </p:txBody>
+      </p:sp>
+      <p:sp>
+        <p:nvSpPr>
+          <p:cNvPr id="19" name="Text 17"/>
+          <p:cNvSpPr/>
+          <p:nvPr/>
+        </p:nvSpPr>
+        <p:spPr>
+          <a:xfrm>
+            <a:off x="6565392" y="4937760"/>
+            <a:ext cx="4791456" cy="731520"/>
+          </a:xfrm>
+          <a:prstGeom prst="rect">
+            <a:avLst/>
+          </a:prstGeom>
+          <a:noFill/>
+          <a:ln/>
+        </p:spPr>
+        <p:txBody>
+          <a:bodyPr wrap="square" lIns="0" tIns="0" rIns="0" bIns="0" rtlCol="0" anchor="t"/>
+          <a:lstStyle/>
+          <a:p>
+            <a:pPr indent="0" marL="0">
+              <a:lnSpc>
+                <a:spcPct val="110000"/>
+              </a:lnSpc>
+              <a:buNone/>
+            </a:pPr>
+            <a:r>
+              <a:rPr lang="en-US" sz="1350" dirty="0">
+                <a:solidFill>
+                  <a:srgbClr val="9FB0C4"/>
+                </a:solidFill>
+                <a:latin typeface="Malgun Gothic" pitchFamily="34" charset="0"/>
+                <a:ea typeface="Malgun Gothic" pitchFamily="34" charset="-122"/>
+                <a:cs typeface="Malgun Gothic" pitchFamily="34" charset="-120"/>
+              </a:rPr>
+              <a:t>bw_iters를 바꿔 측정값 안정성 관찰</a:t>
+            </a:r>
+            <a:endParaRPr lang="en-US" sz="1350" dirty="0"/>
+          </a:p>
+        </p:txBody>
+      </p:sp>
+    </p:spTree>
+  </p:cSld>
+  <p:clrMapOvr>
+    <a:masterClrMapping/>
+  </p:clrMapOvr>
+</p:sld>
+</file>
+
+<file path=ppt/slides/slide11.xml><?xml version="1.0" encoding="utf-8"?>
+<p:sld xmlns:a="http://schemas.openxmlformats.org/drawingml/2006/main" xmlns:r="http://schemas.openxmlformats.org/officeDocument/2006/relationships" xmlns:p="http://schemas.openxmlformats.org/presentationml/2006/main">
+  <p:cSld name="Slide 11">
+    <p:bg>
+      <p:bgPr>
+        <a:solidFill>
+          <a:srgbClr val="101722"/>
+        </a:solidFill>
+      </p:bgPr>
+    </p:bg>
+    <p:spTree>
+      <p:nvGrpSpPr>
+        <p:cNvPr id="1" name=""/>
+        <p:cNvGrpSpPr/>
+        <p:nvPr/>
+      </p:nvGrpSpPr>
+      <p:grpSpPr>
+        <a:xfrm>
+          <a:off x="0" y="0"/>
+          <a:ext cx="0" cy="0"/>
+          <a:chOff x="0" y="0"/>
+          <a:chExt cx="0" cy="0"/>
+        </a:xfrm>
+      </p:grpSpPr>
+      <p:sp>
+        <p:nvSpPr>
+          <p:cNvPr id="2" name="Text 0"/>
+          <p:cNvSpPr/>
+          <p:nvPr/>
+        </p:nvSpPr>
+        <p:spPr>
+          <a:xfrm>
+            <a:off x="548640" y="1463040"/>
+            <a:ext cx="10058400" cy="457200"/>
+          </a:xfrm>
+          <a:prstGeom prst="rect">
+            <a:avLst/>
+          </a:prstGeom>
+          <a:noFill/>
+          <a:ln/>
+        </p:spPr>
+        <p:txBody>
+          <a:bodyPr wrap="square" lIns="0" tIns="0" rIns="0" bIns="0" rtlCol="0" anchor="ctr"/>
+          <a:lstStyle/>
+          <a:p>
+            <a:pPr indent="0" marL="0">
+              <a:buNone/>
+            </a:pPr>
+            <a:r>
+              <a:rPr lang="en-US" sz="1800" b="1" dirty="0">
+                <a:solidFill>
+                  <a:srgbClr val="E8A33D"/>
+                </a:solidFill>
+                <a:latin typeface="Malgun Gothic" pitchFamily="34" charset="0"/>
+                <a:ea typeface="Malgun Gothic" pitchFamily="34" charset="-122"/>
+                <a:cs typeface="Malgun Gothic" pitchFamily="34" charset="-120"/>
+              </a:rPr>
+              <a:t>다음 세션 예고</a:t>
+            </a:r>
+            <a:endParaRPr lang="en-US" sz="1800" dirty="0"/>
+          </a:p>
+        </p:txBody>
+      </p:sp>
+      <p:sp>
+        <p:nvSpPr>
+          <p:cNvPr id="3" name="Text 1"/>
+          <p:cNvSpPr/>
+          <p:nvPr/>
+        </p:nvSpPr>
+        <p:spPr>
+          <a:xfrm>
+            <a:off x="548640" y="1965960"/>
+            <a:ext cx="10972800" cy="914400"/>
+          </a:xfrm>
+          <a:prstGeom prst="rect">
+            <a:avLst/>
+          </a:prstGeom>
+          <a:noFill/>
+          <a:ln/>
+        </p:spPr>
+        <p:txBody>
+          <a:bodyPr wrap="square" lIns="0" tIns="0" rIns="0" bIns="0" rtlCol="0" anchor="ctr"/>
+          <a:lstStyle/>
+          <a:p>
+            <a:pPr indent="0" marL="0">
+              <a:buNone/>
+            </a:pPr>
+            <a:r>
+              <a:rPr lang="en-US" sz="3700" b="1" dirty="0">
+                <a:solidFill>
+                  <a:srgbClr val="E7EDF5"/>
+                </a:solidFill>
+                <a:latin typeface="Malgun Gothic" pitchFamily="34" charset="0"/>
+                <a:ea typeface="Malgun Gothic" pitchFamily="34" charset="-122"/>
+                <a:cs typeface="Malgun Gothic" pitchFamily="34" charset="-120"/>
+              </a:rPr>
+              <a:t>세션 5 · 객체지향 API·라이브러리·캡스톤</a:t>
+            </a:r>
+            <a:endParaRPr lang="en-US" sz="3700" dirty="0"/>
+          </a:p>
+        </p:txBody>
+      </p:sp>
+      <p:sp>
+        <p:nvSpPr>
+          <p:cNvPr id="4" name="Text 2"/>
+          <p:cNvSpPr/>
+          <p:nvPr/>
+        </p:nvSpPr>
+        <p:spPr>
+          <a:xfrm>
+            <a:off x="548640" y="3063240"/>
+            <a:ext cx="10972800" cy="1280160"/>
+          </a:xfrm>
+          <a:prstGeom prst="rect">
+            <a:avLst/>
+          </a:prstGeom>
+          <a:noFill/>
+          <a:ln/>
+        </p:spPr>
+        <p:txBody>
+          <a:bodyPr wrap="square" lIns="0" tIns="0" rIns="0" bIns="0" rtlCol="0" anchor="t"/>
+          <a:lstStyle/>
+          <a:p>
+            <a:pPr indent="0" marL="0">
+              <a:lnSpc>
+                <a:spcPct val="120000"/>
+              </a:lnSpc>
+              <a:buNone/>
+            </a:pPr>
+            <a:r>
+              <a:rPr lang="en-US" sz="1700" dirty="0">
+                <a:solidFill>
+                  <a:srgbClr val="E7EDF5"/>
+                </a:solidFill>
+                <a:latin typeface="Malgun Gothic" pitchFamily="34" charset="0"/>
+                <a:ea typeface="Malgun Gothic" pitchFamily="34" charset="-122"/>
+                <a:cs typeface="Malgun Gothic" pitchFamily="34" charset="-120"/>
+              </a:rPr>
+              <a:t>커널·호스트 함수를 감싼 </a:t>
+            </a:r>
+            <a:pPr indent="0" marL="0">
+              <a:lnSpc>
+                <a:spcPct val="120000"/>
+              </a:lnSpc>
+              <a:buNone/>
+            </a:pPr>
+            <a:r>
+              <a:rPr lang="en-US" sz="1700" b="1" dirty="0">
+                <a:solidFill>
+                  <a:srgbClr val="3FB8C4"/>
+                </a:solidFill>
+                <a:latin typeface="Malgun Gothic" pitchFamily="34" charset="0"/>
+                <a:ea typeface="Malgun Gothic" pitchFamily="34" charset="-122"/>
+                <a:cs typeface="Malgun Gothic" pitchFamily="34" charset="-120"/>
+              </a:rPr>
+              <a:t>memtestState 클래스</a:t>
+            </a:r>
+            <a:pPr indent="0" marL="0">
+              <a:lnSpc>
+                <a:spcPct val="120000"/>
+              </a:lnSpc>
+              <a:buNone/>
+            </a:pPr>
+            <a:r>
+              <a:rPr lang="en-US" sz="1700" dirty="0">
+                <a:solidFill>
+                  <a:srgbClr val="E7EDF5"/>
+                </a:solidFill>
+                <a:latin typeface="Malgun Gothic" pitchFamily="34" charset="0"/>
+                <a:ea typeface="Malgun Gothic" pitchFamily="34" charset="-122"/>
+                <a:cs typeface="Malgun Gothic" pitchFamily="34" charset="-120"/>
+              </a:rPr>
+              <a:t>를 보고, 내 프로그램에 라이브러리로 임베드한 뒤, 나만의 테스트를 만듭니다.</a:t>
+            </a:r>
+            <a:endParaRPr lang="en-US" sz="1700" dirty="0"/>
+          </a:p>
+        </p:txBody>
+      </p:sp>
+      <p:sp>
+        <p:nvSpPr>
+          <p:cNvPr id="5" name="Shape 3"/>
+          <p:cNvSpPr/>
+          <p:nvPr/>
+        </p:nvSpPr>
+        <p:spPr>
+          <a:xfrm>
+            <a:off x="548640" y="4937760"/>
+            <a:ext cx="8412480" cy="1005840"/>
+          </a:xfrm>
+          <a:prstGeom prst="roundRect">
+            <a:avLst>
+              <a:gd name="adj" fmla="val 4545"/>
+            </a:avLst>
+          </a:prstGeom>
+          <a:solidFill>
+            <a:srgbClr val="0B1119"/>
+          </a:solidFill>
+          <a:ln w="12700">
+            <a:solidFill>
+              <a:srgbClr val="2C3A4E"/>
+            </a:solidFill>
+            <a:prstDash val="solid"/>
+          </a:ln>
+        </p:spPr>
+      </p:sp>
+      <p:sp>
+        <p:nvSpPr>
+          <p:cNvPr id="6" name="Text 4"/>
+          <p:cNvSpPr/>
+          <p:nvPr/>
+        </p:nvSpPr>
+        <p:spPr>
+          <a:xfrm>
+            <a:off x="768096" y="5084064"/>
+            <a:ext cx="7973568" cy="713232"/>
+          </a:xfrm>
+          <a:prstGeom prst="rect">
+            <a:avLst/>
+          </a:prstGeom>
+          <a:noFill/>
+          <a:ln/>
+        </p:spPr>
+        <p:txBody>
+          <a:bodyPr wrap="square" lIns="0" tIns="0" rIns="0" bIns="0" rtlCol="0" anchor="t"/>
+          <a:lstStyle/>
+          <a:p>
+            <a:pPr algn="l" indent="0" marL="0">
+              <a:lnSpc>
+                <a:spcPct val="110000"/>
+              </a:lnSpc>
+              <a:buNone/>
+            </a:pPr>
+            <a:r>
+              <a:rPr lang="en-US" sz="1250" dirty="0">
+                <a:solidFill>
+                  <a:srgbClr val="F2C079"/>
+                </a:solidFill>
+                <a:latin typeface="Courier New" pitchFamily="34" charset="0"/>
+                <a:ea typeface="Courier New" pitchFamily="34" charset="-122"/>
+                <a:cs typeface="Courier New" pitchFamily="34" charset="-120"/>
+              </a:rPr>
+              <a:t>memtestState tester;  tester.allocate(128);</a:t>
+            </a:r>
+            <a:endParaRPr lang="en-US" sz="1250" dirty="0"/>
+          </a:p>
+          <a:p>
+            <a:pPr algn="l" indent="0" marL="0">
+              <a:lnSpc>
+                <a:spcPct val="110000"/>
+              </a:lnSpc>
+              <a:buNone/>
+            </a:pPr>
+            <a:r>
+              <a:rPr lang="en-US" sz="1250" dirty="0">
+                <a:solidFill>
+                  <a:srgbClr val="3FB8C4"/>
+                </a:solidFill>
+                <a:latin typeface="Courier New" pitchFamily="34" charset="0"/>
+                <a:ea typeface="Courier New" pitchFamily="34" charset="-122"/>
+                <a:cs typeface="Courier New" pitchFamily="34" charset="-120"/>
+              </a:rPr>
+              <a:t>tester.gpuMovingInversionsOnesZeros(errorCount);   // 3계층 API의 꼭대기</a:t>
+            </a:r>
+            <a:endParaRPr lang="en-US" sz="1250" dirty="0"/>
+          </a:p>
+        </p:txBody>
+      </p:sp>
+      <p:sp>
+        <p:nvSpPr>
+          <p:cNvPr id="7" name="Text 5"/>
+          <p:cNvSpPr/>
+          <p:nvPr/>
+        </p:nvSpPr>
+        <p:spPr>
+          <a:xfrm>
+            <a:off x="548640" y="6126480"/>
+            <a:ext cx="10972800" cy="365760"/>
+          </a:xfrm>
+          <a:prstGeom prst="rect">
+            <a:avLst/>
+          </a:prstGeom>
+          <a:noFill/>
+          <a:ln/>
+        </p:spPr>
+        <p:txBody>
+          <a:bodyPr wrap="square" lIns="0" tIns="0" rIns="0" bIns="0" rtlCol="0" anchor="ctr"/>
+          <a:lstStyle/>
+          <a:p>
+            <a:pPr indent="0" marL="0">
+              <a:buNone/>
+            </a:pPr>
+            <a:r>
+              <a:rPr lang="en-US" sz="1350" i="1" dirty="0">
+                <a:solidFill>
+                  <a:srgbClr val="9FB0C4"/>
+                </a:solidFill>
+                <a:latin typeface="Malgun Gothic" pitchFamily="34" charset="0"/>
+                <a:ea typeface="Malgun Gothic" pitchFamily="34" charset="-122"/>
+                <a:cs typeface="Malgun Gothic" pitchFamily="34" charset="-120"/>
+              </a:rPr>
+              <a:t>실습 랩 4(테스트·대역폭)를 먼저 완료하고 오세요.</a:t>
+            </a:r>
+            <a:endParaRPr lang="en-US" sz="1350" dirty="0"/>
+          </a:p>
+        </p:txBody>
+      </p:sp>
+    </p:spTree>
+  </p:cSld>
+  <p:clrMapOvr>
+    <a:masterClrMapping/>
+  </p:clrMapOvr>
+</p:sld>
+</file>
+
 <file path=ppt/slides/slide2.xml><?xml version="1.0" encoding="utf-8"?>
 <p:sld xmlns:a="http://schemas.openxmlformats.org/drawingml/2006/main" xmlns:r="http://schemas.openxmlformats.org/officeDocument/2006/relationships" xmlns:p="http://schemas.openxmlformats.org/presentationml/2006/main">
   <p:cSld name="Slide 2">
@@ -4586,7 +5776,7 @@
             </a:avLst>
           </a:prstGeom>
           <a:solidFill>
-            <a:srgbClr val="E8A33D"/>
+            <a:srgbClr val="3FB8C4"/>
           </a:solidFill>
           <a:ln/>
         </p:spPr>
@@ -4606,7 +5796,7 @@
                 <a:ea typeface="Courier New" pitchFamily="34" charset="-122"/>
                 <a:cs typeface="Courier New" pitchFamily="34" charset="-120"/>
               </a:rPr>
-              <a:t>4</a:t>
+              <a:t>3</a:t>
             </a:r>
             <a:endParaRPr lang="en-US" sz="2200" dirty="0"/>
           </a:p>
@@ -4645,7 +5835,7 @@
                 <a:ea typeface="Malgun Gothic" pitchFamily="34" charset="-122"/>
                 <a:cs typeface="Malgun Gothic" pitchFamily="34" charset="-120"/>
               </a:rPr>
-              <a:t>Random Blocks &amp; Modulo-20</a:t>
+              <a:t>Walking 비트가 걷는 모습</a:t>
             </a:r>
             <a:endParaRPr lang="en-US" sz="2900" dirty="0"/>
           </a:p>
@@ -4653,24 +5843,564 @@
       </p:sp>
       <p:sp>
         <p:nvSpPr>
-          <p:cNvPr id="4" name="Shape 2"/>
-          <p:cNvSpPr/>
-          <p:nvPr/>
-        </p:nvSpPr>
-        <p:spPr>
-          <a:xfrm>
-            <a:off x="548640" y="1645920"/>
-            <a:ext cx="5349240" cy="4023360"/>
+          <p:cNvPr id="4" name="Text 2"/>
+          <p:cNvSpPr/>
+          <p:nvPr/>
+        </p:nvSpPr>
+        <p:spPr>
+          <a:xfrm>
+            <a:off x="548640" y="1371600"/>
+            <a:ext cx="11064240" cy="411480"/>
+          </a:xfrm>
+          <a:prstGeom prst="rect">
+            <a:avLst/>
+          </a:prstGeom>
+          <a:noFill/>
+          <a:ln/>
+        </p:spPr>
+        <p:txBody>
+          <a:bodyPr wrap="square" lIns="0" tIns="0" rIns="0" bIns="0" rtlCol="0" anchor="ctr"/>
+          <a:lstStyle/>
+          <a:p>
+            <a:pPr indent="0" marL="0">
+              <a:buNone/>
+            </a:pPr>
+            <a:r>
+              <a:rPr lang="en-US" sz="1450" dirty="0">
+                <a:solidFill>
+                  <a:srgbClr val="9FB0C4"/>
+                </a:solidFill>
+                <a:latin typeface="Malgun Gothic" pitchFamily="34" charset="0"/>
+                <a:ea typeface="Malgun Gothic" pitchFamily="34" charset="-122"/>
+                <a:cs typeface="Malgun Gothic" pitchFamily="34" charset="-120"/>
+              </a:rPr>
+              <a:t>shift가 0→7로 증가하면 켜진 비트(1) 하나가 한 칸씩 이동합니다. 각 위상에서 그 비트와 이웃을 검사합니다.</a:t>
+            </a:r>
+            <a:endParaRPr lang="en-US" sz="1450" dirty="0"/>
+          </a:p>
+        </p:txBody>
+      </p:sp>
+      <p:sp>
+        <p:nvSpPr>
+          <p:cNvPr id="5" name="Text 3"/>
+          <p:cNvSpPr/>
+          <p:nvPr/>
+        </p:nvSpPr>
+        <p:spPr>
+          <a:xfrm>
+            <a:off x="548640" y="1984248"/>
+            <a:ext cx="1371600" cy="566928"/>
+          </a:xfrm>
+          <a:prstGeom prst="rect">
+            <a:avLst/>
+          </a:prstGeom>
+          <a:noFill/>
+          <a:ln/>
+        </p:spPr>
+        <p:txBody>
+          <a:bodyPr wrap="square" lIns="0" tIns="0" rIns="0" bIns="0" rtlCol="0" anchor="ctr"/>
+          <a:lstStyle/>
+          <a:p>
+            <a:pPr algn="r" indent="0" marL="0">
+              <a:buNone/>
+            </a:pPr>
+            <a:r>
+              <a:rPr lang="en-US" sz="1300" dirty="0">
+                <a:solidFill>
+                  <a:srgbClr val="9FB0C4"/>
+                </a:solidFill>
+                <a:latin typeface="Courier New" pitchFamily="34" charset="0"/>
+                <a:ea typeface="Courier New" pitchFamily="34" charset="-122"/>
+                <a:cs typeface="Courier New" pitchFamily="34" charset="-120"/>
+              </a:rPr>
+              <a:t>shift=0</a:t>
+            </a:r>
+            <a:endParaRPr lang="en-US" sz="1300" dirty="0"/>
+          </a:p>
+        </p:txBody>
+      </p:sp>
+      <p:sp>
+        <p:nvSpPr>
+          <p:cNvPr id="6" name="Shape 4"/>
+          <p:cNvSpPr/>
+          <p:nvPr/>
+        </p:nvSpPr>
+        <p:spPr>
+          <a:xfrm>
+            <a:off x="2103120" y="1965960"/>
+            <a:ext cx="566928" cy="566928"/>
           </a:xfrm>
           <a:prstGeom prst="roundRect">
             <a:avLst>
-              <a:gd name="adj" fmla="val 1818"/>
+              <a:gd name="adj" fmla="val 8065"/>
             </a:avLst>
           </a:prstGeom>
           <a:solidFill>
-            <a:srgbClr val="18212E"/>
+            <a:srgbClr val="0B1119"/>
           </a:solidFill>
-          <a:ln w="19050">
+          <a:ln w="12700">
+            <a:solidFill>
+              <a:srgbClr val="2C3A4E"/>
+            </a:solidFill>
+            <a:prstDash val="solid"/>
+          </a:ln>
+        </p:spPr>
+      </p:sp>
+      <p:sp>
+        <p:nvSpPr>
+          <p:cNvPr id="7" name="Text 5"/>
+          <p:cNvSpPr/>
+          <p:nvPr/>
+        </p:nvSpPr>
+        <p:spPr>
+          <a:xfrm>
+            <a:off x="2103120" y="1965960"/>
+            <a:ext cx="566928" cy="566928"/>
+          </a:xfrm>
+          <a:prstGeom prst="rect">
+            <a:avLst/>
+          </a:prstGeom>
+          <a:noFill/>
+          <a:ln/>
+        </p:spPr>
+        <p:txBody>
+          <a:bodyPr wrap="square" lIns="0" tIns="0" rIns="0" bIns="0" rtlCol="0" anchor="ctr"/>
+          <a:lstStyle/>
+          <a:p>
+            <a:pPr algn="ctr" indent="0" marL="0">
+              <a:buNone/>
+            </a:pPr>
+            <a:r>
+              <a:rPr lang="en-US" sz="1500" dirty="0">
+                <a:solidFill>
+                  <a:srgbClr val="6B7D94"/>
+                </a:solidFill>
+                <a:latin typeface="Courier New" pitchFamily="34" charset="0"/>
+                <a:ea typeface="Courier New" pitchFamily="34" charset="-122"/>
+                <a:cs typeface="Courier New" pitchFamily="34" charset="-120"/>
+              </a:rPr>
+              <a:t>0</a:t>
+            </a:r>
+            <a:endParaRPr lang="en-US" sz="1500" dirty="0"/>
+          </a:p>
+        </p:txBody>
+      </p:sp>
+      <p:sp>
+        <p:nvSpPr>
+          <p:cNvPr id="8" name="Shape 6"/>
+          <p:cNvSpPr/>
+          <p:nvPr/>
+        </p:nvSpPr>
+        <p:spPr>
+          <a:xfrm>
+            <a:off x="2761488" y="1965960"/>
+            <a:ext cx="566928" cy="566928"/>
+          </a:xfrm>
+          <a:prstGeom prst="roundRect">
+            <a:avLst>
+              <a:gd name="adj" fmla="val 8065"/>
+            </a:avLst>
+          </a:prstGeom>
+          <a:solidFill>
+            <a:srgbClr val="0B1119"/>
+          </a:solidFill>
+          <a:ln w="12700">
+            <a:solidFill>
+              <a:srgbClr val="2C3A4E"/>
+            </a:solidFill>
+            <a:prstDash val="solid"/>
+          </a:ln>
+        </p:spPr>
+      </p:sp>
+      <p:sp>
+        <p:nvSpPr>
+          <p:cNvPr id="9" name="Text 7"/>
+          <p:cNvSpPr/>
+          <p:nvPr/>
+        </p:nvSpPr>
+        <p:spPr>
+          <a:xfrm>
+            <a:off x="2761488" y="1965960"/>
+            <a:ext cx="566928" cy="566928"/>
+          </a:xfrm>
+          <a:prstGeom prst="rect">
+            <a:avLst/>
+          </a:prstGeom>
+          <a:noFill/>
+          <a:ln/>
+        </p:spPr>
+        <p:txBody>
+          <a:bodyPr wrap="square" lIns="0" tIns="0" rIns="0" bIns="0" rtlCol="0" anchor="ctr"/>
+          <a:lstStyle/>
+          <a:p>
+            <a:pPr algn="ctr" indent="0" marL="0">
+              <a:buNone/>
+            </a:pPr>
+            <a:r>
+              <a:rPr lang="en-US" sz="1500" dirty="0">
+                <a:solidFill>
+                  <a:srgbClr val="6B7D94"/>
+                </a:solidFill>
+                <a:latin typeface="Courier New" pitchFamily="34" charset="0"/>
+                <a:ea typeface="Courier New" pitchFamily="34" charset="-122"/>
+                <a:cs typeface="Courier New" pitchFamily="34" charset="-120"/>
+              </a:rPr>
+              <a:t>0</a:t>
+            </a:r>
+            <a:endParaRPr lang="en-US" sz="1500" dirty="0"/>
+          </a:p>
+        </p:txBody>
+      </p:sp>
+      <p:sp>
+        <p:nvSpPr>
+          <p:cNvPr id="10" name="Shape 8"/>
+          <p:cNvSpPr/>
+          <p:nvPr/>
+        </p:nvSpPr>
+        <p:spPr>
+          <a:xfrm>
+            <a:off x="3419856" y="1965960"/>
+            <a:ext cx="566928" cy="566928"/>
+          </a:xfrm>
+          <a:prstGeom prst="roundRect">
+            <a:avLst>
+              <a:gd name="adj" fmla="val 8065"/>
+            </a:avLst>
+          </a:prstGeom>
+          <a:solidFill>
+            <a:srgbClr val="0B1119"/>
+          </a:solidFill>
+          <a:ln w="12700">
+            <a:solidFill>
+              <a:srgbClr val="2C3A4E"/>
+            </a:solidFill>
+            <a:prstDash val="solid"/>
+          </a:ln>
+        </p:spPr>
+      </p:sp>
+      <p:sp>
+        <p:nvSpPr>
+          <p:cNvPr id="11" name="Text 9"/>
+          <p:cNvSpPr/>
+          <p:nvPr/>
+        </p:nvSpPr>
+        <p:spPr>
+          <a:xfrm>
+            <a:off x="3419856" y="1965960"/>
+            <a:ext cx="566928" cy="566928"/>
+          </a:xfrm>
+          <a:prstGeom prst="rect">
+            <a:avLst/>
+          </a:prstGeom>
+          <a:noFill/>
+          <a:ln/>
+        </p:spPr>
+        <p:txBody>
+          <a:bodyPr wrap="square" lIns="0" tIns="0" rIns="0" bIns="0" rtlCol="0" anchor="ctr"/>
+          <a:lstStyle/>
+          <a:p>
+            <a:pPr algn="ctr" indent="0" marL="0">
+              <a:buNone/>
+            </a:pPr>
+            <a:r>
+              <a:rPr lang="en-US" sz="1500" dirty="0">
+                <a:solidFill>
+                  <a:srgbClr val="6B7D94"/>
+                </a:solidFill>
+                <a:latin typeface="Courier New" pitchFamily="34" charset="0"/>
+                <a:ea typeface="Courier New" pitchFamily="34" charset="-122"/>
+                <a:cs typeface="Courier New" pitchFamily="34" charset="-120"/>
+              </a:rPr>
+              <a:t>0</a:t>
+            </a:r>
+            <a:endParaRPr lang="en-US" sz="1500" dirty="0"/>
+          </a:p>
+        </p:txBody>
+      </p:sp>
+      <p:sp>
+        <p:nvSpPr>
+          <p:cNvPr id="12" name="Shape 10"/>
+          <p:cNvSpPr/>
+          <p:nvPr/>
+        </p:nvSpPr>
+        <p:spPr>
+          <a:xfrm>
+            <a:off x="4078224" y="1965960"/>
+            <a:ext cx="566928" cy="566928"/>
+          </a:xfrm>
+          <a:prstGeom prst="roundRect">
+            <a:avLst>
+              <a:gd name="adj" fmla="val 8065"/>
+            </a:avLst>
+          </a:prstGeom>
+          <a:solidFill>
+            <a:srgbClr val="0B1119"/>
+          </a:solidFill>
+          <a:ln w="12700">
+            <a:solidFill>
+              <a:srgbClr val="2C3A4E"/>
+            </a:solidFill>
+            <a:prstDash val="solid"/>
+          </a:ln>
+        </p:spPr>
+      </p:sp>
+      <p:sp>
+        <p:nvSpPr>
+          <p:cNvPr id="13" name="Text 11"/>
+          <p:cNvSpPr/>
+          <p:nvPr/>
+        </p:nvSpPr>
+        <p:spPr>
+          <a:xfrm>
+            <a:off x="4078224" y="1965960"/>
+            <a:ext cx="566928" cy="566928"/>
+          </a:xfrm>
+          <a:prstGeom prst="rect">
+            <a:avLst/>
+          </a:prstGeom>
+          <a:noFill/>
+          <a:ln/>
+        </p:spPr>
+        <p:txBody>
+          <a:bodyPr wrap="square" lIns="0" tIns="0" rIns="0" bIns="0" rtlCol="0" anchor="ctr"/>
+          <a:lstStyle/>
+          <a:p>
+            <a:pPr algn="ctr" indent="0" marL="0">
+              <a:buNone/>
+            </a:pPr>
+            <a:r>
+              <a:rPr lang="en-US" sz="1500" dirty="0">
+                <a:solidFill>
+                  <a:srgbClr val="6B7D94"/>
+                </a:solidFill>
+                <a:latin typeface="Courier New" pitchFamily="34" charset="0"/>
+                <a:ea typeface="Courier New" pitchFamily="34" charset="-122"/>
+                <a:cs typeface="Courier New" pitchFamily="34" charset="-120"/>
+              </a:rPr>
+              <a:t>0</a:t>
+            </a:r>
+            <a:endParaRPr lang="en-US" sz="1500" dirty="0"/>
+          </a:p>
+        </p:txBody>
+      </p:sp>
+      <p:sp>
+        <p:nvSpPr>
+          <p:cNvPr id="14" name="Shape 12"/>
+          <p:cNvSpPr/>
+          <p:nvPr/>
+        </p:nvSpPr>
+        <p:spPr>
+          <a:xfrm>
+            <a:off x="4736592" y="1965960"/>
+            <a:ext cx="566928" cy="566928"/>
+          </a:xfrm>
+          <a:prstGeom prst="roundRect">
+            <a:avLst>
+              <a:gd name="adj" fmla="val 8065"/>
+            </a:avLst>
+          </a:prstGeom>
+          <a:solidFill>
+            <a:srgbClr val="0B1119"/>
+          </a:solidFill>
+          <a:ln w="12700">
+            <a:solidFill>
+              <a:srgbClr val="2C3A4E"/>
+            </a:solidFill>
+            <a:prstDash val="solid"/>
+          </a:ln>
+        </p:spPr>
+      </p:sp>
+      <p:sp>
+        <p:nvSpPr>
+          <p:cNvPr id="15" name="Text 13"/>
+          <p:cNvSpPr/>
+          <p:nvPr/>
+        </p:nvSpPr>
+        <p:spPr>
+          <a:xfrm>
+            <a:off x="4736592" y="1965960"/>
+            <a:ext cx="566928" cy="566928"/>
+          </a:xfrm>
+          <a:prstGeom prst="rect">
+            <a:avLst/>
+          </a:prstGeom>
+          <a:noFill/>
+          <a:ln/>
+        </p:spPr>
+        <p:txBody>
+          <a:bodyPr wrap="square" lIns="0" tIns="0" rIns="0" bIns="0" rtlCol="0" anchor="ctr"/>
+          <a:lstStyle/>
+          <a:p>
+            <a:pPr algn="ctr" indent="0" marL="0">
+              <a:buNone/>
+            </a:pPr>
+            <a:r>
+              <a:rPr lang="en-US" sz="1500" dirty="0">
+                <a:solidFill>
+                  <a:srgbClr val="6B7D94"/>
+                </a:solidFill>
+                <a:latin typeface="Courier New" pitchFamily="34" charset="0"/>
+                <a:ea typeface="Courier New" pitchFamily="34" charset="-122"/>
+                <a:cs typeface="Courier New" pitchFamily="34" charset="-120"/>
+              </a:rPr>
+              <a:t>0</a:t>
+            </a:r>
+            <a:endParaRPr lang="en-US" sz="1500" dirty="0"/>
+          </a:p>
+        </p:txBody>
+      </p:sp>
+      <p:sp>
+        <p:nvSpPr>
+          <p:cNvPr id="16" name="Shape 14"/>
+          <p:cNvSpPr/>
+          <p:nvPr/>
+        </p:nvSpPr>
+        <p:spPr>
+          <a:xfrm>
+            <a:off x="5394960" y="1965960"/>
+            <a:ext cx="566928" cy="566928"/>
+          </a:xfrm>
+          <a:prstGeom prst="roundRect">
+            <a:avLst>
+              <a:gd name="adj" fmla="val 8065"/>
+            </a:avLst>
+          </a:prstGeom>
+          <a:solidFill>
+            <a:srgbClr val="0B1119"/>
+          </a:solidFill>
+          <a:ln w="12700">
+            <a:solidFill>
+              <a:srgbClr val="2C3A4E"/>
+            </a:solidFill>
+            <a:prstDash val="solid"/>
+          </a:ln>
+        </p:spPr>
+      </p:sp>
+      <p:sp>
+        <p:nvSpPr>
+          <p:cNvPr id="17" name="Text 15"/>
+          <p:cNvSpPr/>
+          <p:nvPr/>
+        </p:nvSpPr>
+        <p:spPr>
+          <a:xfrm>
+            <a:off x="5394960" y="1965960"/>
+            <a:ext cx="566928" cy="566928"/>
+          </a:xfrm>
+          <a:prstGeom prst="rect">
+            <a:avLst/>
+          </a:prstGeom>
+          <a:noFill/>
+          <a:ln/>
+        </p:spPr>
+        <p:txBody>
+          <a:bodyPr wrap="square" lIns="0" tIns="0" rIns="0" bIns="0" rtlCol="0" anchor="ctr"/>
+          <a:lstStyle/>
+          <a:p>
+            <a:pPr algn="ctr" indent="0" marL="0">
+              <a:buNone/>
+            </a:pPr>
+            <a:r>
+              <a:rPr lang="en-US" sz="1500" dirty="0">
+                <a:solidFill>
+                  <a:srgbClr val="6B7D94"/>
+                </a:solidFill>
+                <a:latin typeface="Courier New" pitchFamily="34" charset="0"/>
+                <a:ea typeface="Courier New" pitchFamily="34" charset="-122"/>
+                <a:cs typeface="Courier New" pitchFamily="34" charset="-120"/>
+              </a:rPr>
+              <a:t>0</a:t>
+            </a:r>
+            <a:endParaRPr lang="en-US" sz="1500" dirty="0"/>
+          </a:p>
+        </p:txBody>
+      </p:sp>
+      <p:sp>
+        <p:nvSpPr>
+          <p:cNvPr id="18" name="Shape 16"/>
+          <p:cNvSpPr/>
+          <p:nvPr/>
+        </p:nvSpPr>
+        <p:spPr>
+          <a:xfrm>
+            <a:off x="6053328" y="1965960"/>
+            <a:ext cx="566928" cy="566928"/>
+          </a:xfrm>
+          <a:prstGeom prst="roundRect">
+            <a:avLst>
+              <a:gd name="adj" fmla="val 8065"/>
+            </a:avLst>
+          </a:prstGeom>
+          <a:solidFill>
+            <a:srgbClr val="0B1119"/>
+          </a:solidFill>
+          <a:ln w="12700">
+            <a:solidFill>
+              <a:srgbClr val="2C3A4E"/>
+            </a:solidFill>
+            <a:prstDash val="solid"/>
+          </a:ln>
+        </p:spPr>
+      </p:sp>
+      <p:sp>
+        <p:nvSpPr>
+          <p:cNvPr id="19" name="Text 17"/>
+          <p:cNvSpPr/>
+          <p:nvPr/>
+        </p:nvSpPr>
+        <p:spPr>
+          <a:xfrm>
+            <a:off x="6053328" y="1965960"/>
+            <a:ext cx="566928" cy="566928"/>
+          </a:xfrm>
+          <a:prstGeom prst="rect">
+            <a:avLst/>
+          </a:prstGeom>
+          <a:noFill/>
+          <a:ln/>
+        </p:spPr>
+        <p:txBody>
+          <a:bodyPr wrap="square" lIns="0" tIns="0" rIns="0" bIns="0" rtlCol="0" anchor="ctr"/>
+          <a:lstStyle/>
+          <a:p>
+            <a:pPr algn="ctr" indent="0" marL="0">
+              <a:buNone/>
+            </a:pPr>
+            <a:r>
+              <a:rPr lang="en-US" sz="1500" dirty="0">
+                <a:solidFill>
+                  <a:srgbClr val="6B7D94"/>
+                </a:solidFill>
+                <a:latin typeface="Courier New" pitchFamily="34" charset="0"/>
+                <a:ea typeface="Courier New" pitchFamily="34" charset="-122"/>
+                <a:cs typeface="Courier New" pitchFamily="34" charset="-120"/>
+              </a:rPr>
+              <a:t>0</a:t>
+            </a:r>
+            <a:endParaRPr lang="en-US" sz="1500" dirty="0"/>
+          </a:p>
+        </p:txBody>
+      </p:sp>
+      <p:sp>
+        <p:nvSpPr>
+          <p:cNvPr id="20" name="Shape 18"/>
+          <p:cNvSpPr/>
+          <p:nvPr/>
+        </p:nvSpPr>
+        <p:spPr>
+          <a:xfrm>
+            <a:off x="6711696" y="1965960"/>
+            <a:ext cx="566928" cy="566928"/>
+          </a:xfrm>
+          <a:prstGeom prst="roundRect">
+            <a:avLst>
+              <a:gd name="adj" fmla="val 8065"/>
+            </a:avLst>
+          </a:prstGeom>
+          <a:solidFill>
+            <a:srgbClr val="E8A33D"/>
+          </a:solidFill>
+          <a:ln w="12700">
             <a:solidFill>
               <a:srgbClr val="E8A33D"/>
             </a:solidFill>
@@ -4680,14 +6410,53 @@
       </p:sp>
       <p:sp>
         <p:nvSpPr>
-          <p:cNvPr id="5" name="Text 3"/>
-          <p:cNvSpPr/>
-          <p:nvPr/>
-        </p:nvSpPr>
-        <p:spPr>
-          <a:xfrm>
-            <a:off x="822960" y="1828800"/>
-            <a:ext cx="4800600" cy="457200"/>
+          <p:cNvPr id="21" name="Text 19"/>
+          <p:cNvSpPr/>
+          <p:nvPr/>
+        </p:nvSpPr>
+        <p:spPr>
+          <a:xfrm>
+            <a:off x="6711696" y="1965960"/>
+            <a:ext cx="566928" cy="566928"/>
+          </a:xfrm>
+          <a:prstGeom prst="rect">
+            <a:avLst/>
+          </a:prstGeom>
+          <a:noFill/>
+          <a:ln/>
+        </p:spPr>
+        <p:txBody>
+          <a:bodyPr wrap="square" lIns="0" tIns="0" rIns="0" bIns="0" rtlCol="0" anchor="ctr"/>
+          <a:lstStyle/>
+          <a:p>
+            <a:pPr algn="ctr" indent="0" marL="0">
+              <a:buNone/>
+            </a:pPr>
+            <a:r>
+              <a:rPr lang="en-US" sz="1500" b="1" dirty="0">
+                <a:solidFill>
+                  <a:srgbClr val="101722"/>
+                </a:solidFill>
+                <a:latin typeface="Courier New" pitchFamily="34" charset="0"/>
+                <a:ea typeface="Courier New" pitchFamily="34" charset="-122"/>
+                <a:cs typeface="Courier New" pitchFamily="34" charset="-120"/>
+              </a:rPr>
+              <a:t>1</a:t>
+            </a:r>
+            <a:endParaRPr lang="en-US" sz="1500" dirty="0"/>
+          </a:p>
+        </p:txBody>
+      </p:sp>
+      <p:sp>
+        <p:nvSpPr>
+          <p:cNvPr id="22" name="Text 20"/>
+          <p:cNvSpPr/>
+          <p:nvPr/>
+        </p:nvSpPr>
+        <p:spPr>
+          <a:xfrm>
+            <a:off x="7552944" y="1984248"/>
+            <a:ext cx="2103120" cy="566928"/>
           </a:xfrm>
           <a:prstGeom prst="rect">
             <a:avLst/>
@@ -4703,349 +6472,2519 @@
               <a:buNone/>
             </a:pPr>
             <a:r>
-              <a:rPr lang="en-US" sz="1900" b="1" dirty="0">
-                <a:solidFill>
-                  <a:srgbClr val="E8A33D"/>
+              <a:rPr lang="en-US" sz="1300" dirty="0">
+                <a:solidFill>
+                  <a:srgbClr val="3FB8C4"/>
+                </a:solidFill>
+                <a:latin typeface="Courier New" pitchFamily="34" charset="0"/>
+                <a:ea typeface="Courier New" pitchFamily="34" charset="-122"/>
+                <a:cs typeface="Courier New" pitchFamily="34" charset="-120"/>
+              </a:rPr>
+              <a:t>0x01010101</a:t>
+            </a:r>
+            <a:endParaRPr lang="en-US" sz="1300" dirty="0"/>
+          </a:p>
+        </p:txBody>
+      </p:sp>
+      <p:sp>
+        <p:nvSpPr>
+          <p:cNvPr id="23" name="Text 21"/>
+          <p:cNvSpPr/>
+          <p:nvPr/>
+        </p:nvSpPr>
+        <p:spPr>
+          <a:xfrm>
+            <a:off x="548640" y="2734056"/>
+            <a:ext cx="1371600" cy="566928"/>
+          </a:xfrm>
+          <a:prstGeom prst="rect">
+            <a:avLst/>
+          </a:prstGeom>
+          <a:noFill/>
+          <a:ln/>
+        </p:spPr>
+        <p:txBody>
+          <a:bodyPr wrap="square" lIns="0" tIns="0" rIns="0" bIns="0" rtlCol="0" anchor="ctr"/>
+          <a:lstStyle/>
+          <a:p>
+            <a:pPr algn="r" indent="0" marL="0">
+              <a:buNone/>
+            </a:pPr>
+            <a:r>
+              <a:rPr lang="en-US" sz="1300" dirty="0">
+                <a:solidFill>
+                  <a:srgbClr val="9FB0C4"/>
+                </a:solidFill>
+                <a:latin typeface="Courier New" pitchFamily="34" charset="0"/>
+                <a:ea typeface="Courier New" pitchFamily="34" charset="-122"/>
+                <a:cs typeface="Courier New" pitchFamily="34" charset="-120"/>
+              </a:rPr>
+              <a:t>shift=1</a:t>
+            </a:r>
+            <a:endParaRPr lang="en-US" sz="1300" dirty="0"/>
+          </a:p>
+        </p:txBody>
+      </p:sp>
+      <p:sp>
+        <p:nvSpPr>
+          <p:cNvPr id="24" name="Shape 22"/>
+          <p:cNvSpPr/>
+          <p:nvPr/>
+        </p:nvSpPr>
+        <p:spPr>
+          <a:xfrm>
+            <a:off x="2103120" y="2715768"/>
+            <a:ext cx="566928" cy="566928"/>
+          </a:xfrm>
+          <a:prstGeom prst="roundRect">
+            <a:avLst>
+              <a:gd name="adj" fmla="val 8065"/>
+            </a:avLst>
+          </a:prstGeom>
+          <a:solidFill>
+            <a:srgbClr val="0B1119"/>
+          </a:solidFill>
+          <a:ln w="12700">
+            <a:solidFill>
+              <a:srgbClr val="2C3A4E"/>
+            </a:solidFill>
+            <a:prstDash val="solid"/>
+          </a:ln>
+        </p:spPr>
+      </p:sp>
+      <p:sp>
+        <p:nvSpPr>
+          <p:cNvPr id="25" name="Text 23"/>
+          <p:cNvSpPr/>
+          <p:nvPr/>
+        </p:nvSpPr>
+        <p:spPr>
+          <a:xfrm>
+            <a:off x="2103120" y="2715768"/>
+            <a:ext cx="566928" cy="566928"/>
+          </a:xfrm>
+          <a:prstGeom prst="rect">
+            <a:avLst/>
+          </a:prstGeom>
+          <a:noFill/>
+          <a:ln/>
+        </p:spPr>
+        <p:txBody>
+          <a:bodyPr wrap="square" lIns="0" tIns="0" rIns="0" bIns="0" rtlCol="0" anchor="ctr"/>
+          <a:lstStyle/>
+          <a:p>
+            <a:pPr algn="ctr" indent="0" marL="0">
+              <a:buNone/>
+            </a:pPr>
+            <a:r>
+              <a:rPr lang="en-US" sz="1500" dirty="0">
+                <a:solidFill>
+                  <a:srgbClr val="6B7D94"/>
+                </a:solidFill>
+                <a:latin typeface="Courier New" pitchFamily="34" charset="0"/>
+                <a:ea typeface="Courier New" pitchFamily="34" charset="-122"/>
+                <a:cs typeface="Courier New" pitchFamily="34" charset="-120"/>
+              </a:rPr>
+              <a:t>0</a:t>
+            </a:r>
+            <a:endParaRPr lang="en-US" sz="1500" dirty="0"/>
+          </a:p>
+        </p:txBody>
+      </p:sp>
+      <p:sp>
+        <p:nvSpPr>
+          <p:cNvPr id="26" name="Shape 24"/>
+          <p:cNvSpPr/>
+          <p:nvPr/>
+        </p:nvSpPr>
+        <p:spPr>
+          <a:xfrm>
+            <a:off x="2761488" y="2715768"/>
+            <a:ext cx="566928" cy="566928"/>
+          </a:xfrm>
+          <a:prstGeom prst="roundRect">
+            <a:avLst>
+              <a:gd name="adj" fmla="val 8065"/>
+            </a:avLst>
+          </a:prstGeom>
+          <a:solidFill>
+            <a:srgbClr val="0B1119"/>
+          </a:solidFill>
+          <a:ln w="12700">
+            <a:solidFill>
+              <a:srgbClr val="2C3A4E"/>
+            </a:solidFill>
+            <a:prstDash val="solid"/>
+          </a:ln>
+        </p:spPr>
+      </p:sp>
+      <p:sp>
+        <p:nvSpPr>
+          <p:cNvPr id="27" name="Text 25"/>
+          <p:cNvSpPr/>
+          <p:nvPr/>
+        </p:nvSpPr>
+        <p:spPr>
+          <a:xfrm>
+            <a:off x="2761488" y="2715768"/>
+            <a:ext cx="566928" cy="566928"/>
+          </a:xfrm>
+          <a:prstGeom prst="rect">
+            <a:avLst/>
+          </a:prstGeom>
+          <a:noFill/>
+          <a:ln/>
+        </p:spPr>
+        <p:txBody>
+          <a:bodyPr wrap="square" lIns="0" tIns="0" rIns="0" bIns="0" rtlCol="0" anchor="ctr"/>
+          <a:lstStyle/>
+          <a:p>
+            <a:pPr algn="ctr" indent="0" marL="0">
+              <a:buNone/>
+            </a:pPr>
+            <a:r>
+              <a:rPr lang="en-US" sz="1500" dirty="0">
+                <a:solidFill>
+                  <a:srgbClr val="6B7D94"/>
+                </a:solidFill>
+                <a:latin typeface="Courier New" pitchFamily="34" charset="0"/>
+                <a:ea typeface="Courier New" pitchFamily="34" charset="-122"/>
+                <a:cs typeface="Courier New" pitchFamily="34" charset="-120"/>
+              </a:rPr>
+              <a:t>0</a:t>
+            </a:r>
+            <a:endParaRPr lang="en-US" sz="1500" dirty="0"/>
+          </a:p>
+        </p:txBody>
+      </p:sp>
+      <p:sp>
+        <p:nvSpPr>
+          <p:cNvPr id="28" name="Shape 26"/>
+          <p:cNvSpPr/>
+          <p:nvPr/>
+        </p:nvSpPr>
+        <p:spPr>
+          <a:xfrm>
+            <a:off x="3419856" y="2715768"/>
+            <a:ext cx="566928" cy="566928"/>
+          </a:xfrm>
+          <a:prstGeom prst="roundRect">
+            <a:avLst>
+              <a:gd name="adj" fmla="val 8065"/>
+            </a:avLst>
+          </a:prstGeom>
+          <a:solidFill>
+            <a:srgbClr val="0B1119"/>
+          </a:solidFill>
+          <a:ln w="12700">
+            <a:solidFill>
+              <a:srgbClr val="2C3A4E"/>
+            </a:solidFill>
+            <a:prstDash val="solid"/>
+          </a:ln>
+        </p:spPr>
+      </p:sp>
+      <p:sp>
+        <p:nvSpPr>
+          <p:cNvPr id="29" name="Text 27"/>
+          <p:cNvSpPr/>
+          <p:nvPr/>
+        </p:nvSpPr>
+        <p:spPr>
+          <a:xfrm>
+            <a:off x="3419856" y="2715768"/>
+            <a:ext cx="566928" cy="566928"/>
+          </a:xfrm>
+          <a:prstGeom prst="rect">
+            <a:avLst/>
+          </a:prstGeom>
+          <a:noFill/>
+          <a:ln/>
+        </p:spPr>
+        <p:txBody>
+          <a:bodyPr wrap="square" lIns="0" tIns="0" rIns="0" bIns="0" rtlCol="0" anchor="ctr"/>
+          <a:lstStyle/>
+          <a:p>
+            <a:pPr algn="ctr" indent="0" marL="0">
+              <a:buNone/>
+            </a:pPr>
+            <a:r>
+              <a:rPr lang="en-US" sz="1500" dirty="0">
+                <a:solidFill>
+                  <a:srgbClr val="6B7D94"/>
+                </a:solidFill>
+                <a:latin typeface="Courier New" pitchFamily="34" charset="0"/>
+                <a:ea typeface="Courier New" pitchFamily="34" charset="-122"/>
+                <a:cs typeface="Courier New" pitchFamily="34" charset="-120"/>
+              </a:rPr>
+              <a:t>0</a:t>
+            </a:r>
+            <a:endParaRPr lang="en-US" sz="1500" dirty="0"/>
+          </a:p>
+        </p:txBody>
+      </p:sp>
+      <p:sp>
+        <p:nvSpPr>
+          <p:cNvPr id="30" name="Shape 28"/>
+          <p:cNvSpPr/>
+          <p:nvPr/>
+        </p:nvSpPr>
+        <p:spPr>
+          <a:xfrm>
+            <a:off x="4078224" y="2715768"/>
+            <a:ext cx="566928" cy="566928"/>
+          </a:xfrm>
+          <a:prstGeom prst="roundRect">
+            <a:avLst>
+              <a:gd name="adj" fmla="val 8065"/>
+            </a:avLst>
+          </a:prstGeom>
+          <a:solidFill>
+            <a:srgbClr val="0B1119"/>
+          </a:solidFill>
+          <a:ln w="12700">
+            <a:solidFill>
+              <a:srgbClr val="2C3A4E"/>
+            </a:solidFill>
+            <a:prstDash val="solid"/>
+          </a:ln>
+        </p:spPr>
+      </p:sp>
+      <p:sp>
+        <p:nvSpPr>
+          <p:cNvPr id="31" name="Text 29"/>
+          <p:cNvSpPr/>
+          <p:nvPr/>
+        </p:nvSpPr>
+        <p:spPr>
+          <a:xfrm>
+            <a:off x="4078224" y="2715768"/>
+            <a:ext cx="566928" cy="566928"/>
+          </a:xfrm>
+          <a:prstGeom prst="rect">
+            <a:avLst/>
+          </a:prstGeom>
+          <a:noFill/>
+          <a:ln/>
+        </p:spPr>
+        <p:txBody>
+          <a:bodyPr wrap="square" lIns="0" tIns="0" rIns="0" bIns="0" rtlCol="0" anchor="ctr"/>
+          <a:lstStyle/>
+          <a:p>
+            <a:pPr algn="ctr" indent="0" marL="0">
+              <a:buNone/>
+            </a:pPr>
+            <a:r>
+              <a:rPr lang="en-US" sz="1500" dirty="0">
+                <a:solidFill>
+                  <a:srgbClr val="6B7D94"/>
+                </a:solidFill>
+                <a:latin typeface="Courier New" pitchFamily="34" charset="0"/>
+                <a:ea typeface="Courier New" pitchFamily="34" charset="-122"/>
+                <a:cs typeface="Courier New" pitchFamily="34" charset="-120"/>
+              </a:rPr>
+              <a:t>0</a:t>
+            </a:r>
+            <a:endParaRPr lang="en-US" sz="1500" dirty="0"/>
+          </a:p>
+        </p:txBody>
+      </p:sp>
+      <p:sp>
+        <p:nvSpPr>
+          <p:cNvPr id="32" name="Shape 30"/>
+          <p:cNvSpPr/>
+          <p:nvPr/>
+        </p:nvSpPr>
+        <p:spPr>
+          <a:xfrm>
+            <a:off x="4736592" y="2715768"/>
+            <a:ext cx="566928" cy="566928"/>
+          </a:xfrm>
+          <a:prstGeom prst="roundRect">
+            <a:avLst>
+              <a:gd name="adj" fmla="val 8065"/>
+            </a:avLst>
+          </a:prstGeom>
+          <a:solidFill>
+            <a:srgbClr val="0B1119"/>
+          </a:solidFill>
+          <a:ln w="12700">
+            <a:solidFill>
+              <a:srgbClr val="2C3A4E"/>
+            </a:solidFill>
+            <a:prstDash val="solid"/>
+          </a:ln>
+        </p:spPr>
+      </p:sp>
+      <p:sp>
+        <p:nvSpPr>
+          <p:cNvPr id="33" name="Text 31"/>
+          <p:cNvSpPr/>
+          <p:nvPr/>
+        </p:nvSpPr>
+        <p:spPr>
+          <a:xfrm>
+            <a:off x="4736592" y="2715768"/>
+            <a:ext cx="566928" cy="566928"/>
+          </a:xfrm>
+          <a:prstGeom prst="rect">
+            <a:avLst/>
+          </a:prstGeom>
+          <a:noFill/>
+          <a:ln/>
+        </p:spPr>
+        <p:txBody>
+          <a:bodyPr wrap="square" lIns="0" tIns="0" rIns="0" bIns="0" rtlCol="0" anchor="ctr"/>
+          <a:lstStyle/>
+          <a:p>
+            <a:pPr algn="ctr" indent="0" marL="0">
+              <a:buNone/>
+            </a:pPr>
+            <a:r>
+              <a:rPr lang="en-US" sz="1500" dirty="0">
+                <a:solidFill>
+                  <a:srgbClr val="6B7D94"/>
+                </a:solidFill>
+                <a:latin typeface="Courier New" pitchFamily="34" charset="0"/>
+                <a:ea typeface="Courier New" pitchFamily="34" charset="-122"/>
+                <a:cs typeface="Courier New" pitchFamily="34" charset="-120"/>
+              </a:rPr>
+              <a:t>0</a:t>
+            </a:r>
+            <a:endParaRPr lang="en-US" sz="1500" dirty="0"/>
+          </a:p>
+        </p:txBody>
+      </p:sp>
+      <p:sp>
+        <p:nvSpPr>
+          <p:cNvPr id="34" name="Shape 32"/>
+          <p:cNvSpPr/>
+          <p:nvPr/>
+        </p:nvSpPr>
+        <p:spPr>
+          <a:xfrm>
+            <a:off x="5394960" y="2715768"/>
+            <a:ext cx="566928" cy="566928"/>
+          </a:xfrm>
+          <a:prstGeom prst="roundRect">
+            <a:avLst>
+              <a:gd name="adj" fmla="val 8065"/>
+            </a:avLst>
+          </a:prstGeom>
+          <a:solidFill>
+            <a:srgbClr val="0B1119"/>
+          </a:solidFill>
+          <a:ln w="12700">
+            <a:solidFill>
+              <a:srgbClr val="2C3A4E"/>
+            </a:solidFill>
+            <a:prstDash val="solid"/>
+          </a:ln>
+        </p:spPr>
+      </p:sp>
+      <p:sp>
+        <p:nvSpPr>
+          <p:cNvPr id="35" name="Text 33"/>
+          <p:cNvSpPr/>
+          <p:nvPr/>
+        </p:nvSpPr>
+        <p:spPr>
+          <a:xfrm>
+            <a:off x="5394960" y="2715768"/>
+            <a:ext cx="566928" cy="566928"/>
+          </a:xfrm>
+          <a:prstGeom prst="rect">
+            <a:avLst/>
+          </a:prstGeom>
+          <a:noFill/>
+          <a:ln/>
+        </p:spPr>
+        <p:txBody>
+          <a:bodyPr wrap="square" lIns="0" tIns="0" rIns="0" bIns="0" rtlCol="0" anchor="ctr"/>
+          <a:lstStyle/>
+          <a:p>
+            <a:pPr algn="ctr" indent="0" marL="0">
+              <a:buNone/>
+            </a:pPr>
+            <a:r>
+              <a:rPr lang="en-US" sz="1500" dirty="0">
+                <a:solidFill>
+                  <a:srgbClr val="6B7D94"/>
+                </a:solidFill>
+                <a:latin typeface="Courier New" pitchFamily="34" charset="0"/>
+                <a:ea typeface="Courier New" pitchFamily="34" charset="-122"/>
+                <a:cs typeface="Courier New" pitchFamily="34" charset="-120"/>
+              </a:rPr>
+              <a:t>0</a:t>
+            </a:r>
+            <a:endParaRPr lang="en-US" sz="1500" dirty="0"/>
+          </a:p>
+        </p:txBody>
+      </p:sp>
+      <p:sp>
+        <p:nvSpPr>
+          <p:cNvPr id="36" name="Shape 34"/>
+          <p:cNvSpPr/>
+          <p:nvPr/>
+        </p:nvSpPr>
+        <p:spPr>
+          <a:xfrm>
+            <a:off x="6053328" y="2715768"/>
+            <a:ext cx="566928" cy="566928"/>
+          </a:xfrm>
+          <a:prstGeom prst="roundRect">
+            <a:avLst>
+              <a:gd name="adj" fmla="val 8065"/>
+            </a:avLst>
+          </a:prstGeom>
+          <a:solidFill>
+            <a:srgbClr val="E8A33D"/>
+          </a:solidFill>
+          <a:ln w="12700">
+            <a:solidFill>
+              <a:srgbClr val="E8A33D"/>
+            </a:solidFill>
+            <a:prstDash val="solid"/>
+          </a:ln>
+        </p:spPr>
+      </p:sp>
+      <p:sp>
+        <p:nvSpPr>
+          <p:cNvPr id="37" name="Text 35"/>
+          <p:cNvSpPr/>
+          <p:nvPr/>
+        </p:nvSpPr>
+        <p:spPr>
+          <a:xfrm>
+            <a:off x="6053328" y="2715768"/>
+            <a:ext cx="566928" cy="566928"/>
+          </a:xfrm>
+          <a:prstGeom prst="rect">
+            <a:avLst/>
+          </a:prstGeom>
+          <a:noFill/>
+          <a:ln/>
+        </p:spPr>
+        <p:txBody>
+          <a:bodyPr wrap="square" lIns="0" tIns="0" rIns="0" bIns="0" rtlCol="0" anchor="ctr"/>
+          <a:lstStyle/>
+          <a:p>
+            <a:pPr algn="ctr" indent="0" marL="0">
+              <a:buNone/>
+            </a:pPr>
+            <a:r>
+              <a:rPr lang="en-US" sz="1500" b="1" dirty="0">
+                <a:solidFill>
+                  <a:srgbClr val="101722"/>
+                </a:solidFill>
+                <a:latin typeface="Courier New" pitchFamily="34" charset="0"/>
+                <a:ea typeface="Courier New" pitchFamily="34" charset="-122"/>
+                <a:cs typeface="Courier New" pitchFamily="34" charset="-120"/>
+              </a:rPr>
+              <a:t>1</a:t>
+            </a:r>
+            <a:endParaRPr lang="en-US" sz="1500" dirty="0"/>
+          </a:p>
+        </p:txBody>
+      </p:sp>
+      <p:sp>
+        <p:nvSpPr>
+          <p:cNvPr id="38" name="Shape 36"/>
+          <p:cNvSpPr/>
+          <p:nvPr/>
+        </p:nvSpPr>
+        <p:spPr>
+          <a:xfrm>
+            <a:off x="6711696" y="2715768"/>
+            <a:ext cx="566928" cy="566928"/>
+          </a:xfrm>
+          <a:prstGeom prst="roundRect">
+            <a:avLst>
+              <a:gd name="adj" fmla="val 8065"/>
+            </a:avLst>
+          </a:prstGeom>
+          <a:solidFill>
+            <a:srgbClr val="0B1119"/>
+          </a:solidFill>
+          <a:ln w="12700">
+            <a:solidFill>
+              <a:srgbClr val="2C3A4E"/>
+            </a:solidFill>
+            <a:prstDash val="solid"/>
+          </a:ln>
+        </p:spPr>
+      </p:sp>
+      <p:sp>
+        <p:nvSpPr>
+          <p:cNvPr id="39" name="Text 37"/>
+          <p:cNvSpPr/>
+          <p:nvPr/>
+        </p:nvSpPr>
+        <p:spPr>
+          <a:xfrm>
+            <a:off x="6711696" y="2715768"/>
+            <a:ext cx="566928" cy="566928"/>
+          </a:xfrm>
+          <a:prstGeom prst="rect">
+            <a:avLst/>
+          </a:prstGeom>
+          <a:noFill/>
+          <a:ln/>
+        </p:spPr>
+        <p:txBody>
+          <a:bodyPr wrap="square" lIns="0" tIns="0" rIns="0" bIns="0" rtlCol="0" anchor="ctr"/>
+          <a:lstStyle/>
+          <a:p>
+            <a:pPr algn="ctr" indent="0" marL="0">
+              <a:buNone/>
+            </a:pPr>
+            <a:r>
+              <a:rPr lang="en-US" sz="1500" dirty="0">
+                <a:solidFill>
+                  <a:srgbClr val="6B7D94"/>
+                </a:solidFill>
+                <a:latin typeface="Courier New" pitchFamily="34" charset="0"/>
+                <a:ea typeface="Courier New" pitchFamily="34" charset="-122"/>
+                <a:cs typeface="Courier New" pitchFamily="34" charset="-120"/>
+              </a:rPr>
+              <a:t>0</a:t>
+            </a:r>
+            <a:endParaRPr lang="en-US" sz="1500" dirty="0"/>
+          </a:p>
+        </p:txBody>
+      </p:sp>
+      <p:sp>
+        <p:nvSpPr>
+          <p:cNvPr id="40" name="Text 38"/>
+          <p:cNvSpPr/>
+          <p:nvPr/>
+        </p:nvSpPr>
+        <p:spPr>
+          <a:xfrm>
+            <a:off x="7552944" y="2734056"/>
+            <a:ext cx="2103120" cy="566928"/>
+          </a:xfrm>
+          <a:prstGeom prst="rect">
+            <a:avLst/>
+          </a:prstGeom>
+          <a:noFill/>
+          <a:ln/>
+        </p:spPr>
+        <p:txBody>
+          <a:bodyPr wrap="square" lIns="0" tIns="0" rIns="0" bIns="0" rtlCol="0" anchor="ctr"/>
+          <a:lstStyle/>
+          <a:p>
+            <a:pPr indent="0" marL="0">
+              <a:buNone/>
+            </a:pPr>
+            <a:r>
+              <a:rPr lang="en-US" sz="1300" dirty="0">
+                <a:solidFill>
+                  <a:srgbClr val="3FB8C4"/>
+                </a:solidFill>
+                <a:latin typeface="Courier New" pitchFamily="34" charset="0"/>
+                <a:ea typeface="Courier New" pitchFamily="34" charset="-122"/>
+                <a:cs typeface="Courier New" pitchFamily="34" charset="-120"/>
+              </a:rPr>
+              <a:t>0x02020202</a:t>
+            </a:r>
+            <a:endParaRPr lang="en-US" sz="1300" dirty="0"/>
+          </a:p>
+        </p:txBody>
+      </p:sp>
+      <p:sp>
+        <p:nvSpPr>
+          <p:cNvPr id="41" name="Text 39"/>
+          <p:cNvSpPr/>
+          <p:nvPr/>
+        </p:nvSpPr>
+        <p:spPr>
+          <a:xfrm>
+            <a:off x="548640" y="3483864"/>
+            <a:ext cx="1371600" cy="566928"/>
+          </a:xfrm>
+          <a:prstGeom prst="rect">
+            <a:avLst/>
+          </a:prstGeom>
+          <a:noFill/>
+          <a:ln/>
+        </p:spPr>
+        <p:txBody>
+          <a:bodyPr wrap="square" lIns="0" tIns="0" rIns="0" bIns="0" rtlCol="0" anchor="ctr"/>
+          <a:lstStyle/>
+          <a:p>
+            <a:pPr algn="r" indent="0" marL="0">
+              <a:buNone/>
+            </a:pPr>
+            <a:r>
+              <a:rPr lang="en-US" sz="1300" dirty="0">
+                <a:solidFill>
+                  <a:srgbClr val="9FB0C4"/>
+                </a:solidFill>
+                <a:latin typeface="Courier New" pitchFamily="34" charset="0"/>
+                <a:ea typeface="Courier New" pitchFamily="34" charset="-122"/>
+                <a:cs typeface="Courier New" pitchFamily="34" charset="-120"/>
+              </a:rPr>
+              <a:t>shift=2</a:t>
+            </a:r>
+            <a:endParaRPr lang="en-US" sz="1300" dirty="0"/>
+          </a:p>
+        </p:txBody>
+      </p:sp>
+      <p:sp>
+        <p:nvSpPr>
+          <p:cNvPr id="42" name="Shape 40"/>
+          <p:cNvSpPr/>
+          <p:nvPr/>
+        </p:nvSpPr>
+        <p:spPr>
+          <a:xfrm>
+            <a:off x="2103120" y="3465576"/>
+            <a:ext cx="566928" cy="566928"/>
+          </a:xfrm>
+          <a:prstGeom prst="roundRect">
+            <a:avLst>
+              <a:gd name="adj" fmla="val 8065"/>
+            </a:avLst>
+          </a:prstGeom>
+          <a:solidFill>
+            <a:srgbClr val="0B1119"/>
+          </a:solidFill>
+          <a:ln w="12700">
+            <a:solidFill>
+              <a:srgbClr val="2C3A4E"/>
+            </a:solidFill>
+            <a:prstDash val="solid"/>
+          </a:ln>
+        </p:spPr>
+      </p:sp>
+      <p:sp>
+        <p:nvSpPr>
+          <p:cNvPr id="43" name="Text 41"/>
+          <p:cNvSpPr/>
+          <p:nvPr/>
+        </p:nvSpPr>
+        <p:spPr>
+          <a:xfrm>
+            <a:off x="2103120" y="3465576"/>
+            <a:ext cx="566928" cy="566928"/>
+          </a:xfrm>
+          <a:prstGeom prst="rect">
+            <a:avLst/>
+          </a:prstGeom>
+          <a:noFill/>
+          <a:ln/>
+        </p:spPr>
+        <p:txBody>
+          <a:bodyPr wrap="square" lIns="0" tIns="0" rIns="0" bIns="0" rtlCol="0" anchor="ctr"/>
+          <a:lstStyle/>
+          <a:p>
+            <a:pPr algn="ctr" indent="0" marL="0">
+              <a:buNone/>
+            </a:pPr>
+            <a:r>
+              <a:rPr lang="en-US" sz="1500" dirty="0">
+                <a:solidFill>
+                  <a:srgbClr val="6B7D94"/>
+                </a:solidFill>
+                <a:latin typeface="Courier New" pitchFamily="34" charset="0"/>
+                <a:ea typeface="Courier New" pitchFamily="34" charset="-122"/>
+                <a:cs typeface="Courier New" pitchFamily="34" charset="-120"/>
+              </a:rPr>
+              <a:t>0</a:t>
+            </a:r>
+            <a:endParaRPr lang="en-US" sz="1500" dirty="0"/>
+          </a:p>
+        </p:txBody>
+      </p:sp>
+      <p:sp>
+        <p:nvSpPr>
+          <p:cNvPr id="44" name="Shape 42"/>
+          <p:cNvSpPr/>
+          <p:nvPr/>
+        </p:nvSpPr>
+        <p:spPr>
+          <a:xfrm>
+            <a:off x="2761488" y="3465576"/>
+            <a:ext cx="566928" cy="566928"/>
+          </a:xfrm>
+          <a:prstGeom prst="roundRect">
+            <a:avLst>
+              <a:gd name="adj" fmla="val 8065"/>
+            </a:avLst>
+          </a:prstGeom>
+          <a:solidFill>
+            <a:srgbClr val="0B1119"/>
+          </a:solidFill>
+          <a:ln w="12700">
+            <a:solidFill>
+              <a:srgbClr val="2C3A4E"/>
+            </a:solidFill>
+            <a:prstDash val="solid"/>
+          </a:ln>
+        </p:spPr>
+      </p:sp>
+      <p:sp>
+        <p:nvSpPr>
+          <p:cNvPr id="45" name="Text 43"/>
+          <p:cNvSpPr/>
+          <p:nvPr/>
+        </p:nvSpPr>
+        <p:spPr>
+          <a:xfrm>
+            <a:off x="2761488" y="3465576"/>
+            <a:ext cx="566928" cy="566928"/>
+          </a:xfrm>
+          <a:prstGeom prst="rect">
+            <a:avLst/>
+          </a:prstGeom>
+          <a:noFill/>
+          <a:ln/>
+        </p:spPr>
+        <p:txBody>
+          <a:bodyPr wrap="square" lIns="0" tIns="0" rIns="0" bIns="0" rtlCol="0" anchor="ctr"/>
+          <a:lstStyle/>
+          <a:p>
+            <a:pPr algn="ctr" indent="0" marL="0">
+              <a:buNone/>
+            </a:pPr>
+            <a:r>
+              <a:rPr lang="en-US" sz="1500" dirty="0">
+                <a:solidFill>
+                  <a:srgbClr val="6B7D94"/>
+                </a:solidFill>
+                <a:latin typeface="Courier New" pitchFamily="34" charset="0"/>
+                <a:ea typeface="Courier New" pitchFamily="34" charset="-122"/>
+                <a:cs typeface="Courier New" pitchFamily="34" charset="-120"/>
+              </a:rPr>
+              <a:t>0</a:t>
+            </a:r>
+            <a:endParaRPr lang="en-US" sz="1500" dirty="0"/>
+          </a:p>
+        </p:txBody>
+      </p:sp>
+      <p:sp>
+        <p:nvSpPr>
+          <p:cNvPr id="46" name="Shape 44"/>
+          <p:cNvSpPr/>
+          <p:nvPr/>
+        </p:nvSpPr>
+        <p:spPr>
+          <a:xfrm>
+            <a:off x="3419856" y="3465576"/>
+            <a:ext cx="566928" cy="566928"/>
+          </a:xfrm>
+          <a:prstGeom prst="roundRect">
+            <a:avLst>
+              <a:gd name="adj" fmla="val 8065"/>
+            </a:avLst>
+          </a:prstGeom>
+          <a:solidFill>
+            <a:srgbClr val="0B1119"/>
+          </a:solidFill>
+          <a:ln w="12700">
+            <a:solidFill>
+              <a:srgbClr val="2C3A4E"/>
+            </a:solidFill>
+            <a:prstDash val="solid"/>
+          </a:ln>
+        </p:spPr>
+      </p:sp>
+      <p:sp>
+        <p:nvSpPr>
+          <p:cNvPr id="47" name="Text 45"/>
+          <p:cNvSpPr/>
+          <p:nvPr/>
+        </p:nvSpPr>
+        <p:spPr>
+          <a:xfrm>
+            <a:off x="3419856" y="3465576"/>
+            <a:ext cx="566928" cy="566928"/>
+          </a:xfrm>
+          <a:prstGeom prst="rect">
+            <a:avLst/>
+          </a:prstGeom>
+          <a:noFill/>
+          <a:ln/>
+        </p:spPr>
+        <p:txBody>
+          <a:bodyPr wrap="square" lIns="0" tIns="0" rIns="0" bIns="0" rtlCol="0" anchor="ctr"/>
+          <a:lstStyle/>
+          <a:p>
+            <a:pPr algn="ctr" indent="0" marL="0">
+              <a:buNone/>
+            </a:pPr>
+            <a:r>
+              <a:rPr lang="en-US" sz="1500" dirty="0">
+                <a:solidFill>
+                  <a:srgbClr val="6B7D94"/>
+                </a:solidFill>
+                <a:latin typeface="Courier New" pitchFamily="34" charset="0"/>
+                <a:ea typeface="Courier New" pitchFamily="34" charset="-122"/>
+                <a:cs typeface="Courier New" pitchFamily="34" charset="-120"/>
+              </a:rPr>
+              <a:t>0</a:t>
+            </a:r>
+            <a:endParaRPr lang="en-US" sz="1500" dirty="0"/>
+          </a:p>
+        </p:txBody>
+      </p:sp>
+      <p:sp>
+        <p:nvSpPr>
+          <p:cNvPr id="48" name="Shape 46"/>
+          <p:cNvSpPr/>
+          <p:nvPr/>
+        </p:nvSpPr>
+        <p:spPr>
+          <a:xfrm>
+            <a:off x="4078224" y="3465576"/>
+            <a:ext cx="566928" cy="566928"/>
+          </a:xfrm>
+          <a:prstGeom prst="roundRect">
+            <a:avLst>
+              <a:gd name="adj" fmla="val 8065"/>
+            </a:avLst>
+          </a:prstGeom>
+          <a:solidFill>
+            <a:srgbClr val="0B1119"/>
+          </a:solidFill>
+          <a:ln w="12700">
+            <a:solidFill>
+              <a:srgbClr val="2C3A4E"/>
+            </a:solidFill>
+            <a:prstDash val="solid"/>
+          </a:ln>
+        </p:spPr>
+      </p:sp>
+      <p:sp>
+        <p:nvSpPr>
+          <p:cNvPr id="49" name="Text 47"/>
+          <p:cNvSpPr/>
+          <p:nvPr/>
+        </p:nvSpPr>
+        <p:spPr>
+          <a:xfrm>
+            <a:off x="4078224" y="3465576"/>
+            <a:ext cx="566928" cy="566928"/>
+          </a:xfrm>
+          <a:prstGeom prst="rect">
+            <a:avLst/>
+          </a:prstGeom>
+          <a:noFill/>
+          <a:ln/>
+        </p:spPr>
+        <p:txBody>
+          <a:bodyPr wrap="square" lIns="0" tIns="0" rIns="0" bIns="0" rtlCol="0" anchor="ctr"/>
+          <a:lstStyle/>
+          <a:p>
+            <a:pPr algn="ctr" indent="0" marL="0">
+              <a:buNone/>
+            </a:pPr>
+            <a:r>
+              <a:rPr lang="en-US" sz="1500" dirty="0">
+                <a:solidFill>
+                  <a:srgbClr val="6B7D94"/>
+                </a:solidFill>
+                <a:latin typeface="Courier New" pitchFamily="34" charset="0"/>
+                <a:ea typeface="Courier New" pitchFamily="34" charset="-122"/>
+                <a:cs typeface="Courier New" pitchFamily="34" charset="-120"/>
+              </a:rPr>
+              <a:t>0</a:t>
+            </a:r>
+            <a:endParaRPr lang="en-US" sz="1500" dirty="0"/>
+          </a:p>
+        </p:txBody>
+      </p:sp>
+      <p:sp>
+        <p:nvSpPr>
+          <p:cNvPr id="50" name="Shape 48"/>
+          <p:cNvSpPr/>
+          <p:nvPr/>
+        </p:nvSpPr>
+        <p:spPr>
+          <a:xfrm>
+            <a:off x="4736592" y="3465576"/>
+            <a:ext cx="566928" cy="566928"/>
+          </a:xfrm>
+          <a:prstGeom prst="roundRect">
+            <a:avLst>
+              <a:gd name="adj" fmla="val 8065"/>
+            </a:avLst>
+          </a:prstGeom>
+          <a:solidFill>
+            <a:srgbClr val="0B1119"/>
+          </a:solidFill>
+          <a:ln w="12700">
+            <a:solidFill>
+              <a:srgbClr val="2C3A4E"/>
+            </a:solidFill>
+            <a:prstDash val="solid"/>
+          </a:ln>
+        </p:spPr>
+      </p:sp>
+      <p:sp>
+        <p:nvSpPr>
+          <p:cNvPr id="51" name="Text 49"/>
+          <p:cNvSpPr/>
+          <p:nvPr/>
+        </p:nvSpPr>
+        <p:spPr>
+          <a:xfrm>
+            <a:off x="4736592" y="3465576"/>
+            <a:ext cx="566928" cy="566928"/>
+          </a:xfrm>
+          <a:prstGeom prst="rect">
+            <a:avLst/>
+          </a:prstGeom>
+          <a:noFill/>
+          <a:ln/>
+        </p:spPr>
+        <p:txBody>
+          <a:bodyPr wrap="square" lIns="0" tIns="0" rIns="0" bIns="0" rtlCol="0" anchor="ctr"/>
+          <a:lstStyle/>
+          <a:p>
+            <a:pPr algn="ctr" indent="0" marL="0">
+              <a:buNone/>
+            </a:pPr>
+            <a:r>
+              <a:rPr lang="en-US" sz="1500" dirty="0">
+                <a:solidFill>
+                  <a:srgbClr val="6B7D94"/>
+                </a:solidFill>
+                <a:latin typeface="Courier New" pitchFamily="34" charset="0"/>
+                <a:ea typeface="Courier New" pitchFamily="34" charset="-122"/>
+                <a:cs typeface="Courier New" pitchFamily="34" charset="-120"/>
+              </a:rPr>
+              <a:t>0</a:t>
+            </a:r>
+            <a:endParaRPr lang="en-US" sz="1500" dirty="0"/>
+          </a:p>
+        </p:txBody>
+      </p:sp>
+      <p:sp>
+        <p:nvSpPr>
+          <p:cNvPr id="52" name="Shape 50"/>
+          <p:cNvSpPr/>
+          <p:nvPr/>
+        </p:nvSpPr>
+        <p:spPr>
+          <a:xfrm>
+            <a:off x="5394960" y="3465576"/>
+            <a:ext cx="566928" cy="566928"/>
+          </a:xfrm>
+          <a:prstGeom prst="roundRect">
+            <a:avLst>
+              <a:gd name="adj" fmla="val 8065"/>
+            </a:avLst>
+          </a:prstGeom>
+          <a:solidFill>
+            <a:srgbClr val="E8A33D"/>
+          </a:solidFill>
+          <a:ln w="12700">
+            <a:solidFill>
+              <a:srgbClr val="E8A33D"/>
+            </a:solidFill>
+            <a:prstDash val="solid"/>
+          </a:ln>
+        </p:spPr>
+      </p:sp>
+      <p:sp>
+        <p:nvSpPr>
+          <p:cNvPr id="53" name="Text 51"/>
+          <p:cNvSpPr/>
+          <p:nvPr/>
+        </p:nvSpPr>
+        <p:spPr>
+          <a:xfrm>
+            <a:off x="5394960" y="3465576"/>
+            <a:ext cx="566928" cy="566928"/>
+          </a:xfrm>
+          <a:prstGeom prst="rect">
+            <a:avLst/>
+          </a:prstGeom>
+          <a:noFill/>
+          <a:ln/>
+        </p:spPr>
+        <p:txBody>
+          <a:bodyPr wrap="square" lIns="0" tIns="0" rIns="0" bIns="0" rtlCol="0" anchor="ctr"/>
+          <a:lstStyle/>
+          <a:p>
+            <a:pPr algn="ctr" indent="0" marL="0">
+              <a:buNone/>
+            </a:pPr>
+            <a:r>
+              <a:rPr lang="en-US" sz="1500" b="1" dirty="0">
+                <a:solidFill>
+                  <a:srgbClr val="101722"/>
+                </a:solidFill>
+                <a:latin typeface="Courier New" pitchFamily="34" charset="0"/>
+                <a:ea typeface="Courier New" pitchFamily="34" charset="-122"/>
+                <a:cs typeface="Courier New" pitchFamily="34" charset="-120"/>
+              </a:rPr>
+              <a:t>1</a:t>
+            </a:r>
+            <a:endParaRPr lang="en-US" sz="1500" dirty="0"/>
+          </a:p>
+        </p:txBody>
+      </p:sp>
+      <p:sp>
+        <p:nvSpPr>
+          <p:cNvPr id="54" name="Shape 52"/>
+          <p:cNvSpPr/>
+          <p:nvPr/>
+        </p:nvSpPr>
+        <p:spPr>
+          <a:xfrm>
+            <a:off x="6053328" y="3465576"/>
+            <a:ext cx="566928" cy="566928"/>
+          </a:xfrm>
+          <a:prstGeom prst="roundRect">
+            <a:avLst>
+              <a:gd name="adj" fmla="val 8065"/>
+            </a:avLst>
+          </a:prstGeom>
+          <a:solidFill>
+            <a:srgbClr val="0B1119"/>
+          </a:solidFill>
+          <a:ln w="12700">
+            <a:solidFill>
+              <a:srgbClr val="2C3A4E"/>
+            </a:solidFill>
+            <a:prstDash val="solid"/>
+          </a:ln>
+        </p:spPr>
+      </p:sp>
+      <p:sp>
+        <p:nvSpPr>
+          <p:cNvPr id="55" name="Text 53"/>
+          <p:cNvSpPr/>
+          <p:nvPr/>
+        </p:nvSpPr>
+        <p:spPr>
+          <a:xfrm>
+            <a:off x="6053328" y="3465576"/>
+            <a:ext cx="566928" cy="566928"/>
+          </a:xfrm>
+          <a:prstGeom prst="rect">
+            <a:avLst/>
+          </a:prstGeom>
+          <a:noFill/>
+          <a:ln/>
+        </p:spPr>
+        <p:txBody>
+          <a:bodyPr wrap="square" lIns="0" tIns="0" rIns="0" bIns="0" rtlCol="0" anchor="ctr"/>
+          <a:lstStyle/>
+          <a:p>
+            <a:pPr algn="ctr" indent="0" marL="0">
+              <a:buNone/>
+            </a:pPr>
+            <a:r>
+              <a:rPr lang="en-US" sz="1500" dirty="0">
+                <a:solidFill>
+                  <a:srgbClr val="6B7D94"/>
+                </a:solidFill>
+                <a:latin typeface="Courier New" pitchFamily="34" charset="0"/>
+                <a:ea typeface="Courier New" pitchFamily="34" charset="-122"/>
+                <a:cs typeface="Courier New" pitchFamily="34" charset="-120"/>
+              </a:rPr>
+              <a:t>0</a:t>
+            </a:r>
+            <a:endParaRPr lang="en-US" sz="1500" dirty="0"/>
+          </a:p>
+        </p:txBody>
+      </p:sp>
+      <p:sp>
+        <p:nvSpPr>
+          <p:cNvPr id="56" name="Shape 54"/>
+          <p:cNvSpPr/>
+          <p:nvPr/>
+        </p:nvSpPr>
+        <p:spPr>
+          <a:xfrm>
+            <a:off x="6711696" y="3465576"/>
+            <a:ext cx="566928" cy="566928"/>
+          </a:xfrm>
+          <a:prstGeom prst="roundRect">
+            <a:avLst>
+              <a:gd name="adj" fmla="val 8065"/>
+            </a:avLst>
+          </a:prstGeom>
+          <a:solidFill>
+            <a:srgbClr val="0B1119"/>
+          </a:solidFill>
+          <a:ln w="12700">
+            <a:solidFill>
+              <a:srgbClr val="2C3A4E"/>
+            </a:solidFill>
+            <a:prstDash val="solid"/>
+          </a:ln>
+        </p:spPr>
+      </p:sp>
+      <p:sp>
+        <p:nvSpPr>
+          <p:cNvPr id="57" name="Text 55"/>
+          <p:cNvSpPr/>
+          <p:nvPr/>
+        </p:nvSpPr>
+        <p:spPr>
+          <a:xfrm>
+            <a:off x="6711696" y="3465576"/>
+            <a:ext cx="566928" cy="566928"/>
+          </a:xfrm>
+          <a:prstGeom prst="rect">
+            <a:avLst/>
+          </a:prstGeom>
+          <a:noFill/>
+          <a:ln/>
+        </p:spPr>
+        <p:txBody>
+          <a:bodyPr wrap="square" lIns="0" tIns="0" rIns="0" bIns="0" rtlCol="0" anchor="ctr"/>
+          <a:lstStyle/>
+          <a:p>
+            <a:pPr algn="ctr" indent="0" marL="0">
+              <a:buNone/>
+            </a:pPr>
+            <a:r>
+              <a:rPr lang="en-US" sz="1500" dirty="0">
+                <a:solidFill>
+                  <a:srgbClr val="6B7D94"/>
+                </a:solidFill>
+                <a:latin typeface="Courier New" pitchFamily="34" charset="0"/>
+                <a:ea typeface="Courier New" pitchFamily="34" charset="-122"/>
+                <a:cs typeface="Courier New" pitchFamily="34" charset="-120"/>
+              </a:rPr>
+              <a:t>0</a:t>
+            </a:r>
+            <a:endParaRPr lang="en-US" sz="1500" dirty="0"/>
+          </a:p>
+        </p:txBody>
+      </p:sp>
+      <p:sp>
+        <p:nvSpPr>
+          <p:cNvPr id="58" name="Text 56"/>
+          <p:cNvSpPr/>
+          <p:nvPr/>
+        </p:nvSpPr>
+        <p:spPr>
+          <a:xfrm>
+            <a:off x="7552944" y="3483864"/>
+            <a:ext cx="2103120" cy="566928"/>
+          </a:xfrm>
+          <a:prstGeom prst="rect">
+            <a:avLst/>
+          </a:prstGeom>
+          <a:noFill/>
+          <a:ln/>
+        </p:spPr>
+        <p:txBody>
+          <a:bodyPr wrap="square" lIns="0" tIns="0" rIns="0" bIns="0" rtlCol="0" anchor="ctr"/>
+          <a:lstStyle/>
+          <a:p>
+            <a:pPr indent="0" marL="0">
+              <a:buNone/>
+            </a:pPr>
+            <a:r>
+              <a:rPr lang="en-US" sz="1300" dirty="0">
+                <a:solidFill>
+                  <a:srgbClr val="3FB8C4"/>
+                </a:solidFill>
+                <a:latin typeface="Courier New" pitchFamily="34" charset="0"/>
+                <a:ea typeface="Courier New" pitchFamily="34" charset="-122"/>
+                <a:cs typeface="Courier New" pitchFamily="34" charset="-120"/>
+              </a:rPr>
+              <a:t>0x04040404</a:t>
+            </a:r>
+            <a:endParaRPr lang="en-US" sz="1300" dirty="0"/>
+          </a:p>
+        </p:txBody>
+      </p:sp>
+      <p:sp>
+        <p:nvSpPr>
+          <p:cNvPr id="59" name="Text 57"/>
+          <p:cNvSpPr/>
+          <p:nvPr/>
+        </p:nvSpPr>
+        <p:spPr>
+          <a:xfrm>
+            <a:off x="548640" y="4233672"/>
+            <a:ext cx="1371600" cy="566928"/>
+          </a:xfrm>
+          <a:prstGeom prst="rect">
+            <a:avLst/>
+          </a:prstGeom>
+          <a:noFill/>
+          <a:ln/>
+        </p:spPr>
+        <p:txBody>
+          <a:bodyPr wrap="square" lIns="0" tIns="0" rIns="0" bIns="0" rtlCol="0" anchor="ctr"/>
+          <a:lstStyle/>
+          <a:p>
+            <a:pPr algn="r" indent="0" marL="0">
+              <a:buNone/>
+            </a:pPr>
+            <a:r>
+              <a:rPr lang="en-US" sz="1300" dirty="0">
+                <a:solidFill>
+                  <a:srgbClr val="9FB0C4"/>
+                </a:solidFill>
+                <a:latin typeface="Courier New" pitchFamily="34" charset="0"/>
+                <a:ea typeface="Courier New" pitchFamily="34" charset="-122"/>
+                <a:cs typeface="Courier New" pitchFamily="34" charset="-120"/>
+              </a:rPr>
+              <a:t>shift=3</a:t>
+            </a:r>
+            <a:endParaRPr lang="en-US" sz="1300" dirty="0"/>
+          </a:p>
+        </p:txBody>
+      </p:sp>
+      <p:sp>
+        <p:nvSpPr>
+          <p:cNvPr id="60" name="Shape 58"/>
+          <p:cNvSpPr/>
+          <p:nvPr/>
+        </p:nvSpPr>
+        <p:spPr>
+          <a:xfrm>
+            <a:off x="2103120" y="4215384"/>
+            <a:ext cx="566928" cy="566928"/>
+          </a:xfrm>
+          <a:prstGeom prst="roundRect">
+            <a:avLst>
+              <a:gd name="adj" fmla="val 8065"/>
+            </a:avLst>
+          </a:prstGeom>
+          <a:solidFill>
+            <a:srgbClr val="0B1119"/>
+          </a:solidFill>
+          <a:ln w="12700">
+            <a:solidFill>
+              <a:srgbClr val="2C3A4E"/>
+            </a:solidFill>
+            <a:prstDash val="solid"/>
+          </a:ln>
+        </p:spPr>
+      </p:sp>
+      <p:sp>
+        <p:nvSpPr>
+          <p:cNvPr id="61" name="Text 59"/>
+          <p:cNvSpPr/>
+          <p:nvPr/>
+        </p:nvSpPr>
+        <p:spPr>
+          <a:xfrm>
+            <a:off x="2103120" y="4215384"/>
+            <a:ext cx="566928" cy="566928"/>
+          </a:xfrm>
+          <a:prstGeom prst="rect">
+            <a:avLst/>
+          </a:prstGeom>
+          <a:noFill/>
+          <a:ln/>
+        </p:spPr>
+        <p:txBody>
+          <a:bodyPr wrap="square" lIns="0" tIns="0" rIns="0" bIns="0" rtlCol="0" anchor="ctr"/>
+          <a:lstStyle/>
+          <a:p>
+            <a:pPr algn="ctr" indent="0" marL="0">
+              <a:buNone/>
+            </a:pPr>
+            <a:r>
+              <a:rPr lang="en-US" sz="1500" dirty="0">
+                <a:solidFill>
+                  <a:srgbClr val="6B7D94"/>
+                </a:solidFill>
+                <a:latin typeface="Courier New" pitchFamily="34" charset="0"/>
+                <a:ea typeface="Courier New" pitchFamily="34" charset="-122"/>
+                <a:cs typeface="Courier New" pitchFamily="34" charset="-120"/>
+              </a:rPr>
+              <a:t>0</a:t>
+            </a:r>
+            <a:endParaRPr lang="en-US" sz="1500" dirty="0"/>
+          </a:p>
+        </p:txBody>
+      </p:sp>
+      <p:sp>
+        <p:nvSpPr>
+          <p:cNvPr id="62" name="Shape 60"/>
+          <p:cNvSpPr/>
+          <p:nvPr/>
+        </p:nvSpPr>
+        <p:spPr>
+          <a:xfrm>
+            <a:off x="2761488" y="4215384"/>
+            <a:ext cx="566928" cy="566928"/>
+          </a:xfrm>
+          <a:prstGeom prst="roundRect">
+            <a:avLst>
+              <a:gd name="adj" fmla="val 8065"/>
+            </a:avLst>
+          </a:prstGeom>
+          <a:solidFill>
+            <a:srgbClr val="0B1119"/>
+          </a:solidFill>
+          <a:ln w="12700">
+            <a:solidFill>
+              <a:srgbClr val="2C3A4E"/>
+            </a:solidFill>
+            <a:prstDash val="solid"/>
+          </a:ln>
+        </p:spPr>
+      </p:sp>
+      <p:sp>
+        <p:nvSpPr>
+          <p:cNvPr id="63" name="Text 61"/>
+          <p:cNvSpPr/>
+          <p:nvPr/>
+        </p:nvSpPr>
+        <p:spPr>
+          <a:xfrm>
+            <a:off x="2761488" y="4215384"/>
+            <a:ext cx="566928" cy="566928"/>
+          </a:xfrm>
+          <a:prstGeom prst="rect">
+            <a:avLst/>
+          </a:prstGeom>
+          <a:noFill/>
+          <a:ln/>
+        </p:spPr>
+        <p:txBody>
+          <a:bodyPr wrap="square" lIns="0" tIns="0" rIns="0" bIns="0" rtlCol="0" anchor="ctr"/>
+          <a:lstStyle/>
+          <a:p>
+            <a:pPr algn="ctr" indent="0" marL="0">
+              <a:buNone/>
+            </a:pPr>
+            <a:r>
+              <a:rPr lang="en-US" sz="1500" dirty="0">
+                <a:solidFill>
+                  <a:srgbClr val="6B7D94"/>
+                </a:solidFill>
+                <a:latin typeface="Courier New" pitchFamily="34" charset="0"/>
+                <a:ea typeface="Courier New" pitchFamily="34" charset="-122"/>
+                <a:cs typeface="Courier New" pitchFamily="34" charset="-120"/>
+              </a:rPr>
+              <a:t>0</a:t>
+            </a:r>
+            <a:endParaRPr lang="en-US" sz="1500" dirty="0"/>
+          </a:p>
+        </p:txBody>
+      </p:sp>
+      <p:sp>
+        <p:nvSpPr>
+          <p:cNvPr id="64" name="Shape 62"/>
+          <p:cNvSpPr/>
+          <p:nvPr/>
+        </p:nvSpPr>
+        <p:spPr>
+          <a:xfrm>
+            <a:off x="3419856" y="4215384"/>
+            <a:ext cx="566928" cy="566928"/>
+          </a:xfrm>
+          <a:prstGeom prst="roundRect">
+            <a:avLst>
+              <a:gd name="adj" fmla="val 8065"/>
+            </a:avLst>
+          </a:prstGeom>
+          <a:solidFill>
+            <a:srgbClr val="0B1119"/>
+          </a:solidFill>
+          <a:ln w="12700">
+            <a:solidFill>
+              <a:srgbClr val="2C3A4E"/>
+            </a:solidFill>
+            <a:prstDash val="solid"/>
+          </a:ln>
+        </p:spPr>
+      </p:sp>
+      <p:sp>
+        <p:nvSpPr>
+          <p:cNvPr id="65" name="Text 63"/>
+          <p:cNvSpPr/>
+          <p:nvPr/>
+        </p:nvSpPr>
+        <p:spPr>
+          <a:xfrm>
+            <a:off x="3419856" y="4215384"/>
+            <a:ext cx="566928" cy="566928"/>
+          </a:xfrm>
+          <a:prstGeom prst="rect">
+            <a:avLst/>
+          </a:prstGeom>
+          <a:noFill/>
+          <a:ln/>
+        </p:spPr>
+        <p:txBody>
+          <a:bodyPr wrap="square" lIns="0" tIns="0" rIns="0" bIns="0" rtlCol="0" anchor="ctr"/>
+          <a:lstStyle/>
+          <a:p>
+            <a:pPr algn="ctr" indent="0" marL="0">
+              <a:buNone/>
+            </a:pPr>
+            <a:r>
+              <a:rPr lang="en-US" sz="1500" dirty="0">
+                <a:solidFill>
+                  <a:srgbClr val="6B7D94"/>
+                </a:solidFill>
+                <a:latin typeface="Courier New" pitchFamily="34" charset="0"/>
+                <a:ea typeface="Courier New" pitchFamily="34" charset="-122"/>
+                <a:cs typeface="Courier New" pitchFamily="34" charset="-120"/>
+              </a:rPr>
+              <a:t>0</a:t>
+            </a:r>
+            <a:endParaRPr lang="en-US" sz="1500" dirty="0"/>
+          </a:p>
+        </p:txBody>
+      </p:sp>
+      <p:sp>
+        <p:nvSpPr>
+          <p:cNvPr id="66" name="Shape 64"/>
+          <p:cNvSpPr/>
+          <p:nvPr/>
+        </p:nvSpPr>
+        <p:spPr>
+          <a:xfrm>
+            <a:off x="4078224" y="4215384"/>
+            <a:ext cx="566928" cy="566928"/>
+          </a:xfrm>
+          <a:prstGeom prst="roundRect">
+            <a:avLst>
+              <a:gd name="adj" fmla="val 8065"/>
+            </a:avLst>
+          </a:prstGeom>
+          <a:solidFill>
+            <a:srgbClr val="0B1119"/>
+          </a:solidFill>
+          <a:ln w="12700">
+            <a:solidFill>
+              <a:srgbClr val="2C3A4E"/>
+            </a:solidFill>
+            <a:prstDash val="solid"/>
+          </a:ln>
+        </p:spPr>
+      </p:sp>
+      <p:sp>
+        <p:nvSpPr>
+          <p:cNvPr id="67" name="Text 65"/>
+          <p:cNvSpPr/>
+          <p:nvPr/>
+        </p:nvSpPr>
+        <p:spPr>
+          <a:xfrm>
+            <a:off x="4078224" y="4215384"/>
+            <a:ext cx="566928" cy="566928"/>
+          </a:xfrm>
+          <a:prstGeom prst="rect">
+            <a:avLst/>
+          </a:prstGeom>
+          <a:noFill/>
+          <a:ln/>
+        </p:spPr>
+        <p:txBody>
+          <a:bodyPr wrap="square" lIns="0" tIns="0" rIns="0" bIns="0" rtlCol="0" anchor="ctr"/>
+          <a:lstStyle/>
+          <a:p>
+            <a:pPr algn="ctr" indent="0" marL="0">
+              <a:buNone/>
+            </a:pPr>
+            <a:r>
+              <a:rPr lang="en-US" sz="1500" dirty="0">
+                <a:solidFill>
+                  <a:srgbClr val="6B7D94"/>
+                </a:solidFill>
+                <a:latin typeface="Courier New" pitchFamily="34" charset="0"/>
+                <a:ea typeface="Courier New" pitchFamily="34" charset="-122"/>
+                <a:cs typeface="Courier New" pitchFamily="34" charset="-120"/>
+              </a:rPr>
+              <a:t>0</a:t>
+            </a:r>
+            <a:endParaRPr lang="en-US" sz="1500" dirty="0"/>
+          </a:p>
+        </p:txBody>
+      </p:sp>
+      <p:sp>
+        <p:nvSpPr>
+          <p:cNvPr id="68" name="Shape 66"/>
+          <p:cNvSpPr/>
+          <p:nvPr/>
+        </p:nvSpPr>
+        <p:spPr>
+          <a:xfrm>
+            <a:off x="4736592" y="4215384"/>
+            <a:ext cx="566928" cy="566928"/>
+          </a:xfrm>
+          <a:prstGeom prst="roundRect">
+            <a:avLst>
+              <a:gd name="adj" fmla="val 8065"/>
+            </a:avLst>
+          </a:prstGeom>
+          <a:solidFill>
+            <a:srgbClr val="E8A33D"/>
+          </a:solidFill>
+          <a:ln w="12700">
+            <a:solidFill>
+              <a:srgbClr val="E8A33D"/>
+            </a:solidFill>
+            <a:prstDash val="solid"/>
+          </a:ln>
+        </p:spPr>
+      </p:sp>
+      <p:sp>
+        <p:nvSpPr>
+          <p:cNvPr id="69" name="Text 67"/>
+          <p:cNvSpPr/>
+          <p:nvPr/>
+        </p:nvSpPr>
+        <p:spPr>
+          <a:xfrm>
+            <a:off x="4736592" y="4215384"/>
+            <a:ext cx="566928" cy="566928"/>
+          </a:xfrm>
+          <a:prstGeom prst="rect">
+            <a:avLst/>
+          </a:prstGeom>
+          <a:noFill/>
+          <a:ln/>
+        </p:spPr>
+        <p:txBody>
+          <a:bodyPr wrap="square" lIns="0" tIns="0" rIns="0" bIns="0" rtlCol="0" anchor="ctr"/>
+          <a:lstStyle/>
+          <a:p>
+            <a:pPr algn="ctr" indent="0" marL="0">
+              <a:buNone/>
+            </a:pPr>
+            <a:r>
+              <a:rPr lang="en-US" sz="1500" b="1" dirty="0">
+                <a:solidFill>
+                  <a:srgbClr val="101722"/>
+                </a:solidFill>
+                <a:latin typeface="Courier New" pitchFamily="34" charset="0"/>
+                <a:ea typeface="Courier New" pitchFamily="34" charset="-122"/>
+                <a:cs typeface="Courier New" pitchFamily="34" charset="-120"/>
+              </a:rPr>
+              <a:t>1</a:t>
+            </a:r>
+            <a:endParaRPr lang="en-US" sz="1500" dirty="0"/>
+          </a:p>
+        </p:txBody>
+      </p:sp>
+      <p:sp>
+        <p:nvSpPr>
+          <p:cNvPr id="70" name="Shape 68"/>
+          <p:cNvSpPr/>
+          <p:nvPr/>
+        </p:nvSpPr>
+        <p:spPr>
+          <a:xfrm>
+            <a:off x="5394960" y="4215384"/>
+            <a:ext cx="566928" cy="566928"/>
+          </a:xfrm>
+          <a:prstGeom prst="roundRect">
+            <a:avLst>
+              <a:gd name="adj" fmla="val 8065"/>
+            </a:avLst>
+          </a:prstGeom>
+          <a:solidFill>
+            <a:srgbClr val="0B1119"/>
+          </a:solidFill>
+          <a:ln w="12700">
+            <a:solidFill>
+              <a:srgbClr val="2C3A4E"/>
+            </a:solidFill>
+            <a:prstDash val="solid"/>
+          </a:ln>
+        </p:spPr>
+      </p:sp>
+      <p:sp>
+        <p:nvSpPr>
+          <p:cNvPr id="71" name="Text 69"/>
+          <p:cNvSpPr/>
+          <p:nvPr/>
+        </p:nvSpPr>
+        <p:spPr>
+          <a:xfrm>
+            <a:off x="5394960" y="4215384"/>
+            <a:ext cx="566928" cy="566928"/>
+          </a:xfrm>
+          <a:prstGeom prst="rect">
+            <a:avLst/>
+          </a:prstGeom>
+          <a:noFill/>
+          <a:ln/>
+        </p:spPr>
+        <p:txBody>
+          <a:bodyPr wrap="square" lIns="0" tIns="0" rIns="0" bIns="0" rtlCol="0" anchor="ctr"/>
+          <a:lstStyle/>
+          <a:p>
+            <a:pPr algn="ctr" indent="0" marL="0">
+              <a:buNone/>
+            </a:pPr>
+            <a:r>
+              <a:rPr lang="en-US" sz="1500" dirty="0">
+                <a:solidFill>
+                  <a:srgbClr val="6B7D94"/>
+                </a:solidFill>
+                <a:latin typeface="Courier New" pitchFamily="34" charset="0"/>
+                <a:ea typeface="Courier New" pitchFamily="34" charset="-122"/>
+                <a:cs typeface="Courier New" pitchFamily="34" charset="-120"/>
+              </a:rPr>
+              <a:t>0</a:t>
+            </a:r>
+            <a:endParaRPr lang="en-US" sz="1500" dirty="0"/>
+          </a:p>
+        </p:txBody>
+      </p:sp>
+      <p:sp>
+        <p:nvSpPr>
+          <p:cNvPr id="72" name="Shape 70"/>
+          <p:cNvSpPr/>
+          <p:nvPr/>
+        </p:nvSpPr>
+        <p:spPr>
+          <a:xfrm>
+            <a:off x="6053328" y="4215384"/>
+            <a:ext cx="566928" cy="566928"/>
+          </a:xfrm>
+          <a:prstGeom prst="roundRect">
+            <a:avLst>
+              <a:gd name="adj" fmla="val 8065"/>
+            </a:avLst>
+          </a:prstGeom>
+          <a:solidFill>
+            <a:srgbClr val="0B1119"/>
+          </a:solidFill>
+          <a:ln w="12700">
+            <a:solidFill>
+              <a:srgbClr val="2C3A4E"/>
+            </a:solidFill>
+            <a:prstDash val="solid"/>
+          </a:ln>
+        </p:spPr>
+      </p:sp>
+      <p:sp>
+        <p:nvSpPr>
+          <p:cNvPr id="73" name="Text 71"/>
+          <p:cNvSpPr/>
+          <p:nvPr/>
+        </p:nvSpPr>
+        <p:spPr>
+          <a:xfrm>
+            <a:off x="6053328" y="4215384"/>
+            <a:ext cx="566928" cy="566928"/>
+          </a:xfrm>
+          <a:prstGeom prst="rect">
+            <a:avLst/>
+          </a:prstGeom>
+          <a:noFill/>
+          <a:ln/>
+        </p:spPr>
+        <p:txBody>
+          <a:bodyPr wrap="square" lIns="0" tIns="0" rIns="0" bIns="0" rtlCol="0" anchor="ctr"/>
+          <a:lstStyle/>
+          <a:p>
+            <a:pPr algn="ctr" indent="0" marL="0">
+              <a:buNone/>
+            </a:pPr>
+            <a:r>
+              <a:rPr lang="en-US" sz="1500" dirty="0">
+                <a:solidFill>
+                  <a:srgbClr val="6B7D94"/>
+                </a:solidFill>
+                <a:latin typeface="Courier New" pitchFamily="34" charset="0"/>
+                <a:ea typeface="Courier New" pitchFamily="34" charset="-122"/>
+                <a:cs typeface="Courier New" pitchFamily="34" charset="-120"/>
+              </a:rPr>
+              <a:t>0</a:t>
+            </a:r>
+            <a:endParaRPr lang="en-US" sz="1500" dirty="0"/>
+          </a:p>
+        </p:txBody>
+      </p:sp>
+      <p:sp>
+        <p:nvSpPr>
+          <p:cNvPr id="74" name="Shape 72"/>
+          <p:cNvSpPr/>
+          <p:nvPr/>
+        </p:nvSpPr>
+        <p:spPr>
+          <a:xfrm>
+            <a:off x="6711696" y="4215384"/>
+            <a:ext cx="566928" cy="566928"/>
+          </a:xfrm>
+          <a:prstGeom prst="roundRect">
+            <a:avLst>
+              <a:gd name="adj" fmla="val 8065"/>
+            </a:avLst>
+          </a:prstGeom>
+          <a:solidFill>
+            <a:srgbClr val="0B1119"/>
+          </a:solidFill>
+          <a:ln w="12700">
+            <a:solidFill>
+              <a:srgbClr val="2C3A4E"/>
+            </a:solidFill>
+            <a:prstDash val="solid"/>
+          </a:ln>
+        </p:spPr>
+      </p:sp>
+      <p:sp>
+        <p:nvSpPr>
+          <p:cNvPr id="75" name="Text 73"/>
+          <p:cNvSpPr/>
+          <p:nvPr/>
+        </p:nvSpPr>
+        <p:spPr>
+          <a:xfrm>
+            <a:off x="6711696" y="4215384"/>
+            <a:ext cx="566928" cy="566928"/>
+          </a:xfrm>
+          <a:prstGeom prst="rect">
+            <a:avLst/>
+          </a:prstGeom>
+          <a:noFill/>
+          <a:ln/>
+        </p:spPr>
+        <p:txBody>
+          <a:bodyPr wrap="square" lIns="0" tIns="0" rIns="0" bIns="0" rtlCol="0" anchor="ctr"/>
+          <a:lstStyle/>
+          <a:p>
+            <a:pPr algn="ctr" indent="0" marL="0">
+              <a:buNone/>
+            </a:pPr>
+            <a:r>
+              <a:rPr lang="en-US" sz="1500" dirty="0">
+                <a:solidFill>
+                  <a:srgbClr val="6B7D94"/>
+                </a:solidFill>
+                <a:latin typeface="Courier New" pitchFamily="34" charset="0"/>
+                <a:ea typeface="Courier New" pitchFamily="34" charset="-122"/>
+                <a:cs typeface="Courier New" pitchFamily="34" charset="-120"/>
+              </a:rPr>
+              <a:t>0</a:t>
+            </a:r>
+            <a:endParaRPr lang="en-US" sz="1500" dirty="0"/>
+          </a:p>
+        </p:txBody>
+      </p:sp>
+      <p:sp>
+        <p:nvSpPr>
+          <p:cNvPr id="76" name="Text 74"/>
+          <p:cNvSpPr/>
+          <p:nvPr/>
+        </p:nvSpPr>
+        <p:spPr>
+          <a:xfrm>
+            <a:off x="7552944" y="4233672"/>
+            <a:ext cx="2103120" cy="566928"/>
+          </a:xfrm>
+          <a:prstGeom prst="rect">
+            <a:avLst/>
+          </a:prstGeom>
+          <a:noFill/>
+          <a:ln/>
+        </p:spPr>
+        <p:txBody>
+          <a:bodyPr wrap="square" lIns="0" tIns="0" rIns="0" bIns="0" rtlCol="0" anchor="ctr"/>
+          <a:lstStyle/>
+          <a:p>
+            <a:pPr indent="0" marL="0">
+              <a:buNone/>
+            </a:pPr>
+            <a:r>
+              <a:rPr lang="en-US" sz="1300" dirty="0">
+                <a:solidFill>
+                  <a:srgbClr val="3FB8C4"/>
+                </a:solidFill>
+                <a:latin typeface="Courier New" pitchFamily="34" charset="0"/>
+                <a:ea typeface="Courier New" pitchFamily="34" charset="-122"/>
+                <a:cs typeface="Courier New" pitchFamily="34" charset="-120"/>
+              </a:rPr>
+              <a:t>0x08080808</a:t>
+            </a:r>
+            <a:endParaRPr lang="en-US" sz="1300" dirty="0"/>
+          </a:p>
+        </p:txBody>
+      </p:sp>
+      <p:sp>
+        <p:nvSpPr>
+          <p:cNvPr id="77" name="Text 75"/>
+          <p:cNvSpPr/>
+          <p:nvPr/>
+        </p:nvSpPr>
+        <p:spPr>
+          <a:xfrm>
+            <a:off x="548640" y="4983480"/>
+            <a:ext cx="1371600" cy="566928"/>
+          </a:xfrm>
+          <a:prstGeom prst="rect">
+            <a:avLst/>
+          </a:prstGeom>
+          <a:noFill/>
+          <a:ln/>
+        </p:spPr>
+        <p:txBody>
+          <a:bodyPr wrap="square" lIns="0" tIns="0" rIns="0" bIns="0" rtlCol="0" anchor="ctr"/>
+          <a:lstStyle/>
+          <a:p>
+            <a:pPr algn="r" indent="0" marL="0">
+              <a:buNone/>
+            </a:pPr>
+            <a:r>
+              <a:rPr lang="en-US" sz="1300" dirty="0">
+                <a:solidFill>
+                  <a:srgbClr val="9FB0C4"/>
+                </a:solidFill>
+                <a:latin typeface="Courier New" pitchFamily="34" charset="0"/>
+                <a:ea typeface="Courier New" pitchFamily="34" charset="-122"/>
+                <a:cs typeface="Courier New" pitchFamily="34" charset="-120"/>
+              </a:rPr>
+              <a:t>shift=4</a:t>
+            </a:r>
+            <a:endParaRPr lang="en-US" sz="1300" dirty="0"/>
+          </a:p>
+        </p:txBody>
+      </p:sp>
+      <p:sp>
+        <p:nvSpPr>
+          <p:cNvPr id="78" name="Shape 76"/>
+          <p:cNvSpPr/>
+          <p:nvPr/>
+        </p:nvSpPr>
+        <p:spPr>
+          <a:xfrm>
+            <a:off x="2103120" y="4965192"/>
+            <a:ext cx="566928" cy="566928"/>
+          </a:xfrm>
+          <a:prstGeom prst="roundRect">
+            <a:avLst>
+              <a:gd name="adj" fmla="val 8065"/>
+            </a:avLst>
+          </a:prstGeom>
+          <a:solidFill>
+            <a:srgbClr val="0B1119"/>
+          </a:solidFill>
+          <a:ln w="12700">
+            <a:solidFill>
+              <a:srgbClr val="2C3A4E"/>
+            </a:solidFill>
+            <a:prstDash val="solid"/>
+          </a:ln>
+        </p:spPr>
+      </p:sp>
+      <p:sp>
+        <p:nvSpPr>
+          <p:cNvPr id="79" name="Text 77"/>
+          <p:cNvSpPr/>
+          <p:nvPr/>
+        </p:nvSpPr>
+        <p:spPr>
+          <a:xfrm>
+            <a:off x="2103120" y="4965192"/>
+            <a:ext cx="566928" cy="566928"/>
+          </a:xfrm>
+          <a:prstGeom prst="rect">
+            <a:avLst/>
+          </a:prstGeom>
+          <a:noFill/>
+          <a:ln/>
+        </p:spPr>
+        <p:txBody>
+          <a:bodyPr wrap="square" lIns="0" tIns="0" rIns="0" bIns="0" rtlCol="0" anchor="ctr"/>
+          <a:lstStyle/>
+          <a:p>
+            <a:pPr algn="ctr" indent="0" marL="0">
+              <a:buNone/>
+            </a:pPr>
+            <a:r>
+              <a:rPr lang="en-US" sz="1500" dirty="0">
+                <a:solidFill>
+                  <a:srgbClr val="6B7D94"/>
+                </a:solidFill>
+                <a:latin typeface="Courier New" pitchFamily="34" charset="0"/>
+                <a:ea typeface="Courier New" pitchFamily="34" charset="-122"/>
+                <a:cs typeface="Courier New" pitchFamily="34" charset="-120"/>
+              </a:rPr>
+              <a:t>0</a:t>
+            </a:r>
+            <a:endParaRPr lang="en-US" sz="1500" dirty="0"/>
+          </a:p>
+        </p:txBody>
+      </p:sp>
+      <p:sp>
+        <p:nvSpPr>
+          <p:cNvPr id="80" name="Shape 78"/>
+          <p:cNvSpPr/>
+          <p:nvPr/>
+        </p:nvSpPr>
+        <p:spPr>
+          <a:xfrm>
+            <a:off x="2761488" y="4965192"/>
+            <a:ext cx="566928" cy="566928"/>
+          </a:xfrm>
+          <a:prstGeom prst="roundRect">
+            <a:avLst>
+              <a:gd name="adj" fmla="val 8065"/>
+            </a:avLst>
+          </a:prstGeom>
+          <a:solidFill>
+            <a:srgbClr val="0B1119"/>
+          </a:solidFill>
+          <a:ln w="12700">
+            <a:solidFill>
+              <a:srgbClr val="2C3A4E"/>
+            </a:solidFill>
+            <a:prstDash val="solid"/>
+          </a:ln>
+        </p:spPr>
+      </p:sp>
+      <p:sp>
+        <p:nvSpPr>
+          <p:cNvPr id="81" name="Text 79"/>
+          <p:cNvSpPr/>
+          <p:nvPr/>
+        </p:nvSpPr>
+        <p:spPr>
+          <a:xfrm>
+            <a:off x="2761488" y="4965192"/>
+            <a:ext cx="566928" cy="566928"/>
+          </a:xfrm>
+          <a:prstGeom prst="rect">
+            <a:avLst/>
+          </a:prstGeom>
+          <a:noFill/>
+          <a:ln/>
+        </p:spPr>
+        <p:txBody>
+          <a:bodyPr wrap="square" lIns="0" tIns="0" rIns="0" bIns="0" rtlCol="0" anchor="ctr"/>
+          <a:lstStyle/>
+          <a:p>
+            <a:pPr algn="ctr" indent="0" marL="0">
+              <a:buNone/>
+            </a:pPr>
+            <a:r>
+              <a:rPr lang="en-US" sz="1500" dirty="0">
+                <a:solidFill>
+                  <a:srgbClr val="6B7D94"/>
+                </a:solidFill>
+                <a:latin typeface="Courier New" pitchFamily="34" charset="0"/>
+                <a:ea typeface="Courier New" pitchFamily="34" charset="-122"/>
+                <a:cs typeface="Courier New" pitchFamily="34" charset="-120"/>
+              </a:rPr>
+              <a:t>0</a:t>
+            </a:r>
+            <a:endParaRPr lang="en-US" sz="1500" dirty="0"/>
+          </a:p>
+        </p:txBody>
+      </p:sp>
+      <p:sp>
+        <p:nvSpPr>
+          <p:cNvPr id="82" name="Shape 80"/>
+          <p:cNvSpPr/>
+          <p:nvPr/>
+        </p:nvSpPr>
+        <p:spPr>
+          <a:xfrm>
+            <a:off x="3419856" y="4965192"/>
+            <a:ext cx="566928" cy="566928"/>
+          </a:xfrm>
+          <a:prstGeom prst="roundRect">
+            <a:avLst>
+              <a:gd name="adj" fmla="val 8065"/>
+            </a:avLst>
+          </a:prstGeom>
+          <a:solidFill>
+            <a:srgbClr val="0B1119"/>
+          </a:solidFill>
+          <a:ln w="12700">
+            <a:solidFill>
+              <a:srgbClr val="2C3A4E"/>
+            </a:solidFill>
+            <a:prstDash val="solid"/>
+          </a:ln>
+        </p:spPr>
+      </p:sp>
+      <p:sp>
+        <p:nvSpPr>
+          <p:cNvPr id="83" name="Text 81"/>
+          <p:cNvSpPr/>
+          <p:nvPr/>
+        </p:nvSpPr>
+        <p:spPr>
+          <a:xfrm>
+            <a:off x="3419856" y="4965192"/>
+            <a:ext cx="566928" cy="566928"/>
+          </a:xfrm>
+          <a:prstGeom prst="rect">
+            <a:avLst/>
+          </a:prstGeom>
+          <a:noFill/>
+          <a:ln/>
+        </p:spPr>
+        <p:txBody>
+          <a:bodyPr wrap="square" lIns="0" tIns="0" rIns="0" bIns="0" rtlCol="0" anchor="ctr"/>
+          <a:lstStyle/>
+          <a:p>
+            <a:pPr algn="ctr" indent="0" marL="0">
+              <a:buNone/>
+            </a:pPr>
+            <a:r>
+              <a:rPr lang="en-US" sz="1500" dirty="0">
+                <a:solidFill>
+                  <a:srgbClr val="6B7D94"/>
+                </a:solidFill>
+                <a:latin typeface="Courier New" pitchFamily="34" charset="0"/>
+                <a:ea typeface="Courier New" pitchFamily="34" charset="-122"/>
+                <a:cs typeface="Courier New" pitchFamily="34" charset="-120"/>
+              </a:rPr>
+              <a:t>0</a:t>
+            </a:r>
+            <a:endParaRPr lang="en-US" sz="1500" dirty="0"/>
+          </a:p>
+        </p:txBody>
+      </p:sp>
+      <p:sp>
+        <p:nvSpPr>
+          <p:cNvPr id="84" name="Shape 82"/>
+          <p:cNvSpPr/>
+          <p:nvPr/>
+        </p:nvSpPr>
+        <p:spPr>
+          <a:xfrm>
+            <a:off x="4078224" y="4965192"/>
+            <a:ext cx="566928" cy="566928"/>
+          </a:xfrm>
+          <a:prstGeom prst="roundRect">
+            <a:avLst>
+              <a:gd name="adj" fmla="val 8065"/>
+            </a:avLst>
+          </a:prstGeom>
+          <a:solidFill>
+            <a:srgbClr val="E8A33D"/>
+          </a:solidFill>
+          <a:ln w="12700">
+            <a:solidFill>
+              <a:srgbClr val="E8A33D"/>
+            </a:solidFill>
+            <a:prstDash val="solid"/>
+          </a:ln>
+        </p:spPr>
+      </p:sp>
+      <p:sp>
+        <p:nvSpPr>
+          <p:cNvPr id="85" name="Text 83"/>
+          <p:cNvSpPr/>
+          <p:nvPr/>
+        </p:nvSpPr>
+        <p:spPr>
+          <a:xfrm>
+            <a:off x="4078224" y="4965192"/>
+            <a:ext cx="566928" cy="566928"/>
+          </a:xfrm>
+          <a:prstGeom prst="rect">
+            <a:avLst/>
+          </a:prstGeom>
+          <a:noFill/>
+          <a:ln/>
+        </p:spPr>
+        <p:txBody>
+          <a:bodyPr wrap="square" lIns="0" tIns="0" rIns="0" bIns="0" rtlCol="0" anchor="ctr"/>
+          <a:lstStyle/>
+          <a:p>
+            <a:pPr algn="ctr" indent="0" marL="0">
+              <a:buNone/>
+            </a:pPr>
+            <a:r>
+              <a:rPr lang="en-US" sz="1500" b="1" dirty="0">
+                <a:solidFill>
+                  <a:srgbClr val="101722"/>
+                </a:solidFill>
+                <a:latin typeface="Courier New" pitchFamily="34" charset="0"/>
+                <a:ea typeface="Courier New" pitchFamily="34" charset="-122"/>
+                <a:cs typeface="Courier New" pitchFamily="34" charset="-120"/>
+              </a:rPr>
+              <a:t>1</a:t>
+            </a:r>
+            <a:endParaRPr lang="en-US" sz="1500" dirty="0"/>
+          </a:p>
+        </p:txBody>
+      </p:sp>
+      <p:sp>
+        <p:nvSpPr>
+          <p:cNvPr id="86" name="Shape 84"/>
+          <p:cNvSpPr/>
+          <p:nvPr/>
+        </p:nvSpPr>
+        <p:spPr>
+          <a:xfrm>
+            <a:off x="4736592" y="4965192"/>
+            <a:ext cx="566928" cy="566928"/>
+          </a:xfrm>
+          <a:prstGeom prst="roundRect">
+            <a:avLst>
+              <a:gd name="adj" fmla="val 8065"/>
+            </a:avLst>
+          </a:prstGeom>
+          <a:solidFill>
+            <a:srgbClr val="0B1119"/>
+          </a:solidFill>
+          <a:ln w="12700">
+            <a:solidFill>
+              <a:srgbClr val="2C3A4E"/>
+            </a:solidFill>
+            <a:prstDash val="solid"/>
+          </a:ln>
+        </p:spPr>
+      </p:sp>
+      <p:sp>
+        <p:nvSpPr>
+          <p:cNvPr id="87" name="Text 85"/>
+          <p:cNvSpPr/>
+          <p:nvPr/>
+        </p:nvSpPr>
+        <p:spPr>
+          <a:xfrm>
+            <a:off x="4736592" y="4965192"/>
+            <a:ext cx="566928" cy="566928"/>
+          </a:xfrm>
+          <a:prstGeom prst="rect">
+            <a:avLst/>
+          </a:prstGeom>
+          <a:noFill/>
+          <a:ln/>
+        </p:spPr>
+        <p:txBody>
+          <a:bodyPr wrap="square" lIns="0" tIns="0" rIns="0" bIns="0" rtlCol="0" anchor="ctr"/>
+          <a:lstStyle/>
+          <a:p>
+            <a:pPr algn="ctr" indent="0" marL="0">
+              <a:buNone/>
+            </a:pPr>
+            <a:r>
+              <a:rPr lang="en-US" sz="1500" dirty="0">
+                <a:solidFill>
+                  <a:srgbClr val="6B7D94"/>
+                </a:solidFill>
+                <a:latin typeface="Courier New" pitchFamily="34" charset="0"/>
+                <a:ea typeface="Courier New" pitchFamily="34" charset="-122"/>
+                <a:cs typeface="Courier New" pitchFamily="34" charset="-120"/>
+              </a:rPr>
+              <a:t>0</a:t>
+            </a:r>
+            <a:endParaRPr lang="en-US" sz="1500" dirty="0"/>
+          </a:p>
+        </p:txBody>
+      </p:sp>
+      <p:sp>
+        <p:nvSpPr>
+          <p:cNvPr id="88" name="Shape 86"/>
+          <p:cNvSpPr/>
+          <p:nvPr/>
+        </p:nvSpPr>
+        <p:spPr>
+          <a:xfrm>
+            <a:off x="5394960" y="4965192"/>
+            <a:ext cx="566928" cy="566928"/>
+          </a:xfrm>
+          <a:prstGeom prst="roundRect">
+            <a:avLst>
+              <a:gd name="adj" fmla="val 8065"/>
+            </a:avLst>
+          </a:prstGeom>
+          <a:solidFill>
+            <a:srgbClr val="0B1119"/>
+          </a:solidFill>
+          <a:ln w="12700">
+            <a:solidFill>
+              <a:srgbClr val="2C3A4E"/>
+            </a:solidFill>
+            <a:prstDash val="solid"/>
+          </a:ln>
+        </p:spPr>
+      </p:sp>
+      <p:sp>
+        <p:nvSpPr>
+          <p:cNvPr id="89" name="Text 87"/>
+          <p:cNvSpPr/>
+          <p:nvPr/>
+        </p:nvSpPr>
+        <p:spPr>
+          <a:xfrm>
+            <a:off x="5394960" y="4965192"/>
+            <a:ext cx="566928" cy="566928"/>
+          </a:xfrm>
+          <a:prstGeom prst="rect">
+            <a:avLst/>
+          </a:prstGeom>
+          <a:noFill/>
+          <a:ln/>
+        </p:spPr>
+        <p:txBody>
+          <a:bodyPr wrap="square" lIns="0" tIns="0" rIns="0" bIns="0" rtlCol="0" anchor="ctr"/>
+          <a:lstStyle/>
+          <a:p>
+            <a:pPr algn="ctr" indent="0" marL="0">
+              <a:buNone/>
+            </a:pPr>
+            <a:r>
+              <a:rPr lang="en-US" sz="1500" dirty="0">
+                <a:solidFill>
+                  <a:srgbClr val="6B7D94"/>
+                </a:solidFill>
+                <a:latin typeface="Courier New" pitchFamily="34" charset="0"/>
+                <a:ea typeface="Courier New" pitchFamily="34" charset="-122"/>
+                <a:cs typeface="Courier New" pitchFamily="34" charset="-120"/>
+              </a:rPr>
+              <a:t>0</a:t>
+            </a:r>
+            <a:endParaRPr lang="en-US" sz="1500" dirty="0"/>
+          </a:p>
+        </p:txBody>
+      </p:sp>
+      <p:sp>
+        <p:nvSpPr>
+          <p:cNvPr id="90" name="Shape 88"/>
+          <p:cNvSpPr/>
+          <p:nvPr/>
+        </p:nvSpPr>
+        <p:spPr>
+          <a:xfrm>
+            <a:off x="6053328" y="4965192"/>
+            <a:ext cx="566928" cy="566928"/>
+          </a:xfrm>
+          <a:prstGeom prst="roundRect">
+            <a:avLst>
+              <a:gd name="adj" fmla="val 8065"/>
+            </a:avLst>
+          </a:prstGeom>
+          <a:solidFill>
+            <a:srgbClr val="0B1119"/>
+          </a:solidFill>
+          <a:ln w="12700">
+            <a:solidFill>
+              <a:srgbClr val="2C3A4E"/>
+            </a:solidFill>
+            <a:prstDash val="solid"/>
+          </a:ln>
+        </p:spPr>
+      </p:sp>
+      <p:sp>
+        <p:nvSpPr>
+          <p:cNvPr id="91" name="Text 89"/>
+          <p:cNvSpPr/>
+          <p:nvPr/>
+        </p:nvSpPr>
+        <p:spPr>
+          <a:xfrm>
+            <a:off x="6053328" y="4965192"/>
+            <a:ext cx="566928" cy="566928"/>
+          </a:xfrm>
+          <a:prstGeom prst="rect">
+            <a:avLst/>
+          </a:prstGeom>
+          <a:noFill/>
+          <a:ln/>
+        </p:spPr>
+        <p:txBody>
+          <a:bodyPr wrap="square" lIns="0" tIns="0" rIns="0" bIns="0" rtlCol="0" anchor="ctr"/>
+          <a:lstStyle/>
+          <a:p>
+            <a:pPr algn="ctr" indent="0" marL="0">
+              <a:buNone/>
+            </a:pPr>
+            <a:r>
+              <a:rPr lang="en-US" sz="1500" dirty="0">
+                <a:solidFill>
+                  <a:srgbClr val="6B7D94"/>
+                </a:solidFill>
+                <a:latin typeface="Courier New" pitchFamily="34" charset="0"/>
+                <a:ea typeface="Courier New" pitchFamily="34" charset="-122"/>
+                <a:cs typeface="Courier New" pitchFamily="34" charset="-120"/>
+              </a:rPr>
+              <a:t>0</a:t>
+            </a:r>
+            <a:endParaRPr lang="en-US" sz="1500" dirty="0"/>
+          </a:p>
+        </p:txBody>
+      </p:sp>
+      <p:sp>
+        <p:nvSpPr>
+          <p:cNvPr id="92" name="Shape 90"/>
+          <p:cNvSpPr/>
+          <p:nvPr/>
+        </p:nvSpPr>
+        <p:spPr>
+          <a:xfrm>
+            <a:off x="6711696" y="4965192"/>
+            <a:ext cx="566928" cy="566928"/>
+          </a:xfrm>
+          <a:prstGeom prst="roundRect">
+            <a:avLst>
+              <a:gd name="adj" fmla="val 8065"/>
+            </a:avLst>
+          </a:prstGeom>
+          <a:solidFill>
+            <a:srgbClr val="0B1119"/>
+          </a:solidFill>
+          <a:ln w="12700">
+            <a:solidFill>
+              <a:srgbClr val="2C3A4E"/>
+            </a:solidFill>
+            <a:prstDash val="solid"/>
+          </a:ln>
+        </p:spPr>
+      </p:sp>
+      <p:sp>
+        <p:nvSpPr>
+          <p:cNvPr id="93" name="Text 91"/>
+          <p:cNvSpPr/>
+          <p:nvPr/>
+        </p:nvSpPr>
+        <p:spPr>
+          <a:xfrm>
+            <a:off x="6711696" y="4965192"/>
+            <a:ext cx="566928" cy="566928"/>
+          </a:xfrm>
+          <a:prstGeom prst="rect">
+            <a:avLst/>
+          </a:prstGeom>
+          <a:noFill/>
+          <a:ln/>
+        </p:spPr>
+        <p:txBody>
+          <a:bodyPr wrap="square" lIns="0" tIns="0" rIns="0" bIns="0" rtlCol="0" anchor="ctr"/>
+          <a:lstStyle/>
+          <a:p>
+            <a:pPr algn="ctr" indent="0" marL="0">
+              <a:buNone/>
+            </a:pPr>
+            <a:r>
+              <a:rPr lang="en-US" sz="1500" dirty="0">
+                <a:solidFill>
+                  <a:srgbClr val="6B7D94"/>
+                </a:solidFill>
+                <a:latin typeface="Courier New" pitchFamily="34" charset="0"/>
+                <a:ea typeface="Courier New" pitchFamily="34" charset="-122"/>
+                <a:cs typeface="Courier New" pitchFamily="34" charset="-120"/>
+              </a:rPr>
+              <a:t>0</a:t>
+            </a:r>
+            <a:endParaRPr lang="en-US" sz="1500" dirty="0"/>
+          </a:p>
+        </p:txBody>
+      </p:sp>
+      <p:sp>
+        <p:nvSpPr>
+          <p:cNvPr id="94" name="Text 92"/>
+          <p:cNvSpPr/>
+          <p:nvPr/>
+        </p:nvSpPr>
+        <p:spPr>
+          <a:xfrm>
+            <a:off x="7552944" y="4983480"/>
+            <a:ext cx="2103120" cy="566928"/>
+          </a:xfrm>
+          <a:prstGeom prst="rect">
+            <a:avLst/>
+          </a:prstGeom>
+          <a:noFill/>
+          <a:ln/>
+        </p:spPr>
+        <p:txBody>
+          <a:bodyPr wrap="square" lIns="0" tIns="0" rIns="0" bIns="0" rtlCol="0" anchor="ctr"/>
+          <a:lstStyle/>
+          <a:p>
+            <a:pPr indent="0" marL="0">
+              <a:buNone/>
+            </a:pPr>
+            <a:r>
+              <a:rPr lang="en-US" sz="1300" dirty="0">
+                <a:solidFill>
+                  <a:srgbClr val="3FB8C4"/>
+                </a:solidFill>
+                <a:latin typeface="Courier New" pitchFamily="34" charset="0"/>
+                <a:ea typeface="Courier New" pitchFamily="34" charset="-122"/>
+                <a:cs typeface="Courier New" pitchFamily="34" charset="-120"/>
+              </a:rPr>
+              <a:t>0x10101010</a:t>
+            </a:r>
+            <a:endParaRPr lang="en-US" sz="1300" dirty="0"/>
+          </a:p>
+        </p:txBody>
+      </p:sp>
+      <p:sp>
+        <p:nvSpPr>
+          <p:cNvPr id="95" name="Text 93"/>
+          <p:cNvSpPr/>
+          <p:nvPr/>
+        </p:nvSpPr>
+        <p:spPr>
+          <a:xfrm>
+            <a:off x="7552944" y="5760720"/>
+            <a:ext cx="4114800" cy="320040"/>
+          </a:xfrm>
+          <a:prstGeom prst="rect">
+            <a:avLst/>
+          </a:prstGeom>
+          <a:noFill/>
+          <a:ln/>
+        </p:spPr>
+        <p:txBody>
+          <a:bodyPr wrap="square" lIns="0" tIns="0" rIns="0" bIns="0" rtlCol="0" anchor="ctr"/>
+          <a:lstStyle/>
+          <a:p>
+            <a:pPr indent="0" marL="0">
+              <a:buNone/>
+            </a:pPr>
+            <a:r>
+              <a:rPr lang="en-US" sz="1150" i="1" dirty="0">
+                <a:solidFill>
+                  <a:srgbClr val="9FB0C4"/>
                 </a:solidFill>
                 <a:latin typeface="Malgun Gothic" pitchFamily="34" charset="0"/>
                 <a:ea typeface="Malgun Gothic" pitchFamily="34" charset="-122"/>
                 <a:cs typeface="Malgun Gothic" pitchFamily="34" charset="-120"/>
               </a:rPr>
-              <a:t>Random Blocks (#7)</a:t>
-            </a:r>
-            <a:endParaRPr lang="en-US" sz="1900" dirty="0"/>
-          </a:p>
-        </p:txBody>
-      </p:sp>
-      <p:sp>
-        <p:nvSpPr>
-          <p:cNvPr id="6" name="Text 4"/>
-          <p:cNvSpPr/>
-          <p:nvPr/>
-        </p:nvSpPr>
-        <p:spPr>
-          <a:xfrm>
-            <a:off x="822960" y="2377440"/>
-            <a:ext cx="4800600" cy="2011680"/>
-          </a:xfrm>
-          <a:prstGeom prst="rect">
-            <a:avLst/>
-          </a:prstGeom>
-          <a:noFill/>
-          <a:ln/>
-        </p:spPr>
-        <p:txBody>
-          <a:bodyPr wrap="square" lIns="0" tIns="0" rIns="0" bIns="0" rtlCol="0" anchor="t"/>
-          <a:lstStyle/>
-          <a:p>
-            <a:pPr marL="342900" indent="-342900">
-              <a:lnSpc>
-                <a:spcPct val="105000"/>
-              </a:lnSpc>
-              <a:spcAft>
-                <a:spcPts val="1000"/>
-              </a:spcAft>
-              <a:buSzPct val="100000"/>
-              <a:buChar char="•"/>
-            </a:pPr>
-            <a:r>
-              <a:rPr lang="en-US" sz="1450" dirty="0">
-                <a:solidFill>
-                  <a:srgbClr val="E7EDF5"/>
+              <a:t>← 8비트 패턴을 32비트 워드로 복제한 값</a:t>
+            </a:r>
+            <a:endParaRPr lang="en-US" sz="1150" dirty="0"/>
+          </a:p>
+        </p:txBody>
+      </p:sp>
+      <p:sp>
+        <p:nvSpPr>
+          <p:cNvPr id="96" name="Text 94"/>
+          <p:cNvSpPr/>
+          <p:nvPr/>
+        </p:nvSpPr>
+        <p:spPr>
+          <a:xfrm>
+            <a:off x="548640" y="5852160"/>
+            <a:ext cx="11064240" cy="365760"/>
+          </a:xfrm>
+          <a:prstGeom prst="rect">
+            <a:avLst/>
+          </a:prstGeom>
+          <a:noFill/>
+          <a:ln/>
+        </p:spPr>
+        <p:txBody>
+          <a:bodyPr wrap="square" lIns="0" tIns="0" rIns="0" bIns="0" rtlCol="0" anchor="ctr"/>
+          <a:lstStyle/>
+          <a:p>
+            <a:pPr algn="ctr" indent="0" marL="0">
+              <a:buNone/>
+            </a:pPr>
+            <a:r>
+              <a:rPr lang="en-US" sz="1300" i="1" dirty="0">
+                <a:solidFill>
+                  <a:srgbClr val="9FB0C4"/>
                 </a:solidFill>
                 <a:latin typeface="Malgun Gothic" pitchFamily="34" charset="0"/>
                 <a:ea typeface="Malgun Gothic" pitchFamily="34" charset="-122"/>
                 <a:cs typeface="Malgun Gothic" pitchFamily="34" charset="-120"/>
               </a:rPr>
-              <a:t>rand() 시드로 재현 가능한 난수를 채움</a:t>
-            </a:r>
-            <a:endParaRPr lang="en-US" sz="1450" dirty="0"/>
-          </a:p>
-          <a:p>
-            <a:pPr marL="342900" indent="-342900">
-              <a:lnSpc>
-                <a:spcPct val="105000"/>
-              </a:lnSpc>
-              <a:spcAft>
-                <a:spcPts val="1000"/>
-              </a:spcAft>
-              <a:buSzPct val="100000"/>
-              <a:buChar char="•"/>
-            </a:pPr>
-            <a:r>
-              <a:rPr lang="en-US" sz="1450" dirty="0">
-                <a:solidFill>
-                  <a:srgbClr val="E7EDF5"/>
-                </a:solidFill>
-                <a:latin typeface="Malgun Gothic" pitchFamily="34" charset="0"/>
-                <a:ea typeface="Malgun Gothic" pitchFamily="34" charset="-122"/>
-                <a:cs typeface="Malgun Gothic" pitchFamily="34" charset="-120"/>
-              </a:rPr>
-              <a:t>검증 시 같은 시드로 수열을 재생성해 비교</a:t>
-            </a:r>
-            <a:endParaRPr lang="en-US" sz="1450" dirty="0"/>
-          </a:p>
-          <a:p>
-            <a:pPr marL="342900" indent="-342900">
-              <a:lnSpc>
-                <a:spcPct val="105000"/>
-              </a:lnSpc>
-              <a:spcAft>
-                <a:spcPts val="1000"/>
-              </a:spcAft>
-              <a:buSzPct val="100000"/>
-              <a:buChar char="•"/>
-            </a:pPr>
-            <a:r>
-              <a:rPr lang="en-US" sz="1450" dirty="0">
-                <a:solidFill>
-                  <a:srgbClr val="E7EDF5"/>
-                </a:solidFill>
-                <a:latin typeface="Malgun Gothic" pitchFamily="34" charset="0"/>
-                <a:ea typeface="Malgun Gothic" pitchFamily="34" charset="-122"/>
-                <a:cs typeface="Malgun Gothic" pitchFamily="34" charset="-120"/>
-              </a:rPr>
-              <a:t>공유 메모리로 난수 블록을 병렬 생성 (core.cu:723)</a:t>
-            </a:r>
-            <a:endParaRPr lang="en-US" sz="1450" dirty="0"/>
-          </a:p>
-        </p:txBody>
-      </p:sp>
-      <p:sp>
-        <p:nvSpPr>
-          <p:cNvPr id="7" name="Text 5"/>
-          <p:cNvSpPr/>
-          <p:nvPr/>
-        </p:nvSpPr>
-        <p:spPr>
-          <a:xfrm>
-            <a:off x="822960" y="4937760"/>
-            <a:ext cx="4800600" cy="640080"/>
-          </a:xfrm>
-          <a:prstGeom prst="rect">
-            <a:avLst/>
-          </a:prstGeom>
-          <a:noFill/>
-          <a:ln/>
-        </p:spPr>
-        <p:txBody>
-          <a:bodyPr wrap="square" lIns="0" tIns="0" rIns="0" bIns="0" rtlCol="0" anchor="t"/>
-          <a:lstStyle/>
-          <a:p>
-            <a:pPr indent="0" marL="0">
-              <a:buNone/>
-            </a:pPr>
-            <a:r>
-              <a:rPr lang="en-US" sz="1350" i="1" dirty="0">
-                <a:solidFill>
-                  <a:srgbClr val="9FB0C4"/>
-                </a:solidFill>
-                <a:latin typeface="Malgun Gothic" pitchFamily="34" charset="0"/>
-                <a:ea typeface="Malgun Gothic" pitchFamily="34" charset="-122"/>
-                <a:cs typeface="Malgun Gothic" pitchFamily="34" charset="-120"/>
-              </a:rPr>
-              <a:t>구조화된 패턴이 놓치는 값 의존적 결함을 잡습니다.</a:t>
-            </a:r>
-            <a:endParaRPr lang="en-US" sz="1350" dirty="0"/>
-          </a:p>
-        </p:txBody>
-      </p:sp>
-      <p:sp>
-        <p:nvSpPr>
-          <p:cNvPr id="8" name="Shape 6"/>
-          <p:cNvSpPr/>
-          <p:nvPr/>
-        </p:nvSpPr>
-        <p:spPr>
-          <a:xfrm>
-            <a:off x="6263640" y="1645920"/>
-            <a:ext cx="5349240" cy="4023360"/>
-          </a:xfrm>
-          <a:prstGeom prst="roundRect">
-            <a:avLst>
-              <a:gd name="adj" fmla="val 1818"/>
-            </a:avLst>
-          </a:prstGeom>
-          <a:solidFill>
-            <a:srgbClr val="18212E"/>
-          </a:solidFill>
-          <a:ln w="19050">
-            <a:solidFill>
-              <a:srgbClr val="3FB8C4"/>
-            </a:solidFill>
-            <a:prstDash val="solid"/>
-          </a:ln>
-        </p:spPr>
-      </p:sp>
-      <p:sp>
-        <p:nvSpPr>
-          <p:cNvPr id="9" name="Text 7"/>
-          <p:cNvSpPr/>
-          <p:nvPr/>
-        </p:nvSpPr>
-        <p:spPr>
-          <a:xfrm>
-            <a:off x="6537960" y="1828800"/>
-            <a:ext cx="4800600" cy="457200"/>
-          </a:xfrm>
-          <a:prstGeom prst="rect">
-            <a:avLst/>
-          </a:prstGeom>
-          <a:noFill/>
-          <a:ln/>
-        </p:spPr>
-        <p:txBody>
-          <a:bodyPr wrap="square" lIns="0" tIns="0" rIns="0" bIns="0" rtlCol="0" anchor="ctr"/>
-          <a:lstStyle/>
-          <a:p>
-            <a:pPr indent="0" marL="0">
-              <a:buNone/>
-            </a:pPr>
-            <a:r>
-              <a:rPr lang="en-US" sz="1900" b="1" dirty="0">
-                <a:solidFill>
-                  <a:srgbClr val="3FB8C4"/>
-                </a:solidFill>
-                <a:latin typeface="Malgun Gothic" pitchFamily="34" charset="0"/>
-                <a:ea typeface="Malgun Gothic" pitchFamily="34" charset="-122"/>
-                <a:cs typeface="Malgun Gothic" pitchFamily="34" charset="-120"/>
-              </a:rPr>
-              <a:t>Modulo-20 (#8)</a:t>
-            </a:r>
-            <a:endParaRPr lang="en-US" sz="1900" dirty="0"/>
-          </a:p>
-        </p:txBody>
-      </p:sp>
-      <p:sp>
-        <p:nvSpPr>
-          <p:cNvPr id="10" name="Text 8"/>
-          <p:cNvSpPr/>
-          <p:nvPr/>
-        </p:nvSpPr>
-        <p:spPr>
-          <a:xfrm>
-            <a:off x="6537960" y="2377440"/>
-            <a:ext cx="4800600" cy="2011680"/>
-          </a:xfrm>
-          <a:prstGeom prst="rect">
-            <a:avLst/>
-          </a:prstGeom>
-          <a:noFill/>
-          <a:ln/>
-        </p:spPr>
-        <p:txBody>
-          <a:bodyPr wrap="square" lIns="0" tIns="0" rIns="0" bIns="0" rtlCol="0" anchor="t"/>
-          <a:lstStyle/>
-          <a:p>
-            <a:pPr marL="342900" indent="-342900">
-              <a:lnSpc>
-                <a:spcPct val="105000"/>
-              </a:lnSpc>
-              <a:spcAft>
-                <a:spcPts val="1000"/>
-              </a:spcAft>
-              <a:buSzPct val="100000"/>
-              <a:buChar char="•"/>
-            </a:pPr>
-            <a:r>
-              <a:rPr lang="en-US" sz="1450" dirty="0">
-                <a:solidFill>
-                  <a:srgbClr val="E7EDF5"/>
-                </a:solidFill>
-                <a:latin typeface="Malgun Gothic" pitchFamily="34" charset="0"/>
-                <a:ea typeface="Malgun Gothic" pitchFamily="34" charset="-122"/>
-                <a:cs typeface="Malgun Gothic" pitchFamily="34" charset="-120"/>
-              </a:rPr>
-              <a:t>20개 word마다 패턴을 배치, 나머지는 보수로 채움</a:t>
-            </a:r>
-            <a:endParaRPr lang="en-US" sz="1450" dirty="0"/>
-          </a:p>
-          <a:p>
-            <a:pPr marL="342900" indent="-342900">
-              <a:lnSpc>
-                <a:spcPct val="105000"/>
-              </a:lnSpc>
-              <a:spcAft>
-                <a:spcPts val="1000"/>
-              </a:spcAft>
-              <a:buSzPct val="100000"/>
-              <a:buChar char="•"/>
-            </a:pPr>
-            <a:r>
-              <a:rPr lang="en-US" sz="1450" dirty="0">
-                <a:solidFill>
-                  <a:srgbClr val="E7EDF5"/>
-                </a:solidFill>
-                <a:latin typeface="Malgun Gothic" pitchFamily="34" charset="0"/>
-                <a:ea typeface="Malgun Gothic" pitchFamily="34" charset="-122"/>
-                <a:cs typeface="Malgun Gothic" pitchFamily="34" charset="-120"/>
-              </a:rPr>
-              <a:t>shift를 0~19로 돌려 모든 위상을 커버</a:t>
-            </a:r>
-            <a:endParaRPr lang="en-US" sz="1450" dirty="0"/>
-          </a:p>
-          <a:p>
-            <a:pPr marL="342900" indent="-342900">
-              <a:lnSpc>
-                <a:spcPct val="105000"/>
-              </a:lnSpc>
-              <a:spcAft>
-                <a:spcPts val="1000"/>
-              </a:spcAft>
-              <a:buSzPct val="100000"/>
-              <a:buChar char="•"/>
-            </a:pPr>
-            <a:r>
-              <a:rPr lang="en-US" sz="1450" dirty="0">
-                <a:solidFill>
-                  <a:srgbClr val="E7EDF5"/>
-                </a:solidFill>
-                <a:latin typeface="Malgun Gothic" pitchFamily="34" charset="0"/>
-                <a:ea typeface="Malgun Gothic" pitchFamily="34" charset="-122"/>
-                <a:cs typeface="Malgun Gothic" pitchFamily="34" charset="-120"/>
-              </a:rPr>
-              <a:t>주기적 주소 간섭 결함을 표적</a:t>
-            </a:r>
-            <a:endParaRPr lang="en-US" sz="1450" dirty="0"/>
-          </a:p>
-        </p:txBody>
-      </p:sp>
-      <p:sp>
-        <p:nvSpPr>
-          <p:cNvPr id="11" name="Text 9"/>
-          <p:cNvSpPr/>
-          <p:nvPr/>
-        </p:nvSpPr>
-        <p:spPr>
-          <a:xfrm>
-            <a:off x="6537960" y="4937760"/>
-            <a:ext cx="4800600" cy="640080"/>
-          </a:xfrm>
-          <a:prstGeom prst="rect">
-            <a:avLst/>
-          </a:prstGeom>
-          <a:noFill/>
-          <a:ln/>
-        </p:spPr>
-        <p:txBody>
-          <a:bodyPr wrap="square" lIns="0" tIns="0" rIns="0" bIns="0" rtlCol="0" anchor="t"/>
-          <a:lstStyle/>
-          <a:p>
-            <a:pPr indent="0" marL="0">
-              <a:buNone/>
-            </a:pPr>
-            <a:r>
-              <a:rPr lang="en-US" sz="1350" i="1" dirty="0">
-                <a:solidFill>
-                  <a:srgbClr val="9FB0C4"/>
-                </a:solidFill>
-                <a:latin typeface="Malgun Gothic" pitchFamily="34" charset="0"/>
-                <a:ea typeface="Malgun Gothic" pitchFamily="34" charset="-122"/>
-                <a:cs typeface="Malgun Gothic" pitchFamily="34" charset="-120"/>
-              </a:rPr>
-              <a:t>특정 간격의 셀들이 서로 영향을 주는 결함을 찾습니다.</a:t>
-            </a:r>
-            <a:endParaRPr lang="en-US" sz="1350" dirty="0"/>
+              <a:t>이 표를 손으로 채워보는 것이 Lab 4 Exercise 2입니다. shift 0~7까지 8칸을 모두 훑습니다.</a:t>
+            </a:r>
+            <a:endParaRPr lang="en-US" sz="1300" dirty="0"/>
           </a:p>
         </p:txBody>
       </p:sp>
@@ -5118,7 +9057,7 @@
                 <a:ea typeface="Courier New" pitchFamily="34" charset="-122"/>
                 <a:cs typeface="Courier New" pitchFamily="34" charset="-120"/>
               </a:rPr>
-              <a:t>5</a:t>
+              <a:t>4</a:t>
             </a:r>
             <a:endParaRPr lang="en-US" sz="2200" dirty="0"/>
           </a:p>
@@ -5157,7 +9096,7 @@
                 <a:ea typeface="Malgun Gothic" pitchFamily="34" charset="-122"/>
                 <a:cs typeface="Malgun Gothic" pitchFamily="34" charset="-120"/>
               </a:rPr>
-              <a:t>Logic 테스트 · 메모리가 아니라 연산을 본다</a:t>
+              <a:t>Random Blocks &amp; Modulo-20</a:t>
             </a:r>
             <a:endParaRPr lang="en-US" sz="2900" dirty="0"/>
           </a:p>
@@ -5171,20 +9110,20 @@
         </p:nvSpPr>
         <p:spPr>
           <a:xfrm>
-            <a:off x="548640" y="1463040"/>
-            <a:ext cx="11064240" cy="2194560"/>
+            <a:off x="548640" y="1645920"/>
+            <a:ext cx="5349240" cy="4023360"/>
           </a:xfrm>
           <a:prstGeom prst="roundRect">
             <a:avLst>
-              <a:gd name="adj" fmla="val 2083"/>
+              <a:gd name="adj" fmla="val 1818"/>
             </a:avLst>
           </a:prstGeom>
           <a:solidFill>
-            <a:srgbClr val="0B1119"/>
+            <a:srgbClr val="18212E"/>
           </a:solidFill>
-          <a:ln w="12700">
+          <a:ln w="19050">
             <a:solidFill>
-              <a:srgbClr val="2C3A4E"/>
+              <a:srgbClr val="E8A33D"/>
             </a:solidFill>
             <a:prstDash val="solid"/>
           </a:ln>
@@ -5198,197 +9137,34 @@
         </p:nvSpPr>
         <p:spPr>
           <a:xfrm>
-            <a:off x="768096" y="1609344"/>
-            <a:ext cx="10625328" cy="1901952"/>
-          </a:xfrm>
-          <a:prstGeom prst="rect">
-            <a:avLst/>
-          </a:prstGeom>
-          <a:noFill/>
-          <a:ln/>
-        </p:spPr>
-        <p:txBody>
-          <a:bodyPr wrap="square" lIns="0" tIns="0" rIns="0" bIns="0" rtlCol="0" anchor="t"/>
-          <a:lstStyle/>
-          <a:p>
-            <a:pPr algn="l" indent="0" marL="0">
-              <a:lnSpc>
-                <a:spcPct val="110000"/>
-              </a:lnSpc>
-              <a:buNone/>
-            </a:pPr>
-            <a:r>
-              <a:rPr lang="en-US" sz="1250" dirty="0">
-                <a:solidFill>
-                  <a:srgbClr val="6B7D94"/>
-                </a:solidFill>
-                <a:latin typeface="Courier New" pitchFamily="34" charset="0"/>
-                <a:ea typeface="Courier New" pitchFamily="34" charset="-122"/>
-                <a:cs typeface="Courier New" pitchFamily="34" charset="-120"/>
-              </a:rPr>
-              <a:t>// core.cu:298 — LCGLOOP 매크로</a:t>
-            </a:r>
-            <a:endParaRPr lang="en-US" sz="1250" dirty="0"/>
-          </a:p>
-          <a:p>
-            <a:pPr algn="l" indent="0" marL="0">
-              <a:lnSpc>
-                <a:spcPct val="110000"/>
-              </a:lnSpc>
-              <a:buNone/>
-            </a:pPr>
-            <a:r>
-              <a:rPr lang="en-US" sz="1250" dirty="0">
-                <a:solidFill>
-                  <a:srgbClr val="E7EDF5"/>
-                </a:solidFill>
-                <a:latin typeface="Courier New" pitchFamily="34" charset="0"/>
-                <a:ea typeface="Courier New" pitchFamily="34" charset="-122"/>
-                <a:cs typeface="Courier New" pitchFamily="34" charset="-120"/>
-              </a:rPr>
-              <a:t>for (rep = 0; rep &lt; repeats; rep++) {</a:t>
-            </a:r>
-            <a:endParaRPr lang="en-US" sz="1250" dirty="0"/>
-          </a:p>
-          <a:p>
-            <a:pPr algn="l" indent="0" marL="0">
-              <a:lnSpc>
-                <a:spcPct val="110000"/>
-              </a:lnSpc>
-              <a:buNone/>
-            </a:pPr>
-            <a:r>
-              <a:rPr lang="en-US" sz="1250" dirty="0">
-                <a:solidFill>
-                  <a:srgbClr val="E7EDF5"/>
-                </a:solidFill>
-                <a:latin typeface="Courier New" pitchFamily="34" charset="0"/>
-                <a:ea typeface="Courier New" pitchFamily="34" charset="-122"/>
-                <a:cs typeface="Courier New" pitchFamily="34" charset="-120"/>
-              </a:rPr>
-              <a:t>    value = ~value;</a:t>
-            </a:r>
-            <a:endParaRPr lang="en-US" sz="1250" dirty="0"/>
-          </a:p>
-          <a:p>
-            <a:pPr algn="l" indent="0" marL="0">
-              <a:lnSpc>
-                <a:spcPct val="110000"/>
-              </a:lnSpc>
-              <a:buNone/>
-            </a:pPr>
-            <a:r>
-              <a:rPr lang="en-US" sz="1250" dirty="0">
-                <a:solidFill>
-                  <a:srgbClr val="3FB8C4"/>
-                </a:solidFill>
-                <a:latin typeface="Courier New" pitchFamily="34" charset="0"/>
-                <a:ea typeface="Courier New" pitchFamily="34" charset="-122"/>
-                <a:cs typeface="Courier New" pitchFamily="34" charset="-120"/>
-              </a:rPr>
-              <a:t>    for (iter = 0; iter &lt; period; iter++) {   // 짧은 주기 LCG</a:t>
-            </a:r>
-            <a:endParaRPr lang="en-US" sz="1250" dirty="0"/>
-          </a:p>
-          <a:p>
-            <a:pPr algn="l" indent="0" marL="0">
-              <a:lnSpc>
-                <a:spcPct val="110000"/>
-              </a:lnSpc>
-              <a:buNone/>
-            </a:pPr>
-            <a:r>
-              <a:rPr lang="en-US" sz="1250" dirty="0">
-                <a:solidFill>
-                  <a:srgbClr val="F2C079"/>
-                </a:solidFill>
-                <a:latin typeface="Courier New" pitchFamily="34" charset="0"/>
-                <a:ea typeface="Courier New" pitchFamily="34" charset="-122"/>
-                <a:cs typeface="Courier New" pitchFamily="34" charset="-120"/>
-              </a:rPr>
-              <a:t>        value = ~value;  value = a*value + c; // 선형합동생성기 스텝</a:t>
-            </a:r>
-            <a:endParaRPr lang="en-US" sz="1250" dirty="0"/>
-          </a:p>
-          <a:p>
-            <a:pPr algn="l" indent="0" marL="0">
-              <a:lnSpc>
-                <a:spcPct val="110000"/>
-              </a:lnSpc>
-              <a:buNone/>
-            </a:pPr>
-            <a:r>
-              <a:rPr lang="en-US" sz="1250" dirty="0">
-                <a:solidFill>
-                  <a:srgbClr val="E7EDF5"/>
-                </a:solidFill>
-                <a:latin typeface="Courier New" pitchFamily="34" charset="0"/>
-                <a:ea typeface="Courier New" pitchFamily="34" charset="-122"/>
-                <a:cs typeface="Courier New" pitchFamily="34" charset="-120"/>
-              </a:rPr>
-              <a:t>        value ^= 0xFFFFFFF0;  value ^= 0xF;    // 짝 XOR — 명령 다양성</a:t>
-            </a:r>
-            <a:endParaRPr lang="en-US" sz="1250" dirty="0"/>
-          </a:p>
-          <a:p>
-            <a:pPr algn="l" indent="0" marL="0">
-              <a:lnSpc>
-                <a:spcPct val="110000"/>
-              </a:lnSpc>
-              <a:buNone/>
-            </a:pPr>
-            <a:r>
-              <a:rPr lang="en-US" sz="1250" dirty="0">
-                <a:solidFill>
-                  <a:srgbClr val="E7EDF5"/>
-                </a:solidFill>
-                <a:latin typeface="Courier New" pitchFamily="34" charset="0"/>
-                <a:ea typeface="Courier New" pitchFamily="34" charset="-122"/>
-                <a:cs typeface="Courier New" pitchFamily="34" charset="-120"/>
-              </a:rPr>
-              <a:t>    }</a:t>
-            </a:r>
-            <a:endParaRPr lang="en-US" sz="1250" dirty="0"/>
-          </a:p>
-          <a:p>
-            <a:pPr algn="l" indent="0" marL="0">
-              <a:lnSpc>
-                <a:spcPct val="110000"/>
-              </a:lnSpc>
-              <a:buNone/>
-            </a:pPr>
-            <a:r>
-              <a:rPr lang="en-US" sz="1250" dirty="0">
-                <a:solidFill>
-                  <a:srgbClr val="E7EDF5"/>
-                </a:solidFill>
-                <a:latin typeface="Courier New" pitchFamily="34" charset="0"/>
-                <a:ea typeface="Courier New" pitchFamily="34" charset="-122"/>
-                <a:cs typeface="Courier New" pitchFamily="34" charset="-120"/>
-              </a:rPr>
-              <a:t>    value = ~value;</a:t>
-            </a:r>
-            <a:endParaRPr lang="en-US" sz="1250" dirty="0"/>
-          </a:p>
-          <a:p>
-            <a:pPr algn="l" indent="0" marL="0">
-              <a:lnSpc>
-                <a:spcPct val="110000"/>
-              </a:lnSpc>
-              <a:buNone/>
-            </a:pPr>
-            <a:r>
-              <a:rPr lang="en-US" sz="1250" dirty="0">
-                <a:solidFill>
-                  <a:srgbClr val="6B7D94"/>
-                </a:solidFill>
-                <a:latin typeface="Courier New" pitchFamily="34" charset="0"/>
-                <a:ea typeface="Courier New" pitchFamily="34" charset="-122"/>
-                <a:cs typeface="Courier New" pitchFamily="34" charset="-120"/>
-              </a:rPr>
-              <a:t>}  // 끝나면 value는 0 이어야 정상</a:t>
-            </a:r>
-            <a:endParaRPr lang="en-US" sz="1250" dirty="0"/>
+            <a:off x="822960" y="1828800"/>
+            <a:ext cx="4800600" cy="457200"/>
+          </a:xfrm>
+          <a:prstGeom prst="rect">
+            <a:avLst/>
+          </a:prstGeom>
+          <a:noFill/>
+          <a:ln/>
+        </p:spPr>
+        <p:txBody>
+          <a:bodyPr wrap="square" lIns="0" tIns="0" rIns="0" bIns="0" rtlCol="0" anchor="ctr"/>
+          <a:lstStyle/>
+          <a:p>
+            <a:pPr indent="0" marL="0">
+              <a:buNone/>
+            </a:pPr>
+            <a:r>
+              <a:rPr lang="en-US" sz="1900" b="1" dirty="0">
+                <a:solidFill>
+                  <a:srgbClr val="E8A33D"/>
+                </a:solidFill>
+                <a:latin typeface="Malgun Gothic" pitchFamily="34" charset="0"/>
+                <a:ea typeface="Malgun Gothic" pitchFamily="34" charset="-122"/>
+                <a:cs typeface="Malgun Gothic" pitchFamily="34" charset="-120"/>
+              </a:rPr>
+              <a:t>Random Blocks (#7)</a:t>
+            </a:r>
+            <a:endParaRPr lang="en-US" sz="1900" dirty="0"/>
           </a:p>
         </p:txBody>
       </p:sp>
@@ -5400,8 +9176,8 @@
         </p:nvSpPr>
         <p:spPr>
           <a:xfrm>
-            <a:off x="548640" y="3886200"/>
-            <a:ext cx="11064240" cy="1828800"/>
+            <a:off x="822960" y="2377440"/>
+            <a:ext cx="4800600" cy="2011680"/>
           </a:xfrm>
           <a:prstGeom prst="rect">
             <a:avLst/>
@@ -5418,13 +9194,13 @@
                 <a:spcPct val="105000"/>
               </a:lnSpc>
               <a:spcAft>
-                <a:spcPts val="900"/>
+                <a:spcPts val="1000"/>
               </a:spcAft>
               <a:buSzPct val="100000"/>
               <a:buChar char="•"/>
             </a:pPr>
             <a:r>
-              <a:rPr lang="en-US" sz="1400" dirty="0">
+              <a:rPr lang="en-US" sz="1450" dirty="0">
                 <a:solidFill>
                   <a:srgbClr val="E7EDF5"/>
                 </a:solidFill>
@@ -5432,9 +9208,9 @@
                 <a:ea typeface="Malgun Gothic" pitchFamily="34" charset="-122"/>
                 <a:cs typeface="Malgun Gothic" pitchFamily="34" charset="-120"/>
               </a:rPr>
-              <a:t>결과가 항상 0으로 되돌아오도록 설계 → 반복 횟수 k가 달라도 결과가 같아야 함. 다르면 로직 오류.</a:t>
-            </a:r>
-            <a:endParaRPr lang="en-US" sz="1400" dirty="0"/>
+              <a:t>rand() 시드로 재현 가능한 난수를 채움</a:t>
+            </a:r>
+            <a:endParaRPr lang="en-US" sz="1450" dirty="0"/>
           </a:p>
           <a:p>
             <a:pPr marL="342900" indent="-342900">
@@ -5442,13 +9218,13 @@
                 <a:spcPct val="105000"/>
               </a:lnSpc>
               <a:spcAft>
-                <a:spcPts val="900"/>
+                <a:spcPts val="1000"/>
               </a:spcAft>
               <a:buSzPct val="100000"/>
               <a:buChar char="•"/>
             </a:pPr>
             <a:r>
-              <a:rPr lang="en-US" sz="1400" dirty="0">
+              <a:rPr lang="en-US" sz="1450" dirty="0">
                 <a:solidFill>
                   <a:srgbClr val="E7EDF5"/>
                 </a:solidFill>
@@ -5456,9 +9232,9 @@
                 <a:ea typeface="Malgun Gothic" pitchFamily="34" charset="-122"/>
                 <a:cs typeface="Malgun Gothic" pitchFamily="34" charset="-120"/>
               </a:rPr>
-              <a:t>짝 XOR은 단일 XOR이 NOT으로 최적화돼 사라지는 것을 막아 명령 스트림에 다양성을 줌 (decuda로 검증).</a:t>
-            </a:r>
-            <a:endParaRPr lang="en-US" sz="1400" dirty="0"/>
+              <a:t>검증 시 같은 시드로 수열을 재생성해 비교</a:t>
+            </a:r>
+            <a:endParaRPr lang="en-US" sz="1450" dirty="0"/>
           </a:p>
           <a:p>
             <a:pPr marL="342900" indent="-342900">
@@ -5466,13 +9242,13 @@
                 <a:spcPct val="105000"/>
               </a:lnSpc>
               <a:spcAft>
-                <a:spcPts val="900"/>
+                <a:spcPts val="1000"/>
               </a:spcAft>
               <a:buSzPct val="100000"/>
               <a:buChar char="•"/>
             </a:pPr>
             <a:r>
-              <a:rPr lang="en-US" sz="1400" dirty="0">
+              <a:rPr lang="en-US" sz="1450" dirty="0">
                 <a:solidFill>
                   <a:srgbClr val="E7EDF5"/>
                 </a:solidFill>
@@ -5480,9 +9256,247 @@
                 <a:ea typeface="Malgun Gothic" pitchFamily="34" charset="-122"/>
                 <a:cs typeface="Malgun Gothic" pitchFamily="34" charset="-120"/>
               </a:rPr>
-              <a:t>shmem 버전은 중간값을 공유 메모리에 둬 셰이더 오버클럭 오류에 더 민감 (세션 3 연결).</a:t>
-            </a:r>
-            <a:endParaRPr lang="en-US" sz="1400" dirty="0"/>
+              <a:t>공유 메모리로 난수 블록을 병렬 생성 (core.cu:723)</a:t>
+            </a:r>
+            <a:endParaRPr lang="en-US" sz="1450" dirty="0"/>
+          </a:p>
+        </p:txBody>
+      </p:sp>
+      <p:sp>
+        <p:nvSpPr>
+          <p:cNvPr id="7" name="Text 5"/>
+          <p:cNvSpPr/>
+          <p:nvPr/>
+        </p:nvSpPr>
+        <p:spPr>
+          <a:xfrm>
+            <a:off x="822960" y="4937760"/>
+            <a:ext cx="4800600" cy="640080"/>
+          </a:xfrm>
+          <a:prstGeom prst="rect">
+            <a:avLst/>
+          </a:prstGeom>
+          <a:noFill/>
+          <a:ln/>
+        </p:spPr>
+        <p:txBody>
+          <a:bodyPr wrap="square" lIns="0" tIns="0" rIns="0" bIns="0" rtlCol="0" anchor="t"/>
+          <a:lstStyle/>
+          <a:p>
+            <a:pPr indent="0" marL="0">
+              <a:buNone/>
+            </a:pPr>
+            <a:r>
+              <a:rPr lang="en-US" sz="1350" i="1" dirty="0">
+                <a:solidFill>
+                  <a:srgbClr val="9FB0C4"/>
+                </a:solidFill>
+                <a:latin typeface="Malgun Gothic" pitchFamily="34" charset="0"/>
+                <a:ea typeface="Malgun Gothic" pitchFamily="34" charset="-122"/>
+                <a:cs typeface="Malgun Gothic" pitchFamily="34" charset="-120"/>
+              </a:rPr>
+              <a:t>구조화된 패턴이 놓치는 값 의존적 결함을 잡습니다.</a:t>
+            </a:r>
+            <a:endParaRPr lang="en-US" sz="1350" dirty="0"/>
+          </a:p>
+        </p:txBody>
+      </p:sp>
+      <p:sp>
+        <p:nvSpPr>
+          <p:cNvPr id="8" name="Shape 6"/>
+          <p:cNvSpPr/>
+          <p:nvPr/>
+        </p:nvSpPr>
+        <p:spPr>
+          <a:xfrm>
+            <a:off x="6263640" y="1645920"/>
+            <a:ext cx="5349240" cy="4023360"/>
+          </a:xfrm>
+          <a:prstGeom prst="roundRect">
+            <a:avLst>
+              <a:gd name="adj" fmla="val 1818"/>
+            </a:avLst>
+          </a:prstGeom>
+          <a:solidFill>
+            <a:srgbClr val="18212E"/>
+          </a:solidFill>
+          <a:ln w="19050">
+            <a:solidFill>
+              <a:srgbClr val="3FB8C4"/>
+            </a:solidFill>
+            <a:prstDash val="solid"/>
+          </a:ln>
+        </p:spPr>
+      </p:sp>
+      <p:sp>
+        <p:nvSpPr>
+          <p:cNvPr id="9" name="Text 7"/>
+          <p:cNvSpPr/>
+          <p:nvPr/>
+        </p:nvSpPr>
+        <p:spPr>
+          <a:xfrm>
+            <a:off x="6537960" y="1828800"/>
+            <a:ext cx="4800600" cy="457200"/>
+          </a:xfrm>
+          <a:prstGeom prst="rect">
+            <a:avLst/>
+          </a:prstGeom>
+          <a:noFill/>
+          <a:ln/>
+        </p:spPr>
+        <p:txBody>
+          <a:bodyPr wrap="square" lIns="0" tIns="0" rIns="0" bIns="0" rtlCol="0" anchor="ctr"/>
+          <a:lstStyle/>
+          <a:p>
+            <a:pPr indent="0" marL="0">
+              <a:buNone/>
+            </a:pPr>
+            <a:r>
+              <a:rPr lang="en-US" sz="1900" b="1" dirty="0">
+                <a:solidFill>
+                  <a:srgbClr val="3FB8C4"/>
+                </a:solidFill>
+                <a:latin typeface="Malgun Gothic" pitchFamily="34" charset="0"/>
+                <a:ea typeface="Malgun Gothic" pitchFamily="34" charset="-122"/>
+                <a:cs typeface="Malgun Gothic" pitchFamily="34" charset="-120"/>
+              </a:rPr>
+              <a:t>Modulo-20 (#8)</a:t>
+            </a:r>
+            <a:endParaRPr lang="en-US" sz="1900" dirty="0"/>
+          </a:p>
+        </p:txBody>
+      </p:sp>
+      <p:sp>
+        <p:nvSpPr>
+          <p:cNvPr id="10" name="Text 8"/>
+          <p:cNvSpPr/>
+          <p:nvPr/>
+        </p:nvSpPr>
+        <p:spPr>
+          <a:xfrm>
+            <a:off x="6537960" y="2377440"/>
+            <a:ext cx="4800600" cy="2011680"/>
+          </a:xfrm>
+          <a:prstGeom prst="rect">
+            <a:avLst/>
+          </a:prstGeom>
+          <a:noFill/>
+          <a:ln/>
+        </p:spPr>
+        <p:txBody>
+          <a:bodyPr wrap="square" lIns="0" tIns="0" rIns="0" bIns="0" rtlCol="0" anchor="t"/>
+          <a:lstStyle/>
+          <a:p>
+            <a:pPr marL="342900" indent="-342900">
+              <a:lnSpc>
+                <a:spcPct val="105000"/>
+              </a:lnSpc>
+              <a:spcAft>
+                <a:spcPts val="1000"/>
+              </a:spcAft>
+              <a:buSzPct val="100000"/>
+              <a:buChar char="•"/>
+            </a:pPr>
+            <a:r>
+              <a:rPr lang="en-US" sz="1450" dirty="0">
+                <a:solidFill>
+                  <a:srgbClr val="E7EDF5"/>
+                </a:solidFill>
+                <a:latin typeface="Malgun Gothic" pitchFamily="34" charset="0"/>
+                <a:ea typeface="Malgun Gothic" pitchFamily="34" charset="-122"/>
+                <a:cs typeface="Malgun Gothic" pitchFamily="34" charset="-120"/>
+              </a:rPr>
+              <a:t>20개 word마다 패턴을 배치, 나머지는 보수로 채움</a:t>
+            </a:r>
+            <a:endParaRPr lang="en-US" sz="1450" dirty="0"/>
+          </a:p>
+          <a:p>
+            <a:pPr marL="342900" indent="-342900">
+              <a:lnSpc>
+                <a:spcPct val="105000"/>
+              </a:lnSpc>
+              <a:spcAft>
+                <a:spcPts val="1000"/>
+              </a:spcAft>
+              <a:buSzPct val="100000"/>
+              <a:buChar char="•"/>
+            </a:pPr>
+            <a:r>
+              <a:rPr lang="en-US" sz="1450" dirty="0">
+                <a:solidFill>
+                  <a:srgbClr val="E7EDF5"/>
+                </a:solidFill>
+                <a:latin typeface="Malgun Gothic" pitchFamily="34" charset="0"/>
+                <a:ea typeface="Malgun Gothic" pitchFamily="34" charset="-122"/>
+                <a:cs typeface="Malgun Gothic" pitchFamily="34" charset="-120"/>
+              </a:rPr>
+              <a:t>shift를 0~19로 돌려 모든 위상을 커버</a:t>
+            </a:r>
+            <a:endParaRPr lang="en-US" sz="1450" dirty="0"/>
+          </a:p>
+          <a:p>
+            <a:pPr marL="342900" indent="-342900">
+              <a:lnSpc>
+                <a:spcPct val="105000"/>
+              </a:lnSpc>
+              <a:spcAft>
+                <a:spcPts val="1000"/>
+              </a:spcAft>
+              <a:buSzPct val="100000"/>
+              <a:buChar char="•"/>
+            </a:pPr>
+            <a:r>
+              <a:rPr lang="en-US" sz="1450" dirty="0">
+                <a:solidFill>
+                  <a:srgbClr val="E7EDF5"/>
+                </a:solidFill>
+                <a:latin typeface="Malgun Gothic" pitchFamily="34" charset="0"/>
+                <a:ea typeface="Malgun Gothic" pitchFamily="34" charset="-122"/>
+                <a:cs typeface="Malgun Gothic" pitchFamily="34" charset="-120"/>
+              </a:rPr>
+              <a:t>주기적 주소 간섭 결함을 표적</a:t>
+            </a:r>
+            <a:endParaRPr lang="en-US" sz="1450" dirty="0"/>
+          </a:p>
+        </p:txBody>
+      </p:sp>
+      <p:sp>
+        <p:nvSpPr>
+          <p:cNvPr id="11" name="Text 9"/>
+          <p:cNvSpPr/>
+          <p:nvPr/>
+        </p:nvSpPr>
+        <p:spPr>
+          <a:xfrm>
+            <a:off x="6537960" y="4937760"/>
+            <a:ext cx="4800600" cy="640080"/>
+          </a:xfrm>
+          <a:prstGeom prst="rect">
+            <a:avLst/>
+          </a:prstGeom>
+          <a:noFill/>
+          <a:ln/>
+        </p:spPr>
+        <p:txBody>
+          <a:bodyPr wrap="square" lIns="0" tIns="0" rIns="0" bIns="0" rtlCol="0" anchor="t"/>
+          <a:lstStyle/>
+          <a:p>
+            <a:pPr indent="0" marL="0">
+              <a:buNone/>
+            </a:pPr>
+            <a:r>
+              <a:rPr lang="en-US" sz="1350" i="1" dirty="0">
+                <a:solidFill>
+                  <a:srgbClr val="9FB0C4"/>
+                </a:solidFill>
+                <a:latin typeface="Malgun Gothic" pitchFamily="34" charset="0"/>
+                <a:ea typeface="Malgun Gothic" pitchFamily="34" charset="-122"/>
+                <a:cs typeface="Malgun Gothic" pitchFamily="34" charset="-120"/>
+              </a:rPr>
+              <a:t>특정 간격의 셀들이 서로 영향을 주는 결함을 찾습니다.</a:t>
+            </a:r>
+            <a:endParaRPr lang="en-US" sz="1350" dirty="0"/>
           </a:p>
         </p:txBody>
       </p:sp>
@@ -5555,7 +9569,7 @@
                 <a:ea typeface="Courier New" pitchFamily="34" charset="-122"/>
                 <a:cs typeface="Courier New" pitchFamily="34" charset="-120"/>
               </a:rPr>
-              <a:t>6</a:t>
+              <a:t>5</a:t>
             </a:r>
             <a:endParaRPr lang="en-US" sz="2200" dirty="0"/>
           </a:p>
@@ -5594,7 +9608,7 @@
                 <a:ea typeface="Malgun Gothic" pitchFamily="34" charset="-122"/>
                 <a:cs typeface="Malgun Gothic" pitchFamily="34" charset="-120"/>
               </a:rPr>
-              <a:t>대역폭 측정 · D2D memcpy</a:t>
+              <a:t>Logic 테스트 · 메모리가 아니라 연산을 본다</a:t>
             </a:r>
             <a:endParaRPr lang="en-US" sz="2900" dirty="0"/>
           </a:p>
@@ -5608,12 +9622,12 @@
         </p:nvSpPr>
         <p:spPr>
           <a:xfrm>
-            <a:off x="548640" y="1508760"/>
-            <a:ext cx="11064240" cy="2011680"/>
+            <a:off x="548640" y="1463040"/>
+            <a:ext cx="11064240" cy="2194560"/>
           </a:xfrm>
           <a:prstGeom prst="roundRect">
             <a:avLst>
-              <a:gd name="adj" fmla="val 2273"/>
+              <a:gd name="adj" fmla="val 2083"/>
             </a:avLst>
           </a:prstGeom>
           <a:solidFill>
@@ -5635,8 +9649,8 @@
         </p:nvSpPr>
         <p:spPr>
           <a:xfrm>
-            <a:off x="768096" y="1655064"/>
-            <a:ext cx="10625328" cy="1719072"/>
+            <a:off x="768096" y="1609344"/>
+            <a:ext cx="10625328" cy="1901952"/>
           </a:xfrm>
           <a:prstGeom prst="rect">
             <a:avLst/>
@@ -5655,7 +9669,7 @@
               <a:buNone/>
             </a:pPr>
             <a:r>
-              <a:rPr lang="en-US" sz="1300" dirty="0">
+              <a:rPr lang="en-US" sz="1250" dirty="0">
                 <a:solidFill>
                   <a:srgbClr val="6B7D94"/>
                 </a:solidFill>
@@ -5663,9 +9677,9 @@
                 <a:ea typeface="Courier New" pitchFamily="34" charset="-122"/>
                 <a:cs typeface="Courier New" pitchFamily="34" charset="-120"/>
               </a:rPr>
-              <a:t>// core.cu:168 — gpuMemoryBandwidth</a:t>
-            </a:r>
-            <a:endParaRPr lang="en-US" sz="1300" dirty="0"/>
+              <a:t>// core.cu:298 — LCGLOOP 매크로</a:t>
+            </a:r>
+            <a:endParaRPr lang="en-US" sz="1250" dirty="0"/>
           </a:p>
           <a:p>
             <a:pPr algn="l" indent="0" marL="0">
@@ -5675,7 +9689,7 @@
               <a:buNone/>
             </a:pPr>
             <a:r>
-              <a:rPr lang="en-US" sz="1300" dirty="0">
+              <a:rPr lang="en-US" sz="1250" dirty="0">
                 <a:solidFill>
                   <a:srgbClr val="E7EDF5"/>
                 </a:solidFill>
@@ -5683,9 +9697,9 @@
                 <a:ea typeface="Courier New" pitchFamily="34" charset="-122"/>
                 <a:cs typeface="Courier New" pitchFamily="34" charset="-120"/>
               </a:rPr>
-              <a:t>uint start = getTimeMilliseconds();</a:t>
-            </a:r>
-            <a:endParaRPr lang="en-US" sz="1300" dirty="0"/>
+              <a:t>for (rep = 0; rep &lt; repeats; rep++) {</a:t>
+            </a:r>
+            <a:endParaRPr lang="en-US" sz="1250" dirty="0"/>
           </a:p>
           <a:p>
             <a:pPr algn="l" indent="0" marL="0">
@@ -5695,7 +9709,7 @@
               <a:buNone/>
             </a:pPr>
             <a:r>
-              <a:rPr lang="en-US" sz="1300" dirty="0">
+              <a:rPr lang="en-US" sz="1250" dirty="0">
                 <a:solidFill>
                   <a:srgbClr val="E7EDF5"/>
                 </a:solidFill>
@@ -5703,9 +9717,9 @@
                 <a:ea typeface="Courier New" pitchFamily="34" charset="-122"/>
                 <a:cs typeface="Courier New" pitchFamily="34" charset="-120"/>
               </a:rPr>
-              <a:t>for (uint i = 0; i &lt; iters; i++)</a:t>
-            </a:r>
-            <a:endParaRPr lang="en-US" sz="1300" dirty="0"/>
+              <a:t>    value = ~value;</a:t>
+            </a:r>
+            <a:endParaRPr lang="en-US" sz="1250" dirty="0"/>
           </a:p>
           <a:p>
             <a:pPr algn="l" indent="0" marL="0">
@@ -5715,17 +9729,17 @@
               <a:buNone/>
             </a:pPr>
             <a:r>
-              <a:rPr lang="en-US" sz="1300" dirty="0">
-                <a:solidFill>
-                  <a:srgbClr val="F2C079"/>
+              <a:rPr lang="en-US" sz="1250" dirty="0">
+                <a:solidFill>
+                  <a:srgbClr val="3FB8C4"/>
                 </a:solidFill>
                 <a:latin typeface="Courier New" pitchFamily="34" charset="0"/>
                 <a:ea typeface="Courier New" pitchFamily="34" charset="-122"/>
                 <a:cs typeface="Courier New" pitchFamily="34" charset="-120"/>
               </a:rPr>
-              <a:t>    cudaMemcpy(dst, src, bytes, cudaMemcpyDeviceToDevice);  // 디바이스 내부 복사</a:t>
-            </a:r>
-            <a:endParaRPr lang="en-US" sz="1300" dirty="0"/>
+              <a:t>    for (iter = 0; iter &lt; period; iter++) {   // 짧은 주기 LCG</a:t>
+            </a:r>
+            <a:endParaRPr lang="en-US" sz="1250" dirty="0"/>
           </a:p>
           <a:p>
             <a:pPr algn="l" indent="0" marL="0">
@@ -5735,17 +9749,17 @@
               <a:buNone/>
             </a:pPr>
             <a:r>
-              <a:rPr lang="en-US" sz="1300" dirty="0">
-                <a:solidFill>
-                  <a:srgbClr val="E6604F"/>
+              <a:rPr lang="en-US" sz="1250" dirty="0">
+                <a:solidFill>
+                  <a:srgbClr val="F2C079"/>
                 </a:solidFill>
                 <a:latin typeface="Courier New" pitchFamily="34" charset="0"/>
                 <a:ea typeface="Courier New" pitchFamily="34" charset="-122"/>
                 <a:cs typeface="Courier New" pitchFamily="34" charset="-120"/>
               </a:rPr>
-              <a:t>cudaThreadSynchronize();    // ★ D2D는 비동기 → 반드시 동기화 후 시간 측정</a:t>
-            </a:r>
-            <a:endParaRPr lang="en-US" sz="1300" dirty="0"/>
+              <a:t>        value = ~value;  value = a*value + c; // 선형합동생성기 스텝</a:t>
+            </a:r>
+            <a:endParaRPr lang="en-US" sz="1250" dirty="0"/>
           </a:p>
           <a:p>
             <a:pPr algn="l" indent="0" marL="0">
@@ -5755,17 +9769,77 @@
               <a:buNone/>
             </a:pPr>
             <a:r>
-              <a:rPr lang="en-US" sz="1300" dirty="0">
-                <a:solidFill>
-                  <a:srgbClr val="3FB8C4"/>
+              <a:rPr lang="en-US" sz="1250" dirty="0">
+                <a:solidFill>
+                  <a:srgbClr val="E7EDF5"/>
                 </a:solidFill>
                 <a:latin typeface="Courier New" pitchFamily="34" charset="0"/>
                 <a:ea typeface="Courier New" pitchFamily="34" charset="-122"/>
                 <a:cs typeface="Courier New" pitchFamily="34" charset="-120"/>
               </a:rPr>
-              <a:t>double bw = 2.0 * (mbToTest*iters) / seconds;   // 읽기+쓰기 → ×2</a:t>
-            </a:r>
-            <a:endParaRPr lang="en-US" sz="1300" dirty="0"/>
+              <a:t>        value ^= 0xFFFFFFF0;  value ^= 0xF;    // 짝 XOR — 명령 다양성</a:t>
+            </a:r>
+            <a:endParaRPr lang="en-US" sz="1250" dirty="0"/>
+          </a:p>
+          <a:p>
+            <a:pPr algn="l" indent="0" marL="0">
+              <a:lnSpc>
+                <a:spcPct val="110000"/>
+              </a:lnSpc>
+              <a:buNone/>
+            </a:pPr>
+            <a:r>
+              <a:rPr lang="en-US" sz="1250" dirty="0">
+                <a:solidFill>
+                  <a:srgbClr val="E7EDF5"/>
+                </a:solidFill>
+                <a:latin typeface="Courier New" pitchFamily="34" charset="0"/>
+                <a:ea typeface="Courier New" pitchFamily="34" charset="-122"/>
+                <a:cs typeface="Courier New" pitchFamily="34" charset="-120"/>
+              </a:rPr>
+              <a:t>    }</a:t>
+            </a:r>
+            <a:endParaRPr lang="en-US" sz="1250" dirty="0"/>
+          </a:p>
+          <a:p>
+            <a:pPr algn="l" indent="0" marL="0">
+              <a:lnSpc>
+                <a:spcPct val="110000"/>
+              </a:lnSpc>
+              <a:buNone/>
+            </a:pPr>
+            <a:r>
+              <a:rPr lang="en-US" sz="1250" dirty="0">
+                <a:solidFill>
+                  <a:srgbClr val="E7EDF5"/>
+                </a:solidFill>
+                <a:latin typeface="Courier New" pitchFamily="34" charset="0"/>
+                <a:ea typeface="Courier New" pitchFamily="34" charset="-122"/>
+                <a:cs typeface="Courier New" pitchFamily="34" charset="-120"/>
+              </a:rPr>
+              <a:t>    value = ~value;</a:t>
+            </a:r>
+            <a:endParaRPr lang="en-US" sz="1250" dirty="0"/>
+          </a:p>
+          <a:p>
+            <a:pPr algn="l" indent="0" marL="0">
+              <a:lnSpc>
+                <a:spcPct val="110000"/>
+              </a:lnSpc>
+              <a:buNone/>
+            </a:pPr>
+            <a:r>
+              <a:rPr lang="en-US" sz="1250" dirty="0">
+                <a:solidFill>
+                  <a:srgbClr val="6B7D94"/>
+                </a:solidFill>
+                <a:latin typeface="Courier New" pitchFamily="34" charset="0"/>
+                <a:ea typeface="Courier New" pitchFamily="34" charset="-122"/>
+                <a:cs typeface="Courier New" pitchFamily="34" charset="-120"/>
+              </a:rPr>
+              <a:t>}  // 끝나면 value는 0 이어야 정상</a:t>
+            </a:r>
+            <a:endParaRPr lang="en-US" sz="1250" dirty="0"/>
           </a:p>
         </p:txBody>
       </p:sp>
@@ -5777,8 +9851,8 @@
         </p:nvSpPr>
         <p:spPr>
           <a:xfrm>
-            <a:off x="548640" y="3794760"/>
-            <a:ext cx="2377440" cy="548640"/>
+            <a:off x="548640" y="3886200"/>
+            <a:ext cx="11064240" cy="1828800"/>
           </a:xfrm>
           <a:prstGeom prst="rect">
             <a:avLst/>
@@ -5790,53 +9864,42 @@
           <a:bodyPr wrap="square" lIns="0" tIns="0" rIns="0" bIns="0" rtlCol="0" anchor="t"/>
           <a:lstStyle/>
           <a:p>
-            <a:pPr indent="0" marL="0">
-              <a:buNone/>
-            </a:pPr>
-            <a:r>
-              <a:rPr lang="en-US" sz="1500" b="1" dirty="0">
-                <a:solidFill>
-                  <a:srgbClr val="E6604F"/>
+            <a:pPr marL="342900" indent="-342900">
+              <a:lnSpc>
+                <a:spcPct val="105000"/>
+              </a:lnSpc>
+              <a:spcAft>
+                <a:spcPts val="900"/>
+              </a:spcAft>
+              <a:buSzPct val="100000"/>
+              <a:buChar char="•"/>
+            </a:pPr>
+            <a:r>
+              <a:rPr lang="en-US" sz="1400" dirty="0">
+                <a:solidFill>
+                  <a:srgbClr val="E7EDF5"/>
                 </a:solidFill>
                 <a:latin typeface="Malgun Gothic" pitchFamily="34" charset="0"/>
                 <a:ea typeface="Malgun Gothic" pitchFamily="34" charset="-122"/>
                 <a:cs typeface="Malgun Gothic" pitchFamily="34" charset="-120"/>
               </a:rPr>
-              <a:t>비동기 함정</a:t>
-            </a:r>
-            <a:endParaRPr lang="en-US" sz="1500" dirty="0"/>
-          </a:p>
-        </p:txBody>
-      </p:sp>
-      <p:sp>
-        <p:nvSpPr>
-          <p:cNvPr id="7" name="Text 5"/>
-          <p:cNvSpPr/>
-          <p:nvPr/>
-        </p:nvSpPr>
-        <p:spPr>
-          <a:xfrm>
-            <a:off x="3108960" y="3794760"/>
-            <a:ext cx="8503920" cy="548640"/>
-          </a:xfrm>
-          <a:prstGeom prst="rect">
-            <a:avLst/>
-          </a:prstGeom>
-          <a:noFill/>
-          <a:ln/>
-        </p:spPr>
-        <p:txBody>
-          <a:bodyPr wrap="square" lIns="0" tIns="0" rIns="0" bIns="0" rtlCol="0" anchor="t"/>
-          <a:lstStyle/>
-          <a:p>
-            <a:pPr indent="0" marL="0">
+              <a:t>결과가 항상 0으로 되돌아오도록 설계 → 반복 횟수 k가 달라도 결과가 같아야 함. 다르면 로직 오류.</a:t>
+            </a:r>
+            <a:endParaRPr lang="en-US" sz="1400" dirty="0"/>
+          </a:p>
+          <a:p>
+            <a:pPr marL="342900" indent="-342900">
               <a:lnSpc>
                 <a:spcPct val="105000"/>
               </a:lnSpc>
-              <a:buNone/>
-            </a:pPr>
-            <a:r>
-              <a:rPr lang="en-US" sz="1450" dirty="0">
+              <a:spcAft>
+                <a:spcPts val="900"/>
+              </a:spcAft>
+              <a:buSzPct val="100000"/>
+              <a:buChar char="•"/>
+            </a:pPr>
+            <a:r>
+              <a:rPr lang="en-US" sz="1400" dirty="0">
                 <a:solidFill>
                   <a:srgbClr val="E7EDF5"/>
                 </a:solidFill>
@@ -5844,171 +9907,33 @@
                 <a:ea typeface="Malgun Gothic" pitchFamily="34" charset="-122"/>
                 <a:cs typeface="Malgun Gothic" pitchFamily="34" charset="-120"/>
               </a:rPr>
-              <a:t>D2D memcpy는 논블로킹 → 동기화 없이 시간 재면 0에 가까운 엉터리 값</a:t>
-            </a:r>
-            <a:endParaRPr lang="en-US" sz="1450" dirty="0"/>
-          </a:p>
-        </p:txBody>
-      </p:sp>
-      <p:sp>
-        <p:nvSpPr>
-          <p:cNvPr id="8" name="Text 6"/>
-          <p:cNvSpPr/>
-          <p:nvPr/>
-        </p:nvSpPr>
-        <p:spPr>
-          <a:xfrm>
-            <a:off x="548640" y="4453128"/>
-            <a:ext cx="2377440" cy="548640"/>
-          </a:xfrm>
-          <a:prstGeom prst="rect">
-            <a:avLst/>
-          </a:prstGeom>
-          <a:noFill/>
-          <a:ln/>
-        </p:spPr>
-        <p:txBody>
-          <a:bodyPr wrap="square" lIns="0" tIns="0" rIns="0" bIns="0" rtlCol="0" anchor="t"/>
-          <a:lstStyle/>
-          <a:p>
-            <a:pPr indent="0" marL="0">
-              <a:buNone/>
-            </a:pPr>
-            <a:r>
-              <a:rPr lang="en-US" sz="1500" b="1" dirty="0">
-                <a:solidFill>
-                  <a:srgbClr val="3FB8C4"/>
+              <a:t>짝 XOR은 단일 XOR이 NOT으로 최적화돼 사라지는 것을 막아 명령 스트림에 다양성을 줌 (decuda로 검증).</a:t>
+            </a:r>
+            <a:endParaRPr lang="en-US" sz="1400" dirty="0"/>
+          </a:p>
+          <a:p>
+            <a:pPr marL="342900" indent="-342900">
+              <a:lnSpc>
+                <a:spcPct val="105000"/>
+              </a:lnSpc>
+              <a:spcAft>
+                <a:spcPts val="900"/>
+              </a:spcAft>
+              <a:buSzPct val="100000"/>
+              <a:buChar char="•"/>
+            </a:pPr>
+            <a:r>
+              <a:rPr lang="en-US" sz="1400" dirty="0">
+                <a:solidFill>
+                  <a:srgbClr val="E7EDF5"/>
                 </a:solidFill>
                 <a:latin typeface="Malgun Gothic" pitchFamily="34" charset="0"/>
                 <a:ea typeface="Malgun Gothic" pitchFamily="34" charset="-122"/>
                 <a:cs typeface="Malgun Gothic" pitchFamily="34" charset="-120"/>
               </a:rPr>
-              <a:t>×2의 이유</a:t>
-            </a:r>
-            <a:endParaRPr lang="en-US" sz="1500" dirty="0"/>
-          </a:p>
-        </p:txBody>
-      </p:sp>
-      <p:sp>
-        <p:nvSpPr>
-          <p:cNvPr id="9" name="Text 7"/>
-          <p:cNvSpPr/>
-          <p:nvPr/>
-        </p:nvSpPr>
-        <p:spPr>
-          <a:xfrm>
-            <a:off x="3108960" y="4453128"/>
-            <a:ext cx="8503920" cy="548640"/>
-          </a:xfrm>
-          <a:prstGeom prst="rect">
-            <a:avLst/>
-          </a:prstGeom>
-          <a:noFill/>
-          <a:ln/>
-        </p:spPr>
-        <p:txBody>
-          <a:bodyPr wrap="square" lIns="0" tIns="0" rIns="0" bIns="0" rtlCol="0" anchor="t"/>
-          <a:lstStyle/>
-          <a:p>
-            <a:pPr indent="0" marL="0">
-              <a:lnSpc>
-                <a:spcPct val="105000"/>
-              </a:lnSpc>
-              <a:buNone/>
-            </a:pPr>
-            <a:r>
-              <a:rPr lang="en-US" sz="1450" dirty="0">
-                <a:solidFill>
-                  <a:srgbClr val="E7EDF5"/>
-                </a:solidFill>
-                <a:latin typeface="Malgun Gothic" pitchFamily="34" charset="0"/>
-                <a:ea typeface="Malgun Gothic" pitchFamily="34" charset="-122"/>
-                <a:cs typeface="Malgun Gothic" pitchFamily="34" charset="-120"/>
-              </a:rPr>
-              <a:t>복사는 읽기와 쓰기를 동시에 함 → 실효 대역폭은 전송량의 2배</a:t>
-            </a:r>
-            <a:endParaRPr lang="en-US" sz="1450" dirty="0"/>
-          </a:p>
-        </p:txBody>
-      </p:sp>
-      <p:sp>
-        <p:nvSpPr>
-          <p:cNvPr id="10" name="Text 8"/>
-          <p:cNvSpPr/>
-          <p:nvPr/>
-        </p:nvSpPr>
-        <p:spPr>
-          <a:xfrm>
-            <a:off x="548640" y="5111496"/>
-            <a:ext cx="2377440" cy="548640"/>
-          </a:xfrm>
-          <a:prstGeom prst="rect">
-            <a:avLst/>
-          </a:prstGeom>
-          <a:noFill/>
-          <a:ln/>
-        </p:spPr>
-        <p:txBody>
-          <a:bodyPr wrap="square" lIns="0" tIns="0" rIns="0" bIns="0" rtlCol="0" anchor="t"/>
-          <a:lstStyle/>
-          <a:p>
-            <a:pPr indent="0" marL="0">
-              <a:buNone/>
-            </a:pPr>
-            <a:r>
-              <a:rPr lang="en-US" sz="1500" b="1" dirty="0">
-                <a:solidFill>
-                  <a:srgbClr val="E8A33D"/>
-                </a:solidFill>
-                <a:latin typeface="Malgun Gothic" pitchFamily="34" charset="0"/>
-                <a:ea typeface="Malgun Gothic" pitchFamily="34" charset="-122"/>
-                <a:cs typeface="Malgun Gothic" pitchFamily="34" charset="-120"/>
-              </a:rPr>
-              <a:t>진단 가치</a:t>
-            </a:r>
-            <a:endParaRPr lang="en-US" sz="1500" dirty="0"/>
-          </a:p>
-        </p:txBody>
-      </p:sp>
-      <p:sp>
-        <p:nvSpPr>
-          <p:cNvPr id="11" name="Text 9"/>
-          <p:cNvSpPr/>
-          <p:nvPr/>
-        </p:nvSpPr>
-        <p:spPr>
-          <a:xfrm>
-            <a:off x="3108960" y="5111496"/>
-            <a:ext cx="8503920" cy="548640"/>
-          </a:xfrm>
-          <a:prstGeom prst="rect">
-            <a:avLst/>
-          </a:prstGeom>
-          <a:noFill/>
-          <a:ln/>
-        </p:spPr>
-        <p:txBody>
-          <a:bodyPr wrap="square" lIns="0" tIns="0" rIns="0" bIns="0" rtlCol="0" anchor="t"/>
-          <a:lstStyle/>
-          <a:p>
-            <a:pPr indent="0" marL="0">
-              <a:lnSpc>
-                <a:spcPct val="105000"/>
-              </a:lnSpc>
-              <a:buNone/>
-            </a:pPr>
-            <a:r>
-              <a:rPr lang="en-US" sz="1450" dirty="0">
-                <a:solidFill>
-                  <a:srgbClr val="E7EDF5"/>
-                </a:solidFill>
-                <a:latin typeface="Malgun Gothic" pitchFamily="34" charset="0"/>
-                <a:ea typeface="Malgun Gothic" pitchFamily="34" charset="-122"/>
-                <a:cs typeface="Malgun Gothic" pitchFamily="34" charset="-120"/>
-              </a:rPr>
-              <a:t>기대치보다 크게 낮으면 그 자체가 하드웨어·드라이버 이상 신호</a:t>
-            </a:r>
-            <a:endParaRPr lang="en-US" sz="1450" dirty="0"/>
+              <a:t>shmem 버전은 중간값을 공유 메모리에 둬 셰이더 오버클럭 오류에 더 민감 (세션 3 연결).</a:t>
+            </a:r>
+            <a:endParaRPr lang="en-US" sz="1400" dirty="0"/>
           </a:p>
         </p:txBody>
       </p:sp>
@@ -6081,7 +10006,7 @@
                 <a:ea typeface="Courier New" pitchFamily="34" charset="-122"/>
                 <a:cs typeface="Courier New" pitchFamily="34" charset="-120"/>
               </a:rPr>
-              <a:t>7</a:t>
+              <a:t>6</a:t>
             </a:r>
             <a:endParaRPr lang="en-US" sz="2200" dirty="0"/>
           </a:p>
@@ -6120,7 +10045,7 @@
                 <a:ea typeface="Malgun Gothic" pitchFamily="34" charset="-122"/>
                 <a:cs typeface="Malgun Gothic" pitchFamily="34" charset="-120"/>
               </a:rPr>
-              <a:t>실습 미리보기 · Lab 4</a:t>
+              <a:t>대역폭 측정 · D2D memcpy</a:t>
             </a:r>
             <a:endParaRPr lang="en-US" sz="2900" dirty="0"/>
           </a:p>
@@ -6134,18 +10059,23 @@
         </p:nvSpPr>
         <p:spPr>
           <a:xfrm>
-            <a:off x="548640" y="1600200"/>
-            <a:ext cx="5303520" cy="1920240"/>
+            <a:off x="548640" y="1508760"/>
+            <a:ext cx="11064240" cy="2011680"/>
           </a:xfrm>
           <a:prstGeom prst="roundRect">
             <a:avLst>
-              <a:gd name="adj" fmla="val 3810"/>
+              <a:gd name="adj" fmla="val 2273"/>
             </a:avLst>
           </a:prstGeom>
           <a:solidFill>
-            <a:srgbClr val="18212E"/>
+            <a:srgbClr val="0B1119"/>
           </a:solidFill>
-          <a:ln/>
+          <a:ln w="12700">
+            <a:solidFill>
+              <a:srgbClr val="2C3A4E"/>
+            </a:solidFill>
+            <a:prstDash val="solid"/>
+          </a:ln>
         </p:spPr>
       </p:sp>
       <p:sp>
@@ -6156,38 +10086,137 @@
         </p:nvSpPr>
         <p:spPr>
           <a:xfrm>
-            <a:off x="804672" y="1801368"/>
-            <a:ext cx="1188720" cy="502920"/>
-          </a:xfrm>
-          <a:prstGeom prst="roundRect">
-            <a:avLst>
-              <a:gd name="adj" fmla="val 14545"/>
-            </a:avLst>
-          </a:prstGeom>
-          <a:solidFill>
-            <a:srgbClr val="E8A33D"/>
-          </a:solidFill>
-          <a:ln/>
-        </p:spPr>
-        <p:txBody>
-          <a:bodyPr wrap="square" rtlCol="0" anchor="ctr"/>
-          <a:lstStyle/>
-          <a:p>
-            <a:pPr algn="ctr" indent="0" marL="0">
-              <a:buNone/>
-            </a:pPr>
-            <a:r>
-              <a:rPr lang="en-US" sz="1700" b="1" dirty="0">
-                <a:solidFill>
-                  <a:srgbClr val="101722"/>
+            <a:off x="768096" y="1655064"/>
+            <a:ext cx="10625328" cy="1719072"/>
+          </a:xfrm>
+          <a:prstGeom prst="rect">
+            <a:avLst/>
+          </a:prstGeom>
+          <a:noFill/>
+          <a:ln/>
+        </p:spPr>
+        <p:txBody>
+          <a:bodyPr wrap="square" lIns="0" tIns="0" rIns="0" bIns="0" rtlCol="0" anchor="t"/>
+          <a:lstStyle/>
+          <a:p>
+            <a:pPr algn="l" indent="0" marL="0">
+              <a:lnSpc>
+                <a:spcPct val="110000"/>
+              </a:lnSpc>
+              <a:buNone/>
+            </a:pPr>
+            <a:r>
+              <a:rPr lang="en-US" sz="1300" dirty="0">
+                <a:solidFill>
+                  <a:srgbClr val="6B7D94"/>
                 </a:solidFill>
                 <a:latin typeface="Courier New" pitchFamily="34" charset="0"/>
                 <a:ea typeface="Courier New" pitchFamily="34" charset="-122"/>
                 <a:cs typeface="Courier New" pitchFamily="34" charset="-120"/>
               </a:rPr>
-              <a:t>Ex 1</a:t>
-            </a:r>
-            <a:endParaRPr lang="en-US" sz="1700" dirty="0"/>
+              <a:t>// core.cu:168 — gpuMemoryBandwidth</a:t>
+            </a:r>
+            <a:endParaRPr lang="en-US" sz="1300" dirty="0"/>
+          </a:p>
+          <a:p>
+            <a:pPr algn="l" indent="0" marL="0">
+              <a:lnSpc>
+                <a:spcPct val="110000"/>
+              </a:lnSpc>
+              <a:buNone/>
+            </a:pPr>
+            <a:r>
+              <a:rPr lang="en-US" sz="1300" dirty="0">
+                <a:solidFill>
+                  <a:srgbClr val="E7EDF5"/>
+                </a:solidFill>
+                <a:latin typeface="Courier New" pitchFamily="34" charset="0"/>
+                <a:ea typeface="Courier New" pitchFamily="34" charset="-122"/>
+                <a:cs typeface="Courier New" pitchFamily="34" charset="-120"/>
+              </a:rPr>
+              <a:t>uint start = getTimeMilliseconds();</a:t>
+            </a:r>
+            <a:endParaRPr lang="en-US" sz="1300" dirty="0"/>
+          </a:p>
+          <a:p>
+            <a:pPr algn="l" indent="0" marL="0">
+              <a:lnSpc>
+                <a:spcPct val="110000"/>
+              </a:lnSpc>
+              <a:buNone/>
+            </a:pPr>
+            <a:r>
+              <a:rPr lang="en-US" sz="1300" dirty="0">
+                <a:solidFill>
+                  <a:srgbClr val="E7EDF5"/>
+                </a:solidFill>
+                <a:latin typeface="Courier New" pitchFamily="34" charset="0"/>
+                <a:ea typeface="Courier New" pitchFamily="34" charset="-122"/>
+                <a:cs typeface="Courier New" pitchFamily="34" charset="-120"/>
+              </a:rPr>
+              <a:t>for (uint i = 0; i &lt; iters; i++)</a:t>
+            </a:r>
+            <a:endParaRPr lang="en-US" sz="1300" dirty="0"/>
+          </a:p>
+          <a:p>
+            <a:pPr algn="l" indent="0" marL="0">
+              <a:lnSpc>
+                <a:spcPct val="110000"/>
+              </a:lnSpc>
+              <a:buNone/>
+            </a:pPr>
+            <a:r>
+              <a:rPr lang="en-US" sz="1300" dirty="0">
+                <a:solidFill>
+                  <a:srgbClr val="F2C079"/>
+                </a:solidFill>
+                <a:latin typeface="Courier New" pitchFamily="34" charset="0"/>
+                <a:ea typeface="Courier New" pitchFamily="34" charset="-122"/>
+                <a:cs typeface="Courier New" pitchFamily="34" charset="-120"/>
+              </a:rPr>
+              <a:t>    cudaMemcpy(dst, src, bytes, cudaMemcpyDeviceToDevice);  // 디바이스 내부 복사</a:t>
+            </a:r>
+            <a:endParaRPr lang="en-US" sz="1300" dirty="0"/>
+          </a:p>
+          <a:p>
+            <a:pPr algn="l" indent="0" marL="0">
+              <a:lnSpc>
+                <a:spcPct val="110000"/>
+              </a:lnSpc>
+              <a:buNone/>
+            </a:pPr>
+            <a:r>
+              <a:rPr lang="en-US" sz="1300" dirty="0">
+                <a:solidFill>
+                  <a:srgbClr val="E6604F"/>
+                </a:solidFill>
+                <a:latin typeface="Courier New" pitchFamily="34" charset="0"/>
+                <a:ea typeface="Courier New" pitchFamily="34" charset="-122"/>
+                <a:cs typeface="Courier New" pitchFamily="34" charset="-120"/>
+              </a:rPr>
+              <a:t>cudaThreadSynchronize();    // ★ D2D는 비동기 → 반드시 동기화 후 시간 측정</a:t>
+            </a:r>
+            <a:endParaRPr lang="en-US" sz="1300" dirty="0"/>
+          </a:p>
+          <a:p>
+            <a:pPr algn="l" indent="0" marL="0">
+              <a:lnSpc>
+                <a:spcPct val="110000"/>
+              </a:lnSpc>
+              <a:buNone/>
+            </a:pPr>
+            <a:r>
+              <a:rPr lang="en-US" sz="1300" dirty="0">
+                <a:solidFill>
+                  <a:srgbClr val="3FB8C4"/>
+                </a:solidFill>
+                <a:latin typeface="Courier New" pitchFamily="34" charset="0"/>
+                <a:ea typeface="Courier New" pitchFamily="34" charset="-122"/>
+                <a:cs typeface="Courier New" pitchFamily="34" charset="-120"/>
+              </a:rPr>
+              <a:t>double bw = 2.0 * (mbToTest*iters) / seconds;   // 읽기+쓰기 → ×2</a:t>
+            </a:r>
+            <a:endParaRPr lang="en-US" sz="1300" dirty="0"/>
           </a:p>
         </p:txBody>
       </p:sp>
@@ -6199,8 +10228,8 @@
         </p:nvSpPr>
         <p:spPr>
           <a:xfrm>
-            <a:off x="2148840" y="1819656"/>
-            <a:ext cx="3474720" cy="822960"/>
+            <a:off x="548640" y="3794760"/>
+            <a:ext cx="2377440" cy="548640"/>
           </a:xfrm>
           <a:prstGeom prst="rect">
             <a:avLst/>
@@ -6216,17 +10245,17 @@
               <a:buNone/>
             </a:pPr>
             <a:r>
-              <a:rPr lang="en-US" sz="1800" b="1" dirty="0">
-                <a:solidFill>
-                  <a:srgbClr val="E7EDF5"/>
+              <a:rPr lang="en-US" sz="1500" b="1" dirty="0">
+                <a:solidFill>
+                  <a:srgbClr val="E6604F"/>
                 </a:solidFill>
                 <a:latin typeface="Malgun Gothic" pitchFamily="34" charset="0"/>
                 <a:ea typeface="Malgun Gothic" pitchFamily="34" charset="-122"/>
                 <a:cs typeface="Malgun Gothic" pitchFamily="34" charset="-120"/>
               </a:rPr>
-              <a:t>테스트 순서 읽기</a:t>
-            </a:r>
-            <a:endParaRPr lang="en-US" sz="1800" dirty="0"/>
+              <a:t>비동기 함정</a:t>
+            </a:r>
+            <a:endParaRPr lang="en-US" sz="1500" dirty="0"/>
           </a:p>
         </p:txBody>
       </p:sp>
@@ -6238,8 +10267,8 @@
         </p:nvSpPr>
         <p:spPr>
           <a:xfrm>
-            <a:off x="804672" y="2697480"/>
-            <a:ext cx="4791456" cy="731520"/>
+            <a:off x="3108960" y="3794760"/>
+            <a:ext cx="8503920" cy="548640"/>
           </a:xfrm>
           <a:prstGeom prst="rect">
             <a:avLst/>
@@ -6253,100 +10282,35 @@
           <a:p>
             <a:pPr indent="0" marL="0">
               <a:lnSpc>
-                <a:spcPct val="110000"/>
+                <a:spcPct val="105000"/>
               </a:lnSpc>
               <a:buNone/>
             </a:pPr>
             <a:r>
-              <a:rPr lang="en-US" sz="1350" dirty="0">
-                <a:solidFill>
-                  <a:srgbClr val="9FB0C4"/>
+              <a:rPr lang="en-US" sz="1450" dirty="0">
+                <a:solidFill>
+                  <a:srgbClr val="E7EDF5"/>
                 </a:solidFill>
                 <a:latin typeface="Malgun Gothic" pitchFamily="34" charset="0"/>
                 <a:ea typeface="Malgun Gothic" pitchFamily="34" charset="-122"/>
                 <a:cs typeface="Malgun Gothic" pitchFamily="34" charset="-120"/>
               </a:rPr>
-              <a:t>cli.cu의 for 루프에서 13종 실행 순서 확인</a:t>
-            </a:r>
-            <a:endParaRPr lang="en-US" sz="1350" dirty="0"/>
-          </a:p>
-        </p:txBody>
-      </p:sp>
-      <p:sp>
-        <p:nvSpPr>
-          <p:cNvPr id="8" name="Shape 6"/>
-          <p:cNvSpPr/>
-          <p:nvPr/>
-        </p:nvSpPr>
-        <p:spPr>
-          <a:xfrm>
-            <a:off x="6309360" y="1600200"/>
-            <a:ext cx="5303520" cy="1920240"/>
-          </a:xfrm>
-          <a:prstGeom prst="roundRect">
-            <a:avLst>
-              <a:gd name="adj" fmla="val 3810"/>
-            </a:avLst>
-          </a:prstGeom>
-          <a:solidFill>
-            <a:srgbClr val="18212E"/>
-          </a:solidFill>
-          <a:ln/>
-        </p:spPr>
-      </p:sp>
-      <p:sp>
-        <p:nvSpPr>
-          <p:cNvPr id="9" name="Text 7"/>
-          <p:cNvSpPr/>
-          <p:nvPr/>
-        </p:nvSpPr>
-        <p:spPr>
-          <a:xfrm>
-            <a:off x="6565392" y="1801368"/>
-            <a:ext cx="1188720" cy="502920"/>
-          </a:xfrm>
-          <a:prstGeom prst="roundRect">
-            <a:avLst>
-              <a:gd name="adj" fmla="val 14545"/>
-            </a:avLst>
-          </a:prstGeom>
-          <a:solidFill>
-            <a:srgbClr val="3FB8C4"/>
-          </a:solidFill>
-          <a:ln/>
-        </p:spPr>
-        <p:txBody>
-          <a:bodyPr wrap="square" rtlCol="0" anchor="ctr"/>
-          <a:lstStyle/>
-          <a:p>
-            <a:pPr algn="ctr" indent="0" marL="0">
-              <a:buNone/>
-            </a:pPr>
-            <a:r>
-              <a:rPr lang="en-US" sz="1700" b="1" dirty="0">
-                <a:solidFill>
-                  <a:srgbClr val="101722"/>
-                </a:solidFill>
-                <a:latin typeface="Courier New" pitchFamily="34" charset="0"/>
-                <a:ea typeface="Courier New" pitchFamily="34" charset="-122"/>
-                <a:cs typeface="Courier New" pitchFamily="34" charset="-120"/>
-              </a:rPr>
-              <a:t>Ex 2</a:t>
-            </a:r>
-            <a:endParaRPr lang="en-US" sz="1700" dirty="0"/>
-          </a:p>
-        </p:txBody>
-      </p:sp>
-      <p:sp>
-        <p:nvSpPr>
-          <p:cNvPr id="10" name="Text 8"/>
-          <p:cNvSpPr/>
-          <p:nvPr/>
-        </p:nvSpPr>
-        <p:spPr>
-          <a:xfrm>
-            <a:off x="7909560" y="1819656"/>
-            <a:ext cx="3474720" cy="822960"/>
+              <a:t>D2D memcpy는 논블로킹 → 동기화 없이 시간 재면 0에 가까운 엉터리 값</a:t>
+            </a:r>
+            <a:endParaRPr lang="en-US" sz="1450" dirty="0"/>
+          </a:p>
+        </p:txBody>
+      </p:sp>
+      <p:sp>
+        <p:nvSpPr>
+          <p:cNvPr id="8" name="Text 6"/>
+          <p:cNvSpPr/>
+          <p:nvPr/>
+        </p:nvSpPr>
+        <p:spPr>
+          <a:xfrm>
+            <a:off x="548640" y="4453128"/>
+            <a:ext cx="2377440" cy="548640"/>
           </a:xfrm>
           <a:prstGeom prst="rect">
             <a:avLst/>
@@ -6362,30 +10326,30 @@
               <a:buNone/>
             </a:pPr>
             <a:r>
-              <a:rPr lang="en-US" sz="1800" b="1" dirty="0">
-                <a:solidFill>
-                  <a:srgbClr val="E7EDF5"/>
+              <a:rPr lang="en-US" sz="1500" b="1" dirty="0">
+                <a:solidFill>
+                  <a:srgbClr val="3FB8C4"/>
                 </a:solidFill>
                 <a:latin typeface="Malgun Gothic" pitchFamily="34" charset="0"/>
                 <a:ea typeface="Malgun Gothic" pitchFamily="34" charset="-122"/>
                 <a:cs typeface="Malgun Gothic" pitchFamily="34" charset="-120"/>
               </a:rPr>
-              <a:t>패턴 손으로 계산</a:t>
-            </a:r>
-            <a:endParaRPr lang="en-US" sz="1800" dirty="0"/>
-          </a:p>
-        </p:txBody>
-      </p:sp>
-      <p:sp>
-        <p:nvSpPr>
-          <p:cNvPr id="11" name="Text 9"/>
-          <p:cNvSpPr/>
-          <p:nvPr/>
-        </p:nvSpPr>
-        <p:spPr>
-          <a:xfrm>
-            <a:off x="6565392" y="2697480"/>
-            <a:ext cx="4791456" cy="731520"/>
+              <a:t>×2의 이유</a:t>
+            </a:r>
+            <a:endParaRPr lang="en-US" sz="1500" dirty="0"/>
+          </a:p>
+        </p:txBody>
+      </p:sp>
+      <p:sp>
+        <p:nvSpPr>
+          <p:cNvPr id="9" name="Text 7"/>
+          <p:cNvSpPr/>
+          <p:nvPr/>
+        </p:nvSpPr>
+        <p:spPr>
+          <a:xfrm>
+            <a:off x="3108960" y="4453128"/>
+            <a:ext cx="8503920" cy="548640"/>
           </a:xfrm>
           <a:prstGeom prst="rect">
             <a:avLst/>
@@ -6399,100 +10363,35 @@
           <a:p>
             <a:pPr indent="0" marL="0">
               <a:lnSpc>
-                <a:spcPct val="110000"/>
+                <a:spcPct val="105000"/>
               </a:lnSpc>
               <a:buNone/>
             </a:pPr>
             <a:r>
-              <a:rPr lang="en-US" sz="1350" dirty="0">
-                <a:solidFill>
-                  <a:srgbClr val="9FB0C4"/>
+              <a:rPr lang="en-US" sz="1450" dirty="0">
+                <a:solidFill>
+                  <a:srgbClr val="E7EDF5"/>
                 </a:solidFill>
                 <a:latin typeface="Malgun Gothic" pitchFamily="34" charset="0"/>
                 <a:ea typeface="Malgun Gothic" pitchFamily="34" charset="-122"/>
                 <a:cs typeface="Malgun Gothic" pitchFamily="34" charset="-120"/>
               </a:rPr>
-              <a:t>shift별 Walking 패턴을 종이에 적고 코드와 대조</a:t>
-            </a:r>
-            <a:endParaRPr lang="en-US" sz="1350" dirty="0"/>
-          </a:p>
-        </p:txBody>
-      </p:sp>
-      <p:sp>
-        <p:nvSpPr>
-          <p:cNvPr id="12" name="Shape 10"/>
-          <p:cNvSpPr/>
-          <p:nvPr/>
-        </p:nvSpPr>
-        <p:spPr>
-          <a:xfrm>
-            <a:off x="548640" y="3840480"/>
-            <a:ext cx="5303520" cy="1920240"/>
-          </a:xfrm>
-          <a:prstGeom prst="roundRect">
-            <a:avLst>
-              <a:gd name="adj" fmla="val 3810"/>
-            </a:avLst>
-          </a:prstGeom>
-          <a:solidFill>
-            <a:srgbClr val="18212E"/>
-          </a:solidFill>
-          <a:ln/>
-        </p:spPr>
-      </p:sp>
-      <p:sp>
-        <p:nvSpPr>
-          <p:cNvPr id="13" name="Text 11"/>
-          <p:cNvSpPr/>
-          <p:nvPr/>
-        </p:nvSpPr>
-        <p:spPr>
-          <a:xfrm>
-            <a:off x="804672" y="4041648"/>
-            <a:ext cx="1188720" cy="502920"/>
-          </a:xfrm>
-          <a:prstGeom prst="roundRect">
-            <a:avLst>
-              <a:gd name="adj" fmla="val 14545"/>
-            </a:avLst>
-          </a:prstGeom>
-          <a:solidFill>
-            <a:srgbClr val="E8A33D"/>
-          </a:solidFill>
-          <a:ln/>
-        </p:spPr>
-        <p:txBody>
-          <a:bodyPr wrap="square" rtlCol="0" anchor="ctr"/>
-          <a:lstStyle/>
-          <a:p>
-            <a:pPr algn="ctr" indent="0" marL="0">
-              <a:buNone/>
-            </a:pPr>
-            <a:r>
-              <a:rPr lang="en-US" sz="1700" b="1" dirty="0">
-                <a:solidFill>
-                  <a:srgbClr val="101722"/>
-                </a:solidFill>
-                <a:latin typeface="Courier New" pitchFamily="34" charset="0"/>
-                <a:ea typeface="Courier New" pitchFamily="34" charset="-122"/>
-                <a:cs typeface="Courier New" pitchFamily="34" charset="-120"/>
-              </a:rPr>
-              <a:t>Ex 3</a:t>
-            </a:r>
-            <a:endParaRPr lang="en-US" sz="1700" dirty="0"/>
-          </a:p>
-        </p:txBody>
-      </p:sp>
-      <p:sp>
-        <p:nvSpPr>
-          <p:cNvPr id="14" name="Text 12"/>
-          <p:cNvSpPr/>
-          <p:nvPr/>
-        </p:nvSpPr>
-        <p:spPr>
-          <a:xfrm>
-            <a:off x="2148840" y="4059936"/>
-            <a:ext cx="3474720" cy="822960"/>
+              <a:t>복사는 읽기와 쓰기를 동시에 함 → 실효 대역폭은 전송량의 2배</a:t>
+            </a:r>
+            <a:endParaRPr lang="en-US" sz="1450" dirty="0"/>
+          </a:p>
+        </p:txBody>
+      </p:sp>
+      <p:sp>
+        <p:nvSpPr>
+          <p:cNvPr id="10" name="Text 8"/>
+          <p:cNvSpPr/>
+          <p:nvPr/>
+        </p:nvSpPr>
+        <p:spPr>
+          <a:xfrm>
+            <a:off x="548640" y="5111496"/>
+            <a:ext cx="2377440" cy="548640"/>
           </a:xfrm>
           <a:prstGeom prst="rect">
             <a:avLst/>
@@ -6508,30 +10407,30 @@
               <a:buNone/>
             </a:pPr>
             <a:r>
-              <a:rPr lang="en-US" sz="1800" b="1" dirty="0">
-                <a:solidFill>
-                  <a:srgbClr val="E7EDF5"/>
+              <a:rPr lang="en-US" sz="1500" b="1" dirty="0">
+                <a:solidFill>
+                  <a:srgbClr val="E8A33D"/>
                 </a:solidFill>
                 <a:latin typeface="Malgun Gothic" pitchFamily="34" charset="0"/>
                 <a:ea typeface="Malgun Gothic" pitchFamily="34" charset="-122"/>
                 <a:cs typeface="Malgun Gothic" pitchFamily="34" charset="-120"/>
               </a:rPr>
-              <a:t>LCG 0 확인</a:t>
-            </a:r>
-            <a:endParaRPr lang="en-US" sz="1800" dirty="0"/>
-          </a:p>
-        </p:txBody>
-      </p:sp>
-      <p:sp>
-        <p:nvSpPr>
-          <p:cNvPr id="15" name="Text 13"/>
-          <p:cNvSpPr/>
-          <p:nvPr/>
-        </p:nvSpPr>
-        <p:spPr>
-          <a:xfrm>
-            <a:off x="804672" y="4937760"/>
-            <a:ext cx="4791456" cy="731520"/>
+              <a:t>진단 가치</a:t>
+            </a:r>
+            <a:endParaRPr lang="en-US" sz="1500" dirty="0"/>
+          </a:p>
+        </p:txBody>
+      </p:sp>
+      <p:sp>
+        <p:nvSpPr>
+          <p:cNvPr id="11" name="Text 9"/>
+          <p:cNvSpPr/>
+          <p:nvPr/>
+        </p:nvSpPr>
+        <p:spPr>
+          <a:xfrm>
+            <a:off x="3108960" y="5111496"/>
+            <a:ext cx="8503920" cy="548640"/>
           </a:xfrm>
           <a:prstGeom prst="rect">
             <a:avLst/>
@@ -6545,168 +10444,22 @@
           <a:p>
             <a:pPr indent="0" marL="0">
               <a:lnSpc>
-                <a:spcPct val="110000"/>
+                <a:spcPct val="105000"/>
               </a:lnSpc>
               <a:buNone/>
             </a:pPr>
             <a:r>
-              <a:rPr lang="en-US" sz="1350" dirty="0">
-                <a:solidFill>
-                  <a:srgbClr val="9FB0C4"/>
+              <a:rPr lang="en-US" sz="1450" dirty="0">
+                <a:solidFill>
+                  <a:srgbClr val="E7EDF5"/>
                 </a:solidFill>
                 <a:latin typeface="Malgun Gothic" pitchFamily="34" charset="0"/>
                 <a:ea typeface="Malgun Gothic" pitchFamily="34" charset="-122"/>
                 <a:cs typeface="Malgun Gothic" pitchFamily="34" charset="-120"/>
               </a:rPr>
-              <a:t>value가 0으로 돌아오는지 중간값 출력</a:t>
-            </a:r>
-            <a:endParaRPr lang="en-US" sz="1350" dirty="0"/>
-          </a:p>
-        </p:txBody>
-      </p:sp>
-      <p:sp>
-        <p:nvSpPr>
-          <p:cNvPr id="16" name="Shape 14"/>
-          <p:cNvSpPr/>
-          <p:nvPr/>
-        </p:nvSpPr>
-        <p:spPr>
-          <a:xfrm>
-            <a:off x="6309360" y="3840480"/>
-            <a:ext cx="5303520" cy="1920240"/>
-          </a:xfrm>
-          <a:prstGeom prst="roundRect">
-            <a:avLst>
-              <a:gd name="adj" fmla="val 3810"/>
-            </a:avLst>
-          </a:prstGeom>
-          <a:solidFill>
-            <a:srgbClr val="18212E"/>
-          </a:solidFill>
-          <a:ln/>
-        </p:spPr>
-      </p:sp>
-      <p:sp>
-        <p:nvSpPr>
-          <p:cNvPr id="17" name="Text 15"/>
-          <p:cNvSpPr/>
-          <p:nvPr/>
-        </p:nvSpPr>
-        <p:spPr>
-          <a:xfrm>
-            <a:off x="6565392" y="4041648"/>
-            <a:ext cx="1188720" cy="502920"/>
-          </a:xfrm>
-          <a:prstGeom prst="roundRect">
-            <a:avLst>
-              <a:gd name="adj" fmla="val 14545"/>
-            </a:avLst>
-          </a:prstGeom>
-          <a:solidFill>
-            <a:srgbClr val="3FB8C4"/>
-          </a:solidFill>
-          <a:ln/>
-        </p:spPr>
-        <p:txBody>
-          <a:bodyPr wrap="square" rtlCol="0" anchor="ctr"/>
-          <a:lstStyle/>
-          <a:p>
-            <a:pPr algn="ctr" indent="0" marL="0">
-              <a:buNone/>
-            </a:pPr>
-            <a:r>
-              <a:rPr lang="en-US" sz="1700" b="1" dirty="0">
-                <a:solidFill>
-                  <a:srgbClr val="101722"/>
-                </a:solidFill>
-                <a:latin typeface="Courier New" pitchFamily="34" charset="0"/>
-                <a:ea typeface="Courier New" pitchFamily="34" charset="-122"/>
-                <a:cs typeface="Courier New" pitchFamily="34" charset="-120"/>
-              </a:rPr>
-              <a:t>Ex 4</a:t>
-            </a:r>
-            <a:endParaRPr lang="en-US" sz="1700" dirty="0"/>
-          </a:p>
-        </p:txBody>
-      </p:sp>
-      <p:sp>
-        <p:nvSpPr>
-          <p:cNvPr id="18" name="Text 16"/>
-          <p:cNvSpPr/>
-          <p:nvPr/>
-        </p:nvSpPr>
-        <p:spPr>
-          <a:xfrm>
-            <a:off x="7909560" y="4059936"/>
-            <a:ext cx="3474720" cy="822960"/>
-          </a:xfrm>
-          <a:prstGeom prst="rect">
-            <a:avLst/>
-          </a:prstGeom>
-          <a:noFill/>
-          <a:ln/>
-        </p:spPr>
-        <p:txBody>
-          <a:bodyPr wrap="square" lIns="0" tIns="0" rIns="0" bIns="0" rtlCol="0" anchor="t"/>
-          <a:lstStyle/>
-          <a:p>
-            <a:pPr indent="0" marL="0">
-              <a:buNone/>
-            </a:pPr>
-            <a:r>
-              <a:rPr lang="en-US" sz="1800" b="1" dirty="0">
-                <a:solidFill>
-                  <a:srgbClr val="E7EDF5"/>
-                </a:solidFill>
-                <a:latin typeface="Malgun Gothic" pitchFamily="34" charset="0"/>
-                <a:ea typeface="Malgun Gothic" pitchFamily="34" charset="-122"/>
-                <a:cs typeface="Malgun Gothic" pitchFamily="34" charset="-120"/>
-              </a:rPr>
-              <a:t>대역폭 재보기</a:t>
-            </a:r>
-            <a:endParaRPr lang="en-US" sz="1800" dirty="0"/>
-          </a:p>
-        </p:txBody>
-      </p:sp>
-      <p:sp>
-        <p:nvSpPr>
-          <p:cNvPr id="19" name="Text 17"/>
-          <p:cNvSpPr/>
-          <p:nvPr/>
-        </p:nvSpPr>
-        <p:spPr>
-          <a:xfrm>
-            <a:off x="6565392" y="4937760"/>
-            <a:ext cx="4791456" cy="731520"/>
-          </a:xfrm>
-          <a:prstGeom prst="rect">
-            <a:avLst/>
-          </a:prstGeom>
-          <a:noFill/>
-          <a:ln/>
-        </p:spPr>
-        <p:txBody>
-          <a:bodyPr wrap="square" lIns="0" tIns="0" rIns="0" bIns="0" rtlCol="0" anchor="t"/>
-          <a:lstStyle/>
-          <a:p>
-            <a:pPr indent="0" marL="0">
-              <a:lnSpc>
-                <a:spcPct val="110000"/>
-              </a:lnSpc>
-              <a:buNone/>
-            </a:pPr>
-            <a:r>
-              <a:rPr lang="en-US" sz="1350" dirty="0">
-                <a:solidFill>
-                  <a:srgbClr val="9FB0C4"/>
-                </a:solidFill>
-                <a:latin typeface="Malgun Gothic" pitchFamily="34" charset="0"/>
-                <a:ea typeface="Malgun Gothic" pitchFamily="34" charset="-122"/>
-                <a:cs typeface="Malgun Gothic" pitchFamily="34" charset="-120"/>
-              </a:rPr>
-              <a:t>bw_iters를 바꿔 측정값 안정성 관찰</a:t>
-            </a:r>
-            <a:endParaRPr lang="en-US" sz="1350" dirty="0"/>
+              <a:t>기대치보다 크게 낮으면 그 자체가 하드웨어·드라이버 이상 신호</a:t>
+            </a:r>
+            <a:endParaRPr lang="en-US" sz="1450" dirty="0"/>
           </a:p>
         </p:txBody>
       </p:sp>
@@ -6750,47 +10503,90 @@
         </p:nvSpPr>
         <p:spPr>
           <a:xfrm>
-            <a:off x="548640" y="1463040"/>
-            <a:ext cx="10058400" cy="457200"/>
-          </a:xfrm>
-          <a:prstGeom prst="rect">
-            <a:avLst/>
-          </a:prstGeom>
-          <a:noFill/>
-          <a:ln/>
-        </p:spPr>
-        <p:txBody>
-          <a:bodyPr wrap="square" lIns="0" tIns="0" rIns="0" bIns="0" rtlCol="0" anchor="ctr"/>
-          <a:lstStyle/>
-          <a:p>
-            <a:pPr indent="0" marL="0">
-              <a:buNone/>
-            </a:pPr>
-            <a:r>
-              <a:rPr lang="en-US" sz="1800" b="1" dirty="0">
-                <a:solidFill>
-                  <a:srgbClr val="E8A33D"/>
+            <a:off x="548640" y="411480"/>
+            <a:ext cx="658368" cy="658368"/>
+          </a:xfrm>
+          <a:prstGeom prst="roundRect">
+            <a:avLst>
+              <a:gd name="adj" fmla="val 13889"/>
+            </a:avLst>
+          </a:prstGeom>
+          <a:solidFill>
+            <a:srgbClr val="3FB8C4"/>
+          </a:solidFill>
+          <a:ln/>
+        </p:spPr>
+        <p:txBody>
+          <a:bodyPr wrap="square" rtlCol="0" anchor="ctr"/>
+          <a:lstStyle/>
+          <a:p>
+            <a:pPr algn="ctr" indent="0" marL="0">
+              <a:buNone/>
+            </a:pPr>
+            <a:r>
+              <a:rPr lang="en-US" sz="2200" b="1" dirty="0">
+                <a:solidFill>
+                  <a:srgbClr val="101722"/>
+                </a:solidFill>
+                <a:latin typeface="Courier New" pitchFamily="34" charset="0"/>
+                <a:ea typeface="Courier New" pitchFamily="34" charset="-122"/>
+                <a:cs typeface="Courier New" pitchFamily="34" charset="-120"/>
+              </a:rPr>
+              <a:t>6</a:t>
+            </a:r>
+            <a:endParaRPr lang="en-US" sz="2200" dirty="0"/>
+          </a:p>
+        </p:txBody>
+      </p:sp>
+      <p:sp>
+        <p:nvSpPr>
+          <p:cNvPr id="3" name="Text 1"/>
+          <p:cNvSpPr/>
+          <p:nvPr/>
+        </p:nvSpPr>
+        <p:spPr>
+          <a:xfrm>
+            <a:off x="1371600" y="384048"/>
+            <a:ext cx="10241280" cy="713232"/>
+          </a:xfrm>
+          <a:prstGeom prst="rect">
+            <a:avLst/>
+          </a:prstGeom>
+          <a:noFill/>
+          <a:ln/>
+        </p:spPr>
+        <p:txBody>
+          <a:bodyPr wrap="square" lIns="0" tIns="0" rIns="0" bIns="0" rtlCol="0" anchor="ctr"/>
+          <a:lstStyle/>
+          <a:p>
+            <a:pPr algn="l" indent="0" marL="0">
+              <a:buNone/>
+            </a:pPr>
+            <a:r>
+              <a:rPr lang="en-US" sz="2900" b="1" dirty="0">
+                <a:solidFill>
+                  <a:srgbClr val="E7EDF5"/>
                 </a:solidFill>
                 <a:latin typeface="Malgun Gothic" pitchFamily="34" charset="0"/>
                 <a:ea typeface="Malgun Gothic" pitchFamily="34" charset="-122"/>
                 <a:cs typeface="Malgun Gothic" pitchFamily="34" charset="-120"/>
               </a:rPr>
-              <a:t>다음 세션 예고</a:t>
-            </a:r>
-            <a:endParaRPr lang="en-US" sz="1800" dirty="0"/>
-          </a:p>
-        </p:txBody>
-      </p:sp>
-      <p:sp>
-        <p:nvSpPr>
-          <p:cNvPr id="3" name="Text 1"/>
-          <p:cNvSpPr/>
-          <p:nvPr/>
-        </p:nvSpPr>
-        <p:spPr>
-          <a:xfrm>
-            <a:off x="548640" y="1965960"/>
-            <a:ext cx="10972800" cy="914400"/>
+              <a:t>대역폭은 왜 ×2인가 · 그림으로</a:t>
+            </a:r>
+            <a:endParaRPr lang="en-US" sz="2900" dirty="0"/>
+          </a:p>
+        </p:txBody>
+      </p:sp>
+      <p:sp>
+        <p:nvSpPr>
+          <p:cNvPr id="4" name="Text 2"/>
+          <p:cNvSpPr/>
+          <p:nvPr/>
+        </p:nvSpPr>
+        <p:spPr>
+          <a:xfrm>
+            <a:off x="548640" y="1371600"/>
+            <a:ext cx="11064240" cy="411480"/>
           </a:xfrm>
           <a:prstGeom prst="rect">
             <a:avLst/>
@@ -6806,30 +10602,57 @@
               <a:buNone/>
             </a:pPr>
             <a:r>
-              <a:rPr lang="en-US" sz="3700" b="1" dirty="0">
-                <a:solidFill>
-                  <a:srgbClr val="E7EDF5"/>
+              <a:rPr lang="en-US" sz="1450" dirty="0">
+                <a:solidFill>
+                  <a:srgbClr val="9FB0C4"/>
                 </a:solidFill>
                 <a:latin typeface="Malgun Gothic" pitchFamily="34" charset="0"/>
                 <a:ea typeface="Malgun Gothic" pitchFamily="34" charset="-122"/>
                 <a:cs typeface="Malgun Gothic" pitchFamily="34" charset="-120"/>
               </a:rPr>
-              <a:t>세션 5 · 객체지향 API·라이브러리·캡스톤</a:t>
-            </a:r>
-            <a:endParaRPr lang="en-US" sz="3700" dirty="0"/>
-          </a:p>
-        </p:txBody>
-      </p:sp>
-      <p:sp>
-        <p:nvSpPr>
-          <p:cNvPr id="4" name="Text 2"/>
-          <p:cNvSpPr/>
-          <p:nvPr/>
-        </p:nvSpPr>
-        <p:spPr>
-          <a:xfrm>
-            <a:off x="548640" y="3063240"/>
-            <a:ext cx="10972800" cy="1280160"/>
+              <a:t>device-to-device 복사는 같은 VRAM 안에서 읽기와 쓰기를 동시에 합니다. 그래서 실효 전송량은 2배입니다.</a:t>
+            </a:r>
+            <a:endParaRPr lang="en-US" sz="1450" dirty="0"/>
+          </a:p>
+        </p:txBody>
+      </p:sp>
+      <p:sp>
+        <p:nvSpPr>
+          <p:cNvPr id="5" name="Shape 3"/>
+          <p:cNvSpPr/>
+          <p:nvPr/>
+        </p:nvSpPr>
+        <p:spPr>
+          <a:xfrm>
+            <a:off x="1463040" y="2377440"/>
+            <a:ext cx="3291840" cy="1280160"/>
+          </a:xfrm>
+          <a:prstGeom prst="roundRect">
+            <a:avLst>
+              <a:gd name="adj" fmla="val 3571"/>
+            </a:avLst>
+          </a:prstGeom>
+          <a:solidFill>
+            <a:srgbClr val="0B1119"/>
+          </a:solidFill>
+          <a:ln w="19050">
+            <a:solidFill>
+              <a:srgbClr val="3FB8C4"/>
+            </a:solidFill>
+            <a:prstDash val="solid"/>
+          </a:ln>
+        </p:spPr>
+      </p:sp>
+      <p:sp>
+        <p:nvSpPr>
+          <p:cNvPr id="6" name="Text 4"/>
+          <p:cNvSpPr/>
+          <p:nvPr/>
+        </p:nvSpPr>
+        <p:spPr>
+          <a:xfrm>
+            <a:off x="1572768" y="2468880"/>
+            <a:ext cx="3072384" cy="365760"/>
           </a:xfrm>
           <a:prstGeom prst="rect">
             <a:avLst/>
@@ -6841,83 +10664,355 @@
           <a:bodyPr wrap="square" lIns="0" tIns="0" rIns="0" bIns="0" rtlCol="0" anchor="t"/>
           <a:lstStyle/>
           <a:p>
-            <a:pPr indent="0" marL="0">
-              <a:lnSpc>
-                <a:spcPct val="120000"/>
-              </a:lnSpc>
-              <a:buNone/>
-            </a:pPr>
-            <a:r>
-              <a:rPr lang="en-US" sz="1700" dirty="0">
-                <a:solidFill>
-                  <a:srgbClr val="E7EDF5"/>
+            <a:pPr algn="ctr" indent="0" marL="0">
+              <a:buNone/>
+            </a:pPr>
+            <a:r>
+              <a:rPr lang="en-US" sz="1400" b="1" dirty="0">
+                <a:solidFill>
+                  <a:srgbClr val="3FB8C4"/>
                 </a:solidFill>
                 <a:latin typeface="Malgun Gothic" pitchFamily="34" charset="0"/>
                 <a:ea typeface="Malgun Gothic" pitchFamily="34" charset="-122"/>
                 <a:cs typeface="Malgun Gothic" pitchFamily="34" charset="-120"/>
               </a:rPr>
-              <a:t>커널·호스트 함수를 감싼 </a:t>
-            </a:r>
-            <a:pPr indent="0" marL="0">
-              <a:lnSpc>
-                <a:spcPct val="120000"/>
-              </a:lnSpc>
-              <a:buNone/>
-            </a:pPr>
-            <a:r>
-              <a:rPr lang="en-US" sz="1700" b="1" dirty="0">
-                <a:solidFill>
-                  <a:srgbClr val="3FB8C4"/>
+              <a:t>src (원본 영역)</a:t>
+            </a:r>
+            <a:endParaRPr lang="en-US" sz="1400" dirty="0"/>
+          </a:p>
+        </p:txBody>
+      </p:sp>
+      <p:sp>
+        <p:nvSpPr>
+          <p:cNvPr id="7" name="Text 5"/>
+          <p:cNvSpPr/>
+          <p:nvPr/>
+        </p:nvSpPr>
+        <p:spPr>
+          <a:xfrm>
+            <a:off x="1572768" y="3200400"/>
+            <a:ext cx="3072384" cy="384048"/>
+          </a:xfrm>
+          <a:prstGeom prst="rect">
+            <a:avLst/>
+          </a:prstGeom>
+          <a:noFill/>
+          <a:ln/>
+        </p:spPr>
+        <p:txBody>
+          <a:bodyPr wrap="square" lIns="0" tIns="0" rIns="0" bIns="0" rtlCol="0" anchor="ctr"/>
+          <a:lstStyle/>
+          <a:p>
+            <a:pPr algn="ctr" indent="0" marL="0">
+              <a:buNone/>
+            </a:pPr>
+            <a:r>
+              <a:rPr lang="en-US" sz="1050" dirty="0">
+                <a:solidFill>
+                  <a:srgbClr val="9FB0C4"/>
+                </a:solidFill>
+                <a:latin typeface="Courier New" pitchFamily="34" charset="0"/>
+                <a:ea typeface="Courier New" pitchFamily="34" charset="-122"/>
+                <a:cs typeface="Courier New" pitchFamily="34" charset="-120"/>
+              </a:rPr>
+              <a:t>VRAM 읽기 (read)</a:t>
+            </a:r>
+            <a:endParaRPr lang="en-US" sz="1050" dirty="0"/>
+          </a:p>
+        </p:txBody>
+      </p:sp>
+      <p:sp>
+        <p:nvSpPr>
+          <p:cNvPr id="8" name="Shape 6"/>
+          <p:cNvSpPr/>
+          <p:nvPr/>
+        </p:nvSpPr>
+        <p:spPr>
+          <a:xfrm>
+            <a:off x="7406640" y="2377440"/>
+            <a:ext cx="3291840" cy="1280160"/>
+          </a:xfrm>
+          <a:prstGeom prst="roundRect">
+            <a:avLst>
+              <a:gd name="adj" fmla="val 3571"/>
+            </a:avLst>
+          </a:prstGeom>
+          <a:solidFill>
+            <a:srgbClr val="0B1119"/>
+          </a:solidFill>
+          <a:ln w="19050">
+            <a:solidFill>
+              <a:srgbClr val="E8A33D"/>
+            </a:solidFill>
+            <a:prstDash val="solid"/>
+          </a:ln>
+        </p:spPr>
+      </p:sp>
+      <p:sp>
+        <p:nvSpPr>
+          <p:cNvPr id="9" name="Text 7"/>
+          <p:cNvSpPr/>
+          <p:nvPr/>
+        </p:nvSpPr>
+        <p:spPr>
+          <a:xfrm>
+            <a:off x="7516368" y="2468880"/>
+            <a:ext cx="3072384" cy="365760"/>
+          </a:xfrm>
+          <a:prstGeom prst="rect">
+            <a:avLst/>
+          </a:prstGeom>
+          <a:noFill/>
+          <a:ln/>
+        </p:spPr>
+        <p:txBody>
+          <a:bodyPr wrap="square" lIns="0" tIns="0" rIns="0" bIns="0" rtlCol="0" anchor="t"/>
+          <a:lstStyle/>
+          <a:p>
+            <a:pPr algn="ctr" indent="0" marL="0">
+              <a:buNone/>
+            </a:pPr>
+            <a:r>
+              <a:rPr lang="en-US" sz="1400" b="1" dirty="0">
+                <a:solidFill>
+                  <a:srgbClr val="E8A33D"/>
                 </a:solidFill>
                 <a:latin typeface="Malgun Gothic" pitchFamily="34" charset="0"/>
                 <a:ea typeface="Malgun Gothic" pitchFamily="34" charset="-122"/>
                 <a:cs typeface="Malgun Gothic" pitchFamily="34" charset="-120"/>
               </a:rPr>
-              <a:t>memtestState 클래스</a:t>
-            </a:r>
-            <a:pPr indent="0" marL="0">
-              <a:lnSpc>
-                <a:spcPct val="120000"/>
-              </a:lnSpc>
-              <a:buNone/>
-            </a:pPr>
-            <a:r>
-              <a:rPr lang="en-US" sz="1700" dirty="0">
-                <a:solidFill>
-                  <a:srgbClr val="E7EDF5"/>
+              <a:t>dst (대상 영역)</a:t>
+            </a:r>
+            <a:endParaRPr lang="en-US" sz="1400" dirty="0"/>
+          </a:p>
+        </p:txBody>
+      </p:sp>
+      <p:sp>
+        <p:nvSpPr>
+          <p:cNvPr id="10" name="Text 8"/>
+          <p:cNvSpPr/>
+          <p:nvPr/>
+        </p:nvSpPr>
+        <p:spPr>
+          <a:xfrm>
+            <a:off x="7516368" y="3200400"/>
+            <a:ext cx="3072384" cy="384048"/>
+          </a:xfrm>
+          <a:prstGeom prst="rect">
+            <a:avLst/>
+          </a:prstGeom>
+          <a:noFill/>
+          <a:ln/>
+        </p:spPr>
+        <p:txBody>
+          <a:bodyPr wrap="square" lIns="0" tIns="0" rIns="0" bIns="0" rtlCol="0" anchor="ctr"/>
+          <a:lstStyle/>
+          <a:p>
+            <a:pPr algn="ctr" indent="0" marL="0">
+              <a:buNone/>
+            </a:pPr>
+            <a:r>
+              <a:rPr lang="en-US" sz="1050" dirty="0">
+                <a:solidFill>
+                  <a:srgbClr val="9FB0C4"/>
+                </a:solidFill>
+                <a:latin typeface="Courier New" pitchFamily="34" charset="0"/>
+                <a:ea typeface="Courier New" pitchFamily="34" charset="-122"/>
+                <a:cs typeface="Courier New" pitchFamily="34" charset="-120"/>
+              </a:rPr>
+              <a:t>VRAM 쓰기 (write)</a:t>
+            </a:r>
+            <a:endParaRPr lang="en-US" sz="1050" dirty="0"/>
+          </a:p>
+        </p:txBody>
+      </p:sp>
+      <p:sp>
+        <p:nvSpPr>
+          <p:cNvPr id="11" name="Shape 9"/>
+          <p:cNvSpPr/>
+          <p:nvPr/>
+        </p:nvSpPr>
+        <p:spPr>
+          <a:xfrm>
+            <a:off x="4846320" y="2788920"/>
+            <a:ext cx="2468880" cy="0"/>
+          </a:xfrm>
+          <a:prstGeom prst="line">
+            <a:avLst/>
+          </a:prstGeom>
+          <a:noFill/>
+          <a:ln w="38100">
+            <a:solidFill>
+              <a:srgbClr val="3FB8C4"/>
+            </a:solidFill>
+            <a:prstDash val="solid"/>
+            <a:tailEnd type="triangle"/>
+          </a:ln>
+        </p:spPr>
+      </p:sp>
+      <p:sp>
+        <p:nvSpPr>
+          <p:cNvPr id="12" name="Text 10"/>
+          <p:cNvSpPr/>
+          <p:nvPr/>
+        </p:nvSpPr>
+        <p:spPr>
+          <a:xfrm>
+            <a:off x="4754880" y="2395728"/>
+            <a:ext cx="2651760" cy="320040"/>
+          </a:xfrm>
+          <a:prstGeom prst="rect">
+            <a:avLst/>
+          </a:prstGeom>
+          <a:noFill/>
+          <a:ln/>
+        </p:spPr>
+        <p:txBody>
+          <a:bodyPr wrap="square" lIns="0" tIns="0" rIns="0" bIns="0" rtlCol="0" anchor="ctr"/>
+          <a:lstStyle/>
+          <a:p>
+            <a:pPr algn="ctr" indent="0" marL="0">
+              <a:buNone/>
+            </a:pPr>
+            <a:r>
+              <a:rPr lang="en-US" sz="1250" b="1" dirty="0">
+                <a:solidFill>
+                  <a:srgbClr val="3FB8C4"/>
                 </a:solidFill>
                 <a:latin typeface="Malgun Gothic" pitchFamily="34" charset="0"/>
                 <a:ea typeface="Malgun Gothic" pitchFamily="34" charset="-122"/>
                 <a:cs typeface="Malgun Gothic" pitchFamily="34" charset="-120"/>
               </a:rPr>
-              <a:t>를 보고, 내 프로그램에 라이브러리로 임베드한 뒤, 나만의 테스트를 만듭니다.</a:t>
-            </a:r>
-            <a:endParaRPr lang="en-US" sz="1700" dirty="0"/>
-          </a:p>
-        </p:txBody>
-      </p:sp>
-      <p:sp>
-        <p:nvSpPr>
-          <p:cNvPr id="5" name="Shape 3"/>
-          <p:cNvSpPr/>
-          <p:nvPr/>
-        </p:nvSpPr>
-        <p:spPr>
-          <a:xfrm>
-            <a:off x="548640" y="4937760"/>
-            <a:ext cx="8412480" cy="1005840"/>
+              <a:t>① 읽기</a:t>
+            </a:r>
+            <a:endParaRPr lang="en-US" sz="1250" dirty="0"/>
+          </a:p>
+        </p:txBody>
+      </p:sp>
+      <p:sp>
+        <p:nvSpPr>
+          <p:cNvPr id="13" name="Shape 11"/>
+          <p:cNvSpPr/>
+          <p:nvPr/>
+        </p:nvSpPr>
+        <p:spPr>
+          <a:xfrm>
+            <a:off x="4846320" y="3246120"/>
+            <a:ext cx="2468880" cy="0"/>
+          </a:xfrm>
+          <a:prstGeom prst="line">
+            <a:avLst/>
+          </a:prstGeom>
+          <a:noFill/>
+          <a:ln w="38100">
+            <a:solidFill>
+              <a:srgbClr val="E8A33D"/>
+            </a:solidFill>
+            <a:prstDash val="solid"/>
+            <a:tailEnd type="triangle"/>
+          </a:ln>
+        </p:spPr>
+      </p:sp>
+      <p:sp>
+        <p:nvSpPr>
+          <p:cNvPr id="14" name="Text 12"/>
+          <p:cNvSpPr/>
+          <p:nvPr/>
+        </p:nvSpPr>
+        <p:spPr>
+          <a:xfrm>
+            <a:off x="4754880" y="3310128"/>
+            <a:ext cx="2651760" cy="320040"/>
+          </a:xfrm>
+          <a:prstGeom prst="rect">
+            <a:avLst/>
+          </a:prstGeom>
+          <a:noFill/>
+          <a:ln/>
+        </p:spPr>
+        <p:txBody>
+          <a:bodyPr wrap="square" lIns="0" tIns="0" rIns="0" bIns="0" rtlCol="0" anchor="ctr"/>
+          <a:lstStyle/>
+          <a:p>
+            <a:pPr algn="ctr" indent="0" marL="0">
+              <a:buNone/>
+            </a:pPr>
+            <a:r>
+              <a:rPr lang="en-US" sz="1250" b="1" dirty="0">
+                <a:solidFill>
+                  <a:srgbClr val="E8A33D"/>
+                </a:solidFill>
+                <a:latin typeface="Malgun Gothic" pitchFamily="34" charset="0"/>
+                <a:ea typeface="Malgun Gothic" pitchFamily="34" charset="-122"/>
+                <a:cs typeface="Malgun Gothic" pitchFamily="34" charset="-120"/>
+              </a:rPr>
+              <a:t>② 쓰기</a:t>
+            </a:r>
+            <a:endParaRPr lang="en-US" sz="1250" dirty="0"/>
+          </a:p>
+        </p:txBody>
+      </p:sp>
+      <p:sp>
+        <p:nvSpPr>
+          <p:cNvPr id="15" name="Text 13"/>
+          <p:cNvSpPr/>
+          <p:nvPr/>
+        </p:nvSpPr>
+        <p:spPr>
+          <a:xfrm>
+            <a:off x="548640" y="3886200"/>
+            <a:ext cx="11064240" cy="365760"/>
+          </a:xfrm>
+          <a:prstGeom prst="rect">
+            <a:avLst/>
+          </a:prstGeom>
+          <a:noFill/>
+          <a:ln/>
+        </p:spPr>
+        <p:txBody>
+          <a:bodyPr wrap="square" lIns="0" tIns="0" rIns="0" bIns="0" rtlCol="0" anchor="ctr"/>
+          <a:lstStyle/>
+          <a:p>
+            <a:pPr algn="ctr" indent="0" marL="0">
+              <a:buNone/>
+            </a:pPr>
+            <a:r>
+              <a:rPr lang="en-US" sz="1300" dirty="0">
+                <a:solidFill>
+                  <a:srgbClr val="9FB0C4"/>
+                </a:solidFill>
+                <a:latin typeface="Courier New" pitchFamily="34" charset="0"/>
+                <a:ea typeface="Courier New" pitchFamily="34" charset="-122"/>
+                <a:cs typeface="Courier New" pitchFamily="34" charset="-120"/>
+              </a:rPr>
+              <a:t>cudaMemcpy(dst, src, bytes, DeviceToDevice)</a:t>
+            </a:r>
+            <a:endParaRPr lang="en-US" sz="1300" dirty="0"/>
+          </a:p>
+        </p:txBody>
+      </p:sp>
+      <p:sp>
+        <p:nvSpPr>
+          <p:cNvPr id="16" name="Shape 14"/>
+          <p:cNvSpPr/>
+          <p:nvPr/>
+        </p:nvSpPr>
+        <p:spPr>
+          <a:xfrm>
+            <a:off x="548640" y="4709160"/>
+            <a:ext cx="11064240" cy="1097280"/>
           </a:xfrm>
           <a:prstGeom prst="roundRect">
             <a:avLst>
-              <a:gd name="adj" fmla="val 4545"/>
+              <a:gd name="adj" fmla="val 6667"/>
             </a:avLst>
           </a:prstGeom>
           <a:solidFill>
-            <a:srgbClr val="0B1119"/>
+            <a:srgbClr val="241A16"/>
           </a:solidFill>
-          <a:ln w="12700">
+          <a:ln w="19050">
             <a:solidFill>
-              <a:srgbClr val="2C3A4E"/>
+              <a:srgbClr val="E8A33D"/>
             </a:solidFill>
             <a:prstDash val="solid"/>
           </a:ln>
@@ -6925,14 +11020,14 @@
       </p:sp>
       <p:sp>
         <p:nvSpPr>
-          <p:cNvPr id="6" name="Text 4"/>
-          <p:cNvSpPr/>
-          <p:nvPr/>
-        </p:nvSpPr>
-        <p:spPr>
-          <a:xfrm>
-            <a:off x="768096" y="5084064"/>
-            <a:ext cx="7973568" cy="713232"/>
+          <p:cNvPr id="17" name="Text 15"/>
+          <p:cNvSpPr/>
+          <p:nvPr/>
+        </p:nvSpPr>
+        <p:spPr>
+          <a:xfrm>
+            <a:off x="822960" y="4892040"/>
+            <a:ext cx="10515600" cy="822960"/>
           </a:xfrm>
           <a:prstGeom prst="rect">
             <a:avLst/>
@@ -6944,83 +11039,47 @@
           <a:bodyPr wrap="square" lIns="0" tIns="0" rIns="0" bIns="0" rtlCol="0" anchor="t"/>
           <a:lstStyle/>
           <a:p>
-            <a:pPr algn="l" indent="0" marL="0">
+            <a:pPr indent="0" marL="0">
               <a:lnSpc>
-                <a:spcPct val="110000"/>
+                <a:spcPct val="115000"/>
               </a:lnSpc>
-              <a:buNone/>
-            </a:pPr>
-            <a:r>
-              <a:rPr lang="en-US" sz="1250" dirty="0">
+              <a:spcAft>
+                <a:spcPts val="400"/>
+              </a:spcAft>
+              <a:buNone/>
+            </a:pPr>
+            <a:r>
+              <a:rPr lang="en-US" sz="1450" b="1" dirty="0">
                 <a:solidFill>
                   <a:srgbClr val="F2C079"/>
-                </a:solidFill>
-                <a:latin typeface="Courier New" pitchFamily="34" charset="0"/>
-                <a:ea typeface="Courier New" pitchFamily="34" charset="-122"/>
-                <a:cs typeface="Courier New" pitchFamily="34" charset="-120"/>
-              </a:rPr>
-              <a:t>memtestState tester;  tester.allocate(128);</a:t>
-            </a:r>
-            <a:endParaRPr lang="en-US" sz="1250" dirty="0"/>
-          </a:p>
-          <a:p>
-            <a:pPr algn="l" indent="0" marL="0">
-              <a:lnSpc>
-                <a:spcPct val="110000"/>
-              </a:lnSpc>
-              <a:buNone/>
-            </a:pPr>
-            <a:r>
-              <a:rPr lang="en-US" sz="1250" dirty="0">
-                <a:solidFill>
-                  <a:srgbClr val="3FB8C4"/>
-                </a:solidFill>
-                <a:latin typeface="Courier New" pitchFamily="34" charset="0"/>
-                <a:ea typeface="Courier New" pitchFamily="34" charset="-122"/>
-                <a:cs typeface="Courier New" pitchFamily="34" charset="-120"/>
-              </a:rPr>
-              <a:t>tester.gpuMovingInversionsOnesZeros(errorCount);   // 3계층 API의 꼭대기</a:t>
-            </a:r>
-            <a:endParaRPr lang="en-US" sz="1250" dirty="0"/>
-          </a:p>
-        </p:txBody>
-      </p:sp>
-      <p:sp>
-        <p:nvSpPr>
-          <p:cNvPr id="7" name="Text 5"/>
-          <p:cNvSpPr/>
-          <p:nvPr/>
-        </p:nvSpPr>
-        <p:spPr>
-          <a:xfrm>
-            <a:off x="548640" y="6126480"/>
-            <a:ext cx="10972800" cy="365760"/>
-          </a:xfrm>
-          <a:prstGeom prst="rect">
-            <a:avLst/>
-          </a:prstGeom>
-          <a:noFill/>
-          <a:ln/>
-        </p:spPr>
-        <p:txBody>
-          <a:bodyPr wrap="square" lIns="0" tIns="0" rIns="0" bIns="0" rtlCol="0" anchor="ctr"/>
-          <a:lstStyle/>
-          <a:p>
-            <a:pPr indent="0" marL="0">
-              <a:buNone/>
-            </a:pPr>
-            <a:r>
-              <a:rPr lang="en-US" sz="1350" i="1" dirty="0">
-                <a:solidFill>
-                  <a:srgbClr val="9FB0C4"/>
                 </a:solidFill>
                 <a:latin typeface="Malgun Gothic" pitchFamily="34" charset="0"/>
                 <a:ea typeface="Malgun Gothic" pitchFamily="34" charset="-122"/>
                 <a:cs typeface="Malgun Gothic" pitchFamily="34" charset="-120"/>
               </a:rPr>
-              <a:t>실습 랩 4(테스트·대역폭)를 먼저 완료하고 오세요.</a:t>
-            </a:r>
-            <a:endParaRPr lang="en-US" sz="1350" dirty="0"/>
+              <a:t>bw = 2.0 × (전송 MB × 반복) / 초</a:t>
+            </a:r>
+            <a:endParaRPr lang="en-US" sz="1450" dirty="0"/>
+          </a:p>
+          <a:p>
+            <a:pPr indent="0" marL="0">
+              <a:lnSpc>
+                <a:spcPct val="115000"/>
+              </a:lnSpc>
+              <a:buNone/>
+            </a:pPr>
+            <a:r>
+              <a:rPr lang="en-US" sz="1450" dirty="0">
+                <a:solidFill>
+                  <a:srgbClr val="E7EDF5"/>
+                </a:solidFill>
+                <a:latin typeface="Malgun Gothic" pitchFamily="34" charset="0"/>
+                <a:ea typeface="Malgun Gothic" pitchFamily="34" charset="-122"/>
+                <a:cs typeface="Malgun Gothic" pitchFamily="34" charset="-120"/>
+              </a:rPr>
+              <a:t>★ D2D memcpy는 비동기 → cudaThreadSynchronize() 후에 시간을 재야 정확합니다.</a:t>
+            </a:r>
+            <a:endParaRPr lang="en-US" sz="1450" dirty="0"/>
           </a:p>
         </p:txBody>
       </p:sp>
